--- a/tests/report_generator/integration/references/reference_portfolio-metrics.pptx
+++ b/tests/report_generator/integration/references/reference_portfolio-metrics.pptx
@@ -336,7 +336,7 @@
           <a:p>
             <a:fld id="{C1255C68-584F-174D-BB81-51BF91708794}" type="datetimeFigureOut">
               <a:rPr lang="en-US" smtClean="0"/>
-              <a:t>8/21/26</a:t>
+              <a:t>9/11/26</a:t>
             </a:fld>
             <a:endParaRPr lang="en-US"/>
           </a:p>
@@ -529,7 +529,7 @@
           <a:p>
             <a:fld id="{A1EDAAC4-819D-C544-9EA1-C73624CFD70B}" type="datetimeFigureOut">
               <a:rPr lang="en-US" smtClean="0"/>
-              <a:t>8/21/26</a:t>
+              <a:t>9/11/26</a:t>
             </a:fld>
             <a:endParaRPr lang="en-US"/>
           </a:p>
@@ -2152,351 +2152,6 @@
 </file>
 
 <file path=ppt/slideLayouts/slideLayout4.xml><?xml version="1.0" encoding="utf-8"?>
-<p:sldLayout xmlns:a="http://schemas.openxmlformats.org/drawingml/2006/main" xmlns:r="http://schemas.openxmlformats.org/officeDocument/2006/relationships" xmlns:p="http://schemas.openxmlformats.org/presentationml/2006/main" preserve="1" userDrawn="1">
-  <p:cSld name="Treemap">
-    <p:spTree>
-      <p:nvGrpSpPr>
-        <p:cNvPr id="1" name=""/>
-        <p:cNvGrpSpPr/>
-        <p:nvPr/>
-      </p:nvGrpSpPr>
-      <p:grpSpPr>
-        <a:xfrm>
-          <a:off x="0" y="0"/>
-          <a:ext cx="0" cy="0"/>
-          <a:chOff x="0" y="0"/>
-          <a:chExt cx="0" cy="0"/>
-        </a:xfrm>
-      </p:grpSpPr>
-      <p:sp>
-        <p:nvSpPr>
-          <p:cNvPr id="26" name="Text Placeholder 4">
-            <a:extLst>
-              <a:ext uri="{FF2B5EF4-FFF2-40B4-BE49-F238E27FC236}">
-                <a16:creationId xmlns:a16="http://schemas.microsoft.com/office/drawing/2014/main" id="{CC299468-581B-CC41-8897-C7E1583185E0}"/>
-              </a:ext>
-            </a:extLst>
-          </p:cNvPr>
-          <p:cNvSpPr>
-            <a:spLocks noGrp="1"/>
-          </p:cNvSpPr>
-          <p:nvPr>
-            <p:ph type="body" sz="quarter" idx="12"/>
-          </p:nvPr>
-        </p:nvSpPr>
-        <p:spPr>
-          <a:xfrm>
-            <a:off x="381600" y="129568"/>
-            <a:ext cx="145471" cy="228209"/>
-          </a:xfrm>
-          <a:prstGeom prst="rect">
-            <a:avLst/>
-          </a:prstGeom>
-          <a:gradFill>
-            <a:gsLst>
-              <a:gs pos="0">
-                <a:srgbClr val="F8C716">
-                  <a:alpha val="0"/>
-                </a:srgbClr>
-              </a:gs>
-              <a:gs pos="5000">
-                <a:srgbClr val="F9C716"/>
-              </a:gs>
-            </a:gsLst>
-            <a:lin ang="0" scaled="0"/>
-          </a:gradFill>
-        </p:spPr>
-        <p:txBody>
-          <a:bodyPr wrap="none" lIns="0" tIns="28800" rIns="144000" bIns="28800" anchor="ctr" anchorCtr="0">
-            <a:spAutoFit/>
-          </a:bodyPr>
-          <a:lstStyle>
-            <a:lvl1pPr marL="0" indent="0">
-              <a:buFont typeface="Arial" panose="020B0604020202020204" pitchFamily="34" charset="0"/>
-              <a:buNone/>
-              <a:defRPr lang="en-US" sz="1050" b="0" cap="none" spc="-30" baseline="0" dirty="0">
-                <a:solidFill>
-                  <a:srgbClr val="000000"/>
-                </a:solidFill>
-                <a:latin typeface="Azeret Mono" pitchFamily="2" charset="77"/>
-                <a:ea typeface="TheSans B6 SemiBold" charset="0"/>
-                <a:cs typeface="TheSans B6 SemiBold" charset="0"/>
-              </a:defRPr>
-            </a:lvl1pPr>
-          </a:lstStyle>
-          <a:p>
-            <a:pPr marL="0" lvl="0"/>
-            <a:r>
-              <a:rPr lang="en-US"/>
-              <a:t>Click to edit Master text styles</a:t>
-            </a:r>
-          </a:p>
-        </p:txBody>
-      </p:sp>
-      <p:sp>
-        <p:nvSpPr>
-          <p:cNvPr id="13" name="Content Placeholder 2">
-            <a:extLst>
-              <a:ext uri="{FF2B5EF4-FFF2-40B4-BE49-F238E27FC236}">
-                <a16:creationId xmlns:a16="http://schemas.microsoft.com/office/drawing/2014/main" id="{F750EC08-DA20-234C-8634-75139A014432}"/>
-              </a:ext>
-            </a:extLst>
-          </p:cNvPr>
-          <p:cNvSpPr>
-            <a:spLocks noGrp="1"/>
-          </p:cNvSpPr>
-          <p:nvPr>
-            <p:ph sz="quarter" idx="13" hasCustomPrompt="1"/>
-          </p:nvPr>
-        </p:nvSpPr>
-        <p:spPr>
-          <a:xfrm>
-            <a:off x="154800" y="1411200"/>
-            <a:ext cx="11880000" cy="4842000"/>
-          </a:xfrm>
-        </p:spPr>
-        <p:txBody>
-          <a:bodyPr>
-            <a:noAutofit/>
-          </a:bodyPr>
-          <a:lstStyle>
-            <a:lvl1pPr marL="0" indent="0">
-              <a:buFont typeface="Arial" panose="020B0604020202020204" pitchFamily="34" charset="0"/>
-              <a:buNone/>
-              <a:tabLst/>
-              <a:defRPr/>
-            </a:lvl1pPr>
-          </a:lstStyle>
-          <a:p>
-            <a:pPr lvl="0"/>
-            <a:r>
-              <a:rPr lang="en-US" dirty="0"/>
-              <a:t>Insert content text (headers in bold)</a:t>
-            </a:r>
-          </a:p>
-        </p:txBody>
-      </p:sp>
-      <p:sp>
-        <p:nvSpPr>
-          <p:cNvPr id="3" name="Tijdelijke aanduiding voor dianummer 2">
-            <a:extLst>
-              <a:ext uri="{FF2B5EF4-FFF2-40B4-BE49-F238E27FC236}">
-                <a16:creationId xmlns:a16="http://schemas.microsoft.com/office/drawing/2014/main" id="{EB15F17F-E5AA-EA4C-0903-54596120C54E}"/>
-              </a:ext>
-            </a:extLst>
-          </p:cNvPr>
-          <p:cNvSpPr>
-            <a:spLocks noGrp="1"/>
-          </p:cNvSpPr>
-          <p:nvPr>
-            <p:ph type="sldNum" sz="quarter" idx="15"/>
-          </p:nvPr>
-        </p:nvSpPr>
-        <p:spPr/>
-        <p:txBody>
-          <a:bodyPr/>
-          <a:lstStyle/>
-          <a:p>
-            <a:fld id="{E242BD21-9B61-2246-BCB1-4BE5E1BEBE1C}" type="slidenum">
-              <a:rPr lang="nl-NL" smtClean="0"/>
-              <a:pPr/>
-              <a:t>‹#›</a:t>
-            </a:fld>
-            <a:endParaRPr lang="nl-NL"/>
-          </a:p>
-        </p:txBody>
-      </p:sp>
-      <p:sp>
-        <p:nvSpPr>
-          <p:cNvPr id="4" name="Titel 3">
-            <a:extLst>
-              <a:ext uri="{FF2B5EF4-FFF2-40B4-BE49-F238E27FC236}">
-                <a16:creationId xmlns:a16="http://schemas.microsoft.com/office/drawing/2014/main" id="{2134FAEE-D5F3-DE0B-2810-BA6C3B0DE8A0}"/>
-              </a:ext>
-            </a:extLst>
-          </p:cNvPr>
-          <p:cNvSpPr>
-            <a:spLocks noGrp="1"/>
-          </p:cNvSpPr>
-          <p:nvPr>
-            <p:ph type="title" hasCustomPrompt="1"/>
-          </p:nvPr>
-        </p:nvSpPr>
-        <p:spPr/>
-        <p:txBody>
-          <a:bodyPr/>
-          <a:lstStyle/>
-          <a:p>
-            <a:r>
-              <a:rPr lang="nl-NL" dirty="0" err="1"/>
-              <a:t>Insert</a:t>
-            </a:r>
-            <a:r>
-              <a:rPr lang="nl-NL" dirty="0"/>
-              <a:t> </a:t>
-            </a:r>
-            <a:r>
-              <a:rPr lang="nl-NL" dirty="0" err="1"/>
-              <a:t>key</a:t>
-            </a:r>
-            <a:r>
-              <a:rPr lang="nl-NL" dirty="0"/>
-              <a:t> slide </a:t>
-            </a:r>
-            <a:r>
-              <a:rPr lang="nl-NL" dirty="0" err="1"/>
-              <a:t>message</a:t>
-            </a:r>
-            <a:r>
-              <a:rPr lang="nl-NL" dirty="0"/>
-              <a:t> (</a:t>
-            </a:r>
-            <a:r>
-              <a:rPr lang="nl-NL" dirty="0" err="1"/>
-              <a:t>title</a:t>
-            </a:r>
-            <a:r>
-              <a:rPr lang="nl-NL" dirty="0"/>
-              <a:t>)</a:t>
-            </a:r>
-            <a:endParaRPr lang="en-US" dirty="0"/>
-          </a:p>
-        </p:txBody>
-      </p:sp>
-      <p:sp>
-        <p:nvSpPr>
-          <p:cNvPr id="5" name="Rectangle 4">
-            <a:extLst>
-              <a:ext uri="{FF2B5EF4-FFF2-40B4-BE49-F238E27FC236}">
-                <a16:creationId xmlns:a16="http://schemas.microsoft.com/office/drawing/2014/main" id="{831DF13F-1492-BD13-A6B1-7A914E1FDC59}"/>
-              </a:ext>
-            </a:extLst>
-          </p:cNvPr>
-          <p:cNvSpPr/>
-          <p:nvPr userDrawn="1"/>
-        </p:nvSpPr>
-        <p:spPr>
-          <a:xfrm>
-            <a:off x="0" y="1390132"/>
-            <a:ext cx="12192000" cy="4927867"/>
-          </a:xfrm>
-          <a:prstGeom prst="rect">
-            <a:avLst/>
-          </a:prstGeom>
-          <a:solidFill>
-            <a:schemeClr val="bg1"/>
-          </a:solidFill>
-          <a:ln>
-            <a:noFill/>
-          </a:ln>
-          <a:effectLst>
-            <a:outerShdw blurRad="190500" dist="38100" dir="2700000" algn="tl" rotWithShape="0">
-              <a:prstClr val="black">
-                <a:alpha val="15000"/>
-              </a:prstClr>
-            </a:outerShdw>
-          </a:effectLst>
-        </p:spPr>
-        <p:style>
-          <a:lnRef idx="2">
-            <a:schemeClr val="accent1">
-              <a:shade val="50000"/>
-            </a:schemeClr>
-          </a:lnRef>
-          <a:fillRef idx="1">
-            <a:schemeClr val="accent1"/>
-          </a:fillRef>
-          <a:effectRef idx="0">
-            <a:schemeClr val="accent1"/>
-          </a:effectRef>
-          <a:fontRef idx="minor">
-            <a:schemeClr val="lt1"/>
-          </a:fontRef>
-        </p:style>
-        <p:txBody>
-          <a:bodyPr lIns="731520" tIns="72000" rIns="108000" bIns="72000" rtlCol="0" anchor="ctr"/>
-          <a:lstStyle/>
-          <a:p>
-            <a:endParaRPr lang="nl-NL" sz="1200" b="1" noProof="0" dirty="0">
-              <a:solidFill>
-                <a:schemeClr val="accent1"/>
-              </a:solidFill>
-            </a:endParaRPr>
-          </a:p>
-        </p:txBody>
-      </p:sp>
-      <p:sp>
-        <p:nvSpPr>
-          <p:cNvPr id="6" name="Footer Placeholder 4">
-            <a:extLst>
-              <a:ext uri="{FF2B5EF4-FFF2-40B4-BE49-F238E27FC236}">
-                <a16:creationId xmlns:a16="http://schemas.microsoft.com/office/drawing/2014/main" id="{BF4D9293-49E2-42AF-E099-654DFF3A9984}"/>
-              </a:ext>
-            </a:extLst>
-          </p:cNvPr>
-          <p:cNvSpPr>
-            <a:spLocks noGrp="1"/>
-          </p:cNvSpPr>
-          <p:nvPr>
-            <p:ph type="ftr" sz="quarter" idx="3"/>
-          </p:nvPr>
-        </p:nvSpPr>
-        <p:spPr>
-          <a:xfrm>
-            <a:off x="192158" y="6392274"/>
-            <a:ext cx="1763922" cy="370422"/>
-          </a:xfrm>
-          <a:prstGeom prst="rect">
-            <a:avLst/>
-          </a:prstGeom>
-        </p:spPr>
-        <p:txBody>
-          <a:bodyPr/>
-          <a:lstStyle/>
-          <a:p>
-            <a:r>
-              <a:rPr lang="nl-NL" dirty="0" err="1"/>
-              <a:t>Generated</a:t>
-            </a:r>
-            <a:r>
-              <a:rPr lang="nl-NL" dirty="0"/>
-              <a:t> </a:t>
-            </a:r>
-            <a:r>
-              <a:rPr lang="nl-NL" dirty="0" err="1"/>
-              <a:t>with</a:t>
-            </a:r>
-            <a:r>
-              <a:rPr lang="nl-NL" dirty="0"/>
-              <a:t> Sigrid</a:t>
-            </a:r>
-          </a:p>
-          <a:p>
-            <a:r>
-              <a:rPr lang="nl-NL" dirty="0" err="1"/>
-              <a:t>for</a:t>
-            </a:r>
-            <a:r>
-              <a:rPr lang="nl-NL" dirty="0"/>
-              <a:t> CUSTOMER_NAME</a:t>
-            </a:r>
-          </a:p>
-        </p:txBody>
-      </p:sp>
-    </p:spTree>
-    <p:extLst>
-      <p:ext uri="{BB962C8B-B14F-4D97-AF65-F5344CB8AC3E}">
-        <p14:creationId xmlns:p14="http://schemas.microsoft.com/office/powerpoint/2010/main" val="3381798929"/>
-      </p:ext>
-    </p:extLst>
-  </p:cSld>
-  <p:clrMapOvr>
-    <a:masterClrMapping/>
-  </p:clrMapOvr>
-</p:sldLayout>
-</file>
-
-<file path=ppt/slideLayouts/slideLayout5.xml><?xml version="1.0" encoding="utf-8"?>
 <p:sldLayout xmlns:a="http://schemas.openxmlformats.org/drawingml/2006/main" xmlns:r="http://schemas.openxmlformats.org/officeDocument/2006/relationships" xmlns:p="http://schemas.openxmlformats.org/presentationml/2006/main" userDrawn="1">
   <p:cSld name="OSH system results">
     <p:spTree>
@@ -4737,7 +4392,7 @@
 </p:sldLayout>
 </file>
 
-<file path=ppt/slideLayouts/slideLayout6.xml><?xml version="1.0" encoding="utf-8"?>
+<file path=ppt/slideLayouts/slideLayout5.xml><?xml version="1.0" encoding="utf-8"?>
 <p:sldLayout xmlns:a="http://schemas.openxmlformats.org/drawingml/2006/main" xmlns:r="http://schemas.openxmlformats.org/officeDocument/2006/relationships" xmlns:p="http://schemas.openxmlformats.org/presentationml/2006/main" preserve="1" userDrawn="1">
   <p:cSld name="General">
     <p:spTree>
@@ -6003,7 +5658,7 @@
           <p:nvPr userDrawn="1"/>
         </p:nvPicPr>
         <p:blipFill>
-          <a:blip r:embed="rId7"/>
+          <a:blip r:embed="rId6"/>
           <a:stretch>
             <a:fillRect/>
           </a:stretch>
@@ -6152,8 +5807,7 @@
     <p:sldLayoutId id="2147483669" r:id="rId1"/>
     <p:sldLayoutId id="2147483662" r:id="rId2"/>
     <p:sldLayoutId id="2147483792" r:id="rId3"/>
-    <p:sldLayoutId id="2147483776" r:id="rId4"/>
-    <p:sldLayoutId id="2147483793" r:id="rId5"/>
+    <p:sldLayoutId id="2147483793" r:id="rId4"/>
   </p:sldLayoutIdLst>
   <p:hf hdr="0" dt="0"/>
   <p:txStyles>
@@ -17316,8 +16970,8 @@
         </p:nvSpPr>
         <p:spPr>
           <a:xfrm>
-            <a:off x="381600" y="129568"/>
-            <a:ext cx="1410176" cy="228209"/>
+            <a:off x="381600" y="129599"/>
+            <a:ext cx="1410176" cy="228145"/>
           </a:xfrm>
         </p:spPr>
         <p:txBody>
@@ -17330,25 +16984,6 @@
               <a:rPr lang="en-US" dirty="0"/>
               <a:t>Maintainability</a:t>
             </a:r>
-          </a:p>
-        </p:txBody>
-      </p:sp>
-      <p:sp>
-        <p:nvSpPr>
-          <p:cNvPr id="3" name="Content Placeholder 2"/>
-          <p:cNvSpPr>
-            <a:spLocks noGrp="1"/>
-          </p:cNvSpPr>
-          <p:nvPr>
-            <p:ph sz="quarter" idx="13"/>
-          </p:nvPr>
-        </p:nvSpPr>
-        <p:spPr/>
-        <p:txBody>
-          <a:bodyPr/>
-          <a:lstStyle/>
-          <a:p>
-            <a:endParaRPr/>
           </a:p>
         </p:txBody>
       </p:sp>
@@ -17378,63 +17013,29 @@
       </p:sp>
       <p:sp>
         <p:nvSpPr>
-          <p:cNvPr id="7" name="Rectangle 6">
-            <a:extLst>
-              <a:ext uri="{FF2B5EF4-FFF2-40B4-BE49-F238E27FC236}">
-                <a16:creationId xmlns:a16="http://schemas.microsoft.com/office/drawing/2014/main" id="{4D956AE0-666A-B966-0B15-61A5E6C88F75}"/>
-              </a:ext>
-            </a:extLst>
-          </p:cNvPr>
-          <p:cNvSpPr/>
-          <p:nvPr/>
+          <p:cNvPr id="2004" name="Footer Placeholder 2004"/>
+          <p:cNvSpPr>
+            <a:spLocks noGrp="1"/>
+          </p:cNvSpPr>
+          <p:nvPr>
+            <p:ph type="ftr" sz="quarter" idx="3"/>
+          </p:nvPr>
         </p:nvSpPr>
-        <p:spPr>
-          <a:xfrm>
-            <a:off x="0" y="1390132"/>
-            <a:ext cx="12192000" cy="4927867"/>
-          </a:xfrm>
-          <a:prstGeom prst="rect">
-            <a:avLst/>
-          </a:prstGeom>
-          <a:solidFill>
-            <a:schemeClr val="bg1"/>
-          </a:solidFill>
-          <a:ln>
-            <a:noFill/>
-          </a:ln>
-          <a:effectLst>
-            <a:outerShdw blurRad="190500" dist="38100" dir="2700000" algn="tl" rotWithShape="0">
-              <a:prstClr val="black">
-                <a:alpha val="15000"/>
-              </a:prstClr>
-            </a:outerShdw>
-          </a:effectLst>
-        </p:spPr>
-        <p:style>
-          <a:lnRef idx="2">
-            <a:schemeClr val="accent1">
-              <a:shade val="50000"/>
-            </a:schemeClr>
-          </a:lnRef>
-          <a:fillRef idx="1">
-            <a:schemeClr val="accent1"/>
-          </a:fillRef>
-          <a:effectRef idx="0">
-            <a:schemeClr val="accent1"/>
-          </a:effectRef>
-          <a:fontRef idx="minor">
-            <a:schemeClr val="lt1"/>
-          </a:fontRef>
-        </p:style>
+        <p:spPr/>
         <p:txBody>
-          <a:bodyPr lIns="731520" tIns="72000" rIns="108000" bIns="72000" rtlCol="0" anchor="ctr"/>
+          <a:bodyPr/>
           <a:lstStyle/>
           <a:p>
-            <a:endParaRPr lang="nl-NL" sz="1200" b="1" noProof="0" dirty="0">
-              <a:solidFill>
-                <a:schemeClr val="accent1"/>
-              </a:solidFill>
-            </a:endParaRPr>
+            <a:r>
+              <a:rPr lang="en-US" dirty="0"/>
+              <a:t>Generated with Sigrid</a:t>
+            </a:r>
+          </a:p>
+          <a:p>
+            <a:r>
+              <a:rPr lang="en-US" dirty="0"/>
+              <a:t>for Reportgeneratordemo</a:t>
+            </a:r>
           </a:p>
         </p:txBody>
       </p:sp>
@@ -17774,39 +17375,6 @@
             <a:r>
               <a:rPr lang="en-US" sz="800" dirty="0"/>
               <a:t>★</a:t>
-            </a:r>
-          </a:p>
-        </p:txBody>
-      </p:sp>
-      <p:sp>
-        <p:nvSpPr>
-          <p:cNvPr id="2004" name="Footer Placeholder 2004"/>
-          <p:cNvSpPr>
-            <a:spLocks noGrp="1"/>
-          </p:cNvSpPr>
-          <p:nvPr>
-            <p:ph type="ftr" sz="quarter" idx="3"/>
-          </p:nvPr>
-        </p:nvSpPr>
-        <p:spPr>
-          <a:xfrm>
-            <a:off x="192088" y="6392596"/>
-            <a:ext cx="1763922" cy="370422"/>
-          </a:xfrm>
-        </p:spPr>
-        <p:txBody>
-          <a:bodyPr/>
-          <a:lstStyle/>
-          <a:p>
-            <a:r>
-              <a:rPr lang="en-US" dirty="0"/>
-              <a:t>Generated with Sigrid</a:t>
-            </a:r>
-          </a:p>
-          <a:p>
-            <a:r>
-              <a:rPr lang="en-US" dirty="0"/>
-              <a:t>for Reportgeneratordemo</a:t>
             </a:r>
           </a:p>
         </p:txBody>
@@ -17903,7 +17471,21 @@
           <a:p>
             <a:pPr indent="-283845"/>
             <a:r>
-              <a:rPr lang="en-GB" sz="1550" dirty="0">
+              <a:rPr lang="en-GB" sz="1550" dirty="0" err="1">
+                <a:ea typeface="Calibri"/>
+                <a:cs typeface="Calibri"/>
+              </a:rPr>
+              <a:t>Unit Interfacing has decreased in score by -0.01★ on average across the portfolio.</a:t>
+            </a:r>
+            <a:endParaRPr lang="en-GB" sz="1550" dirty="0">
+              <a:ea typeface="Calibri"/>
+              <a:cs typeface="Calibri"/>
+            </a:endParaRPr>
+          </a:p>
+          <a:p>
+            <a:pPr indent="-283845"/>
+            <a:r>
+              <a:rPr lang="en-GB" sz="1550" dirty="0" err="1">
                 <a:ea typeface="Calibri"/>
                 <a:cs typeface="Calibri"/>
               </a:rPr>
@@ -17988,8 +17570,8 @@
         </p:nvSpPr>
         <p:spPr>
           <a:xfrm>
-            <a:off x="381600" y="129568"/>
-            <a:ext cx="1410176" cy="228209"/>
+            <a:off x="381600" y="129599"/>
+            <a:ext cx="1410176" cy="228145"/>
           </a:xfrm>
         </p:spPr>
         <p:txBody>
@@ -18002,25 +17584,6 @@
               <a:rPr lang="en-US" dirty="0"/>
               <a:t>Maintainability</a:t>
             </a:r>
-          </a:p>
-        </p:txBody>
-      </p:sp>
-      <p:sp>
-        <p:nvSpPr>
-          <p:cNvPr id="3" name="Content Placeholder 2"/>
-          <p:cNvSpPr>
-            <a:spLocks noGrp="1"/>
-          </p:cNvSpPr>
-          <p:nvPr>
-            <p:ph sz="quarter" idx="13"/>
-          </p:nvPr>
-        </p:nvSpPr>
-        <p:spPr/>
-        <p:txBody>
-          <a:bodyPr/>
-          <a:lstStyle/>
-          <a:p>
-            <a:endParaRPr/>
           </a:p>
         </p:txBody>
       </p:sp>
@@ -18050,63 +17613,29 @@
       </p:sp>
       <p:sp>
         <p:nvSpPr>
-          <p:cNvPr id="7" name="Rectangle 6">
-            <a:extLst>
-              <a:ext uri="{FF2B5EF4-FFF2-40B4-BE49-F238E27FC236}">
-                <a16:creationId xmlns:a16="http://schemas.microsoft.com/office/drawing/2014/main" id="{4D956AE0-666A-B966-0B15-61A5E6C88F75}"/>
-              </a:ext>
-            </a:extLst>
-          </p:cNvPr>
-          <p:cNvSpPr/>
-          <p:nvPr/>
+          <p:cNvPr id="1004" name="Footer Placeholder 1004"/>
+          <p:cNvSpPr>
+            <a:spLocks noGrp="1"/>
+          </p:cNvSpPr>
+          <p:nvPr>
+            <p:ph type="ftr" sz="quarter" idx="3"/>
+          </p:nvPr>
         </p:nvSpPr>
-        <p:spPr>
-          <a:xfrm>
-            <a:off x="0" y="1390132"/>
-            <a:ext cx="12192000" cy="4927867"/>
-          </a:xfrm>
-          <a:prstGeom prst="rect">
-            <a:avLst/>
-          </a:prstGeom>
-          <a:solidFill>
-            <a:schemeClr val="bg1"/>
-          </a:solidFill>
-          <a:ln>
-            <a:noFill/>
-          </a:ln>
-          <a:effectLst>
-            <a:outerShdw blurRad="190500" dist="38100" dir="2700000" algn="tl" rotWithShape="0">
-              <a:prstClr val="black">
-                <a:alpha val="15000"/>
-              </a:prstClr>
-            </a:outerShdw>
-          </a:effectLst>
-        </p:spPr>
-        <p:style>
-          <a:lnRef idx="2">
-            <a:schemeClr val="accent1">
-              <a:shade val="50000"/>
-            </a:schemeClr>
-          </a:lnRef>
-          <a:fillRef idx="1">
-            <a:schemeClr val="accent1"/>
-          </a:fillRef>
-          <a:effectRef idx="0">
-            <a:schemeClr val="accent1"/>
-          </a:effectRef>
-          <a:fontRef idx="minor">
-            <a:schemeClr val="lt1"/>
-          </a:fontRef>
-        </p:style>
+        <p:spPr/>
         <p:txBody>
-          <a:bodyPr lIns="731520" tIns="72000" rIns="108000" bIns="72000" rtlCol="0" anchor="ctr"/>
+          <a:bodyPr/>
           <a:lstStyle/>
           <a:p>
-            <a:endParaRPr lang="nl-NL" sz="1200" b="1" noProof="0" dirty="0">
-              <a:solidFill>
-                <a:schemeClr val="accent1"/>
-              </a:solidFill>
-            </a:endParaRPr>
+            <a:r>
+              <a:rPr lang="en-US" dirty="0"/>
+              <a:t>Generated with Sigrid</a:t>
+            </a:r>
+          </a:p>
+          <a:p>
+            <a:r>
+              <a:rPr lang="en-US" dirty="0"/>
+              <a:t>for Reportgeneratordemo</a:t>
+            </a:r>
           </a:p>
         </p:txBody>
       </p:sp>
@@ -18637,39 +18166,6 @@
       </p:grpSp>
       <p:sp>
         <p:nvSpPr>
-          <p:cNvPr id="1004" name="Footer Placeholder 1004"/>
-          <p:cNvSpPr>
-            <a:spLocks noGrp="1"/>
-          </p:cNvSpPr>
-          <p:nvPr>
-            <p:ph type="ftr" sz="quarter" idx="3"/>
-          </p:nvPr>
-        </p:nvSpPr>
-        <p:spPr>
-          <a:xfrm>
-            <a:off x="192088" y="6392596"/>
-            <a:ext cx="1763922" cy="370422"/>
-          </a:xfrm>
-        </p:spPr>
-        <p:txBody>
-          <a:bodyPr/>
-          <a:lstStyle/>
-          <a:p>
-            <a:r>
-              <a:rPr lang="en-US" dirty="0"/>
-              <a:t>Generated with Sigrid</a:t>
-            </a:r>
-          </a:p>
-          <a:p>
-            <a:r>
-              <a:rPr lang="en-US" dirty="0"/>
-              <a:t>for Reportgeneratordemo</a:t>
-            </a:r>
-          </a:p>
-        </p:txBody>
-      </p:sp>
-      <p:sp>
-        <p:nvSpPr>
           <p:cNvPr id="1071" name="TextBox 1071"/>
           <p:cNvSpPr txBox="1"/>
           <p:nvPr/>
@@ -18909,8 +18405,8 @@
         </p:nvSpPr>
         <p:spPr>
           <a:xfrm>
-            <a:off x="381600" y="129568"/>
-            <a:ext cx="1410176" cy="228209"/>
+            <a:off x="381600" y="129599"/>
+            <a:ext cx="1410176" cy="228145"/>
           </a:xfrm>
         </p:spPr>
         <p:txBody>
@@ -18923,25 +18419,6 @@
               <a:rPr lang="en-US" dirty="0"/>
               <a:t>Maintainability</a:t>
             </a:r>
-          </a:p>
-        </p:txBody>
-      </p:sp>
-      <p:sp>
-        <p:nvSpPr>
-          <p:cNvPr id="3" name="Content Placeholder 2"/>
-          <p:cNvSpPr>
-            <a:spLocks noGrp="1"/>
-          </p:cNvSpPr>
-          <p:nvPr>
-            <p:ph sz="quarter" idx="13"/>
-          </p:nvPr>
-        </p:nvSpPr>
-        <p:spPr/>
-        <p:txBody>
-          <a:bodyPr/>
-          <a:lstStyle/>
-          <a:p>
-            <a:endParaRPr/>
           </a:p>
         </p:txBody>
       </p:sp>
@@ -18971,63 +18448,29 @@
       </p:sp>
       <p:sp>
         <p:nvSpPr>
-          <p:cNvPr id="7" name="Rectangle 6">
-            <a:extLst>
-              <a:ext uri="{FF2B5EF4-FFF2-40B4-BE49-F238E27FC236}">
-                <a16:creationId xmlns:a16="http://schemas.microsoft.com/office/drawing/2014/main" id="{4D956AE0-666A-B966-0B15-61A5E6C88F75}"/>
-              </a:ext>
-            </a:extLst>
-          </p:cNvPr>
-          <p:cNvSpPr/>
-          <p:nvPr/>
+          <p:cNvPr id="2004" name="Footer Placeholder 2004"/>
+          <p:cNvSpPr>
+            <a:spLocks noGrp="1"/>
+          </p:cNvSpPr>
+          <p:nvPr>
+            <p:ph type="ftr" sz="quarter" idx="3"/>
+          </p:nvPr>
         </p:nvSpPr>
-        <p:spPr>
-          <a:xfrm>
-            <a:off x="0" y="1390132"/>
-            <a:ext cx="12192000" cy="4927867"/>
-          </a:xfrm>
-          <a:prstGeom prst="rect">
-            <a:avLst/>
-          </a:prstGeom>
-          <a:solidFill>
-            <a:schemeClr val="bg1"/>
-          </a:solidFill>
-          <a:ln>
-            <a:noFill/>
-          </a:ln>
-          <a:effectLst>
-            <a:outerShdw blurRad="190500" dist="38100" dir="2700000" algn="tl" rotWithShape="0">
-              <a:prstClr val="black">
-                <a:alpha val="15000"/>
-              </a:prstClr>
-            </a:outerShdw>
-          </a:effectLst>
-        </p:spPr>
-        <p:style>
-          <a:lnRef idx="2">
-            <a:schemeClr val="accent1">
-              <a:shade val="50000"/>
-            </a:schemeClr>
-          </a:lnRef>
-          <a:fillRef idx="1">
-            <a:schemeClr val="accent1"/>
-          </a:fillRef>
-          <a:effectRef idx="0">
-            <a:schemeClr val="accent1"/>
-          </a:effectRef>
-          <a:fontRef idx="minor">
-            <a:schemeClr val="lt1"/>
-          </a:fontRef>
-        </p:style>
+        <p:spPr/>
         <p:txBody>
-          <a:bodyPr lIns="731520" tIns="72000" rIns="108000" bIns="72000" rtlCol="0" anchor="ctr"/>
+          <a:bodyPr/>
           <a:lstStyle/>
           <a:p>
-            <a:endParaRPr lang="nl-NL" sz="1200" b="1" noProof="0" dirty="0">
-              <a:solidFill>
-                <a:schemeClr val="accent1"/>
-              </a:solidFill>
-            </a:endParaRPr>
+            <a:r>
+              <a:rPr lang="en-US" dirty="0"/>
+              <a:t>Generated with Sigrid</a:t>
+            </a:r>
+          </a:p>
+          <a:p>
+            <a:r>
+              <a:rPr lang="en-US" dirty="0"/>
+              <a:t>for Reportgeneratordemo</a:t>
+            </a:r>
           </a:p>
         </p:txBody>
       </p:sp>
@@ -19367,39 +18810,6 @@
             <a:r>
               <a:rPr lang="en-US" sz="800" dirty="0"/>
               <a:t>★</a:t>
-            </a:r>
-          </a:p>
-        </p:txBody>
-      </p:sp>
-      <p:sp>
-        <p:nvSpPr>
-          <p:cNvPr id="2004" name="Footer Placeholder 2004"/>
-          <p:cNvSpPr>
-            <a:spLocks noGrp="1"/>
-          </p:cNvSpPr>
-          <p:nvPr>
-            <p:ph type="ftr" sz="quarter" idx="3"/>
-          </p:nvPr>
-        </p:nvSpPr>
-        <p:spPr>
-          <a:xfrm>
-            <a:off x="192088" y="6392596"/>
-            <a:ext cx="1763922" cy="370422"/>
-          </a:xfrm>
-        </p:spPr>
-        <p:txBody>
-          <a:bodyPr/>
-          <a:lstStyle/>
-          <a:p>
-            <a:r>
-              <a:rPr lang="en-US" dirty="0"/>
-              <a:t>Generated with Sigrid</a:t>
-            </a:r>
-          </a:p>
-          <a:p>
-            <a:r>
-              <a:rPr lang="en-US" dirty="0"/>
-              <a:t>for Reportgeneratordemo</a:t>
             </a:r>
           </a:p>
         </p:txBody>
@@ -19496,7 +18906,21 @@
           <a:p>
             <a:pPr indent="-283845"/>
             <a:r>
-              <a:rPr lang="en-GB" sz="1550" dirty="0">
+              <a:rPr lang="en-GB" sz="1550" dirty="0" err="1">
+                <a:ea typeface="Calibri"/>
+                <a:cs typeface="Calibri"/>
+              </a:rPr>
+              <a:t>Module Coupling has decreased in score by -0.01★ on average across the portfolio.</a:t>
+            </a:r>
+            <a:endParaRPr lang="en-GB" sz="1550" dirty="0">
+              <a:ea typeface="Calibri"/>
+              <a:cs typeface="Calibri"/>
+            </a:endParaRPr>
+          </a:p>
+          <a:p>
+            <a:pPr indent="-283845"/>
+            <a:r>
+              <a:rPr lang="en-GB" sz="1550" dirty="0" err="1">
                 <a:ea typeface="Calibri"/>
                 <a:cs typeface="Calibri"/>
               </a:rPr>
@@ -19581,8 +19005,8 @@
         </p:nvSpPr>
         <p:spPr>
           <a:xfrm>
-            <a:off x="381600" y="129568"/>
-            <a:ext cx="1410176" cy="228209"/>
+            <a:off x="381600" y="129599"/>
+            <a:ext cx="1410176" cy="228145"/>
           </a:xfrm>
         </p:spPr>
         <p:txBody>
@@ -19595,25 +19019,6 @@
               <a:rPr lang="en-US" dirty="0"/>
               <a:t>Maintainability</a:t>
             </a:r>
-          </a:p>
-        </p:txBody>
-      </p:sp>
-      <p:sp>
-        <p:nvSpPr>
-          <p:cNvPr id="3" name="Content Placeholder 2"/>
-          <p:cNvSpPr>
-            <a:spLocks noGrp="1"/>
-          </p:cNvSpPr>
-          <p:nvPr>
-            <p:ph sz="quarter" idx="13"/>
-          </p:nvPr>
-        </p:nvSpPr>
-        <p:spPr/>
-        <p:txBody>
-          <a:bodyPr/>
-          <a:lstStyle/>
-          <a:p>
-            <a:endParaRPr/>
           </a:p>
         </p:txBody>
       </p:sp>
@@ -19643,63 +19048,29 @@
       </p:sp>
       <p:sp>
         <p:nvSpPr>
-          <p:cNvPr id="7" name="Rectangle 6">
-            <a:extLst>
-              <a:ext uri="{FF2B5EF4-FFF2-40B4-BE49-F238E27FC236}">
-                <a16:creationId xmlns:a16="http://schemas.microsoft.com/office/drawing/2014/main" id="{4D956AE0-666A-B966-0B15-61A5E6C88F75}"/>
-              </a:ext>
-            </a:extLst>
-          </p:cNvPr>
-          <p:cNvSpPr/>
-          <p:nvPr/>
+          <p:cNvPr id="1004" name="Footer Placeholder 1004"/>
+          <p:cNvSpPr>
+            <a:spLocks noGrp="1"/>
+          </p:cNvSpPr>
+          <p:nvPr>
+            <p:ph type="ftr" sz="quarter" idx="3"/>
+          </p:nvPr>
         </p:nvSpPr>
-        <p:spPr>
-          <a:xfrm>
-            <a:off x="0" y="1390132"/>
-            <a:ext cx="12192000" cy="4927867"/>
-          </a:xfrm>
-          <a:prstGeom prst="rect">
-            <a:avLst/>
-          </a:prstGeom>
-          <a:solidFill>
-            <a:schemeClr val="bg1"/>
-          </a:solidFill>
-          <a:ln>
-            <a:noFill/>
-          </a:ln>
-          <a:effectLst>
-            <a:outerShdw blurRad="190500" dist="38100" dir="2700000" algn="tl" rotWithShape="0">
-              <a:prstClr val="black">
-                <a:alpha val="15000"/>
-              </a:prstClr>
-            </a:outerShdw>
-          </a:effectLst>
-        </p:spPr>
-        <p:style>
-          <a:lnRef idx="2">
-            <a:schemeClr val="accent1">
-              <a:shade val="50000"/>
-            </a:schemeClr>
-          </a:lnRef>
-          <a:fillRef idx="1">
-            <a:schemeClr val="accent1"/>
-          </a:fillRef>
-          <a:effectRef idx="0">
-            <a:schemeClr val="accent1"/>
-          </a:effectRef>
-          <a:fontRef idx="minor">
-            <a:schemeClr val="lt1"/>
-          </a:fontRef>
-        </p:style>
+        <p:spPr/>
         <p:txBody>
-          <a:bodyPr lIns="731520" tIns="72000" rIns="108000" bIns="72000" rtlCol="0" anchor="ctr"/>
+          <a:bodyPr/>
           <a:lstStyle/>
           <a:p>
-            <a:endParaRPr lang="nl-NL" sz="1200" b="1" noProof="0" dirty="0">
-              <a:solidFill>
-                <a:schemeClr val="accent1"/>
-              </a:solidFill>
-            </a:endParaRPr>
+            <a:r>
+              <a:rPr lang="en-US" dirty="0"/>
+              <a:t>Generated with Sigrid</a:t>
+            </a:r>
+          </a:p>
+          <a:p>
+            <a:r>
+              <a:rPr lang="en-US" dirty="0"/>
+              <a:t>for Reportgeneratordemo</a:t>
+            </a:r>
           </a:p>
         </p:txBody>
       </p:sp>
@@ -20230,39 +19601,6 @@
       </p:grpSp>
       <p:sp>
         <p:nvSpPr>
-          <p:cNvPr id="1004" name="Footer Placeholder 1004"/>
-          <p:cNvSpPr>
-            <a:spLocks noGrp="1"/>
-          </p:cNvSpPr>
-          <p:nvPr>
-            <p:ph type="ftr" sz="quarter" idx="3"/>
-          </p:nvPr>
-        </p:nvSpPr>
-        <p:spPr>
-          <a:xfrm>
-            <a:off x="192088" y="6392596"/>
-            <a:ext cx="1763922" cy="370422"/>
-          </a:xfrm>
-        </p:spPr>
-        <p:txBody>
-          <a:bodyPr/>
-          <a:lstStyle/>
-          <a:p>
-            <a:r>
-              <a:rPr lang="en-US" dirty="0"/>
-              <a:t>Generated with Sigrid</a:t>
-            </a:r>
-          </a:p>
-          <a:p>
-            <a:r>
-              <a:rPr lang="en-US" dirty="0"/>
-              <a:t>for Reportgeneratordemo</a:t>
-            </a:r>
-          </a:p>
-        </p:txBody>
-      </p:sp>
-      <p:sp>
-        <p:nvSpPr>
           <p:cNvPr id="1071" name="TextBox 1071"/>
           <p:cNvSpPr txBox="1"/>
           <p:nvPr/>
@@ -20502,8 +19840,8 @@
         </p:nvSpPr>
         <p:spPr>
           <a:xfrm>
-            <a:off x="381600" y="129568"/>
-            <a:ext cx="1410176" cy="228209"/>
+            <a:off x="381600" y="129599"/>
+            <a:ext cx="1410176" cy="228145"/>
           </a:xfrm>
         </p:spPr>
         <p:txBody>
@@ -20516,25 +19854,6 @@
               <a:rPr lang="en-US" dirty="0"/>
               <a:t>Maintainability</a:t>
             </a:r>
-          </a:p>
-        </p:txBody>
-      </p:sp>
-      <p:sp>
-        <p:nvSpPr>
-          <p:cNvPr id="3" name="Content Placeholder 2"/>
-          <p:cNvSpPr>
-            <a:spLocks noGrp="1"/>
-          </p:cNvSpPr>
-          <p:nvPr>
-            <p:ph sz="quarter" idx="13"/>
-          </p:nvPr>
-        </p:nvSpPr>
-        <p:spPr/>
-        <p:txBody>
-          <a:bodyPr/>
-          <a:lstStyle/>
-          <a:p>
-            <a:endParaRPr/>
           </a:p>
         </p:txBody>
       </p:sp>
@@ -20564,63 +19883,29 @@
       </p:sp>
       <p:sp>
         <p:nvSpPr>
-          <p:cNvPr id="7" name="Rectangle 6">
-            <a:extLst>
-              <a:ext uri="{FF2B5EF4-FFF2-40B4-BE49-F238E27FC236}">
-                <a16:creationId xmlns:a16="http://schemas.microsoft.com/office/drawing/2014/main" id="{4D956AE0-666A-B966-0B15-61A5E6C88F75}"/>
-              </a:ext>
-            </a:extLst>
-          </p:cNvPr>
-          <p:cNvSpPr/>
-          <p:nvPr/>
+          <p:cNvPr id="2004" name="Footer Placeholder 2004"/>
+          <p:cNvSpPr>
+            <a:spLocks noGrp="1"/>
+          </p:cNvSpPr>
+          <p:nvPr>
+            <p:ph type="ftr" sz="quarter" idx="3"/>
+          </p:nvPr>
         </p:nvSpPr>
-        <p:spPr>
-          <a:xfrm>
-            <a:off x="0" y="1390132"/>
-            <a:ext cx="12192000" cy="4927867"/>
-          </a:xfrm>
-          <a:prstGeom prst="rect">
-            <a:avLst/>
-          </a:prstGeom>
-          <a:solidFill>
-            <a:schemeClr val="bg1"/>
-          </a:solidFill>
-          <a:ln>
-            <a:noFill/>
-          </a:ln>
-          <a:effectLst>
-            <a:outerShdw blurRad="190500" dist="38100" dir="2700000" algn="tl" rotWithShape="0">
-              <a:prstClr val="black">
-                <a:alpha val="15000"/>
-              </a:prstClr>
-            </a:outerShdw>
-          </a:effectLst>
-        </p:spPr>
-        <p:style>
-          <a:lnRef idx="2">
-            <a:schemeClr val="accent1">
-              <a:shade val="50000"/>
-            </a:schemeClr>
-          </a:lnRef>
-          <a:fillRef idx="1">
-            <a:schemeClr val="accent1"/>
-          </a:fillRef>
-          <a:effectRef idx="0">
-            <a:schemeClr val="accent1"/>
-          </a:effectRef>
-          <a:fontRef idx="minor">
-            <a:schemeClr val="lt1"/>
-          </a:fontRef>
-        </p:style>
+        <p:spPr/>
         <p:txBody>
-          <a:bodyPr lIns="731520" tIns="72000" rIns="108000" bIns="72000" rtlCol="0" anchor="ctr"/>
+          <a:bodyPr/>
           <a:lstStyle/>
           <a:p>
-            <a:endParaRPr lang="nl-NL" sz="1200" b="1" noProof="0" dirty="0">
-              <a:solidFill>
-                <a:schemeClr val="accent1"/>
-              </a:solidFill>
-            </a:endParaRPr>
+            <a:r>
+              <a:rPr lang="en-US" dirty="0"/>
+              <a:t>Generated with Sigrid</a:t>
+            </a:r>
+          </a:p>
+          <a:p>
+            <a:r>
+              <a:rPr lang="en-US" dirty="0"/>
+              <a:t>for Reportgeneratordemo</a:t>
+            </a:r>
           </a:p>
         </p:txBody>
       </p:sp>
@@ -20960,39 +20245,6 @@
             <a:r>
               <a:rPr lang="en-US" sz="800" dirty="0"/>
               <a:t>★</a:t>
-            </a:r>
-          </a:p>
-        </p:txBody>
-      </p:sp>
-      <p:sp>
-        <p:nvSpPr>
-          <p:cNvPr id="2004" name="Footer Placeholder 2004"/>
-          <p:cNvSpPr>
-            <a:spLocks noGrp="1"/>
-          </p:cNvSpPr>
-          <p:nvPr>
-            <p:ph type="ftr" sz="quarter" idx="3"/>
-          </p:nvPr>
-        </p:nvSpPr>
-        <p:spPr>
-          <a:xfrm>
-            <a:off x="192088" y="6392596"/>
-            <a:ext cx="1763922" cy="370422"/>
-          </a:xfrm>
-        </p:spPr>
-        <p:txBody>
-          <a:bodyPr/>
-          <a:lstStyle/>
-          <a:p>
-            <a:r>
-              <a:rPr lang="en-US" dirty="0"/>
-              <a:t>Generated with Sigrid</a:t>
-            </a:r>
-          </a:p>
-          <a:p>
-            <a:r>
-              <a:rPr lang="en-US" dirty="0"/>
-              <a:t>for Reportgeneratordemo</a:t>
             </a:r>
           </a:p>
         </p:txBody>
@@ -21089,7 +20341,21 @@
           <a:p>
             <a:pPr indent="-283845"/>
             <a:r>
-              <a:rPr lang="en-GB" sz="1550" dirty="0">
+              <a:rPr lang="en-GB" sz="1550" dirty="0" err="1">
+                <a:ea typeface="Calibri"/>
+                <a:cs typeface="Calibri"/>
+              </a:rPr>
+              <a:t>Component Independence has decreased in score by -0.03★ on average across the portfolio.</a:t>
+            </a:r>
+            <a:endParaRPr lang="en-GB" sz="1550" dirty="0">
+              <a:ea typeface="Calibri"/>
+              <a:cs typeface="Calibri"/>
+            </a:endParaRPr>
+          </a:p>
+          <a:p>
+            <a:pPr indent="-283845"/>
+            <a:r>
+              <a:rPr lang="en-GB" sz="1550" dirty="0" err="1">
                 <a:ea typeface="Calibri"/>
                 <a:cs typeface="Calibri"/>
               </a:rPr>
@@ -21174,8 +20440,8 @@
         </p:nvSpPr>
         <p:spPr>
           <a:xfrm>
-            <a:off x="381600" y="129568"/>
-            <a:ext cx="1410176" cy="228209"/>
+            <a:off x="381600" y="129599"/>
+            <a:ext cx="1410176" cy="228145"/>
           </a:xfrm>
         </p:spPr>
         <p:txBody>
@@ -21188,25 +20454,6 @@
               <a:rPr lang="en-US" dirty="0"/>
               <a:t>Maintainability</a:t>
             </a:r>
-          </a:p>
-        </p:txBody>
-      </p:sp>
-      <p:sp>
-        <p:nvSpPr>
-          <p:cNvPr id="3" name="Content Placeholder 2"/>
-          <p:cNvSpPr>
-            <a:spLocks noGrp="1"/>
-          </p:cNvSpPr>
-          <p:nvPr>
-            <p:ph sz="quarter" idx="13"/>
-          </p:nvPr>
-        </p:nvSpPr>
-        <p:spPr/>
-        <p:txBody>
-          <a:bodyPr/>
-          <a:lstStyle/>
-          <a:p>
-            <a:endParaRPr/>
           </a:p>
         </p:txBody>
       </p:sp>
@@ -21236,63 +20483,29 @@
       </p:sp>
       <p:sp>
         <p:nvSpPr>
-          <p:cNvPr id="7" name="Rectangle 6">
-            <a:extLst>
-              <a:ext uri="{FF2B5EF4-FFF2-40B4-BE49-F238E27FC236}">
-                <a16:creationId xmlns:a16="http://schemas.microsoft.com/office/drawing/2014/main" id="{4D956AE0-666A-B966-0B15-61A5E6C88F75}"/>
-              </a:ext>
-            </a:extLst>
-          </p:cNvPr>
-          <p:cNvSpPr/>
-          <p:nvPr/>
+          <p:cNvPr id="1004" name="Footer Placeholder 1004"/>
+          <p:cNvSpPr>
+            <a:spLocks noGrp="1"/>
+          </p:cNvSpPr>
+          <p:nvPr>
+            <p:ph type="ftr" sz="quarter" idx="3"/>
+          </p:nvPr>
         </p:nvSpPr>
-        <p:spPr>
-          <a:xfrm>
-            <a:off x="0" y="1390132"/>
-            <a:ext cx="12192000" cy="4927867"/>
-          </a:xfrm>
-          <a:prstGeom prst="rect">
-            <a:avLst/>
-          </a:prstGeom>
-          <a:solidFill>
-            <a:schemeClr val="bg1"/>
-          </a:solidFill>
-          <a:ln>
-            <a:noFill/>
-          </a:ln>
-          <a:effectLst>
-            <a:outerShdw blurRad="190500" dist="38100" dir="2700000" algn="tl" rotWithShape="0">
-              <a:prstClr val="black">
-                <a:alpha val="15000"/>
-              </a:prstClr>
-            </a:outerShdw>
-          </a:effectLst>
-        </p:spPr>
-        <p:style>
-          <a:lnRef idx="2">
-            <a:schemeClr val="accent1">
-              <a:shade val="50000"/>
-            </a:schemeClr>
-          </a:lnRef>
-          <a:fillRef idx="1">
-            <a:schemeClr val="accent1"/>
-          </a:fillRef>
-          <a:effectRef idx="0">
-            <a:schemeClr val="accent1"/>
-          </a:effectRef>
-          <a:fontRef idx="minor">
-            <a:schemeClr val="lt1"/>
-          </a:fontRef>
-        </p:style>
+        <p:spPr/>
         <p:txBody>
-          <a:bodyPr lIns="731520" tIns="72000" rIns="108000" bIns="72000" rtlCol="0" anchor="ctr"/>
+          <a:bodyPr/>
           <a:lstStyle/>
           <a:p>
-            <a:endParaRPr lang="nl-NL" sz="1200" b="1" noProof="0" dirty="0">
-              <a:solidFill>
-                <a:schemeClr val="accent1"/>
-              </a:solidFill>
-            </a:endParaRPr>
+            <a:r>
+              <a:rPr lang="en-US" dirty="0"/>
+              <a:t>Generated with Sigrid</a:t>
+            </a:r>
+          </a:p>
+          <a:p>
+            <a:r>
+              <a:rPr lang="en-US" dirty="0"/>
+              <a:t>for Reportgeneratordemo</a:t>
+            </a:r>
           </a:p>
         </p:txBody>
       </p:sp>
@@ -21823,39 +21036,6 @@
       </p:grpSp>
       <p:sp>
         <p:nvSpPr>
-          <p:cNvPr id="1004" name="Footer Placeholder 1004"/>
-          <p:cNvSpPr>
-            <a:spLocks noGrp="1"/>
-          </p:cNvSpPr>
-          <p:nvPr>
-            <p:ph type="ftr" sz="quarter" idx="3"/>
-          </p:nvPr>
-        </p:nvSpPr>
-        <p:spPr>
-          <a:xfrm>
-            <a:off x="192088" y="6392596"/>
-            <a:ext cx="1763922" cy="370422"/>
-          </a:xfrm>
-        </p:spPr>
-        <p:txBody>
-          <a:bodyPr/>
-          <a:lstStyle/>
-          <a:p>
-            <a:r>
-              <a:rPr lang="en-US" dirty="0"/>
-              <a:t>Generated with Sigrid</a:t>
-            </a:r>
-          </a:p>
-          <a:p>
-            <a:r>
-              <a:rPr lang="en-US" dirty="0"/>
-              <a:t>for Reportgeneratordemo</a:t>
-            </a:r>
-          </a:p>
-        </p:txBody>
-      </p:sp>
-      <p:sp>
-        <p:nvSpPr>
           <p:cNvPr id="1071" name="TextBox 1071"/>
           <p:cNvSpPr txBox="1"/>
           <p:nvPr/>
@@ -22095,8 +21275,8 @@
         </p:nvSpPr>
         <p:spPr>
           <a:xfrm>
-            <a:off x="381600" y="129568"/>
-            <a:ext cx="1410176" cy="228209"/>
+            <a:off x="381600" y="129599"/>
+            <a:ext cx="1410176" cy="228145"/>
           </a:xfrm>
         </p:spPr>
         <p:txBody>
@@ -22109,25 +21289,6 @@
               <a:rPr lang="en-US" dirty="0"/>
               <a:t>Maintainability</a:t>
             </a:r>
-          </a:p>
-        </p:txBody>
-      </p:sp>
-      <p:sp>
-        <p:nvSpPr>
-          <p:cNvPr id="3" name="Content Placeholder 2"/>
-          <p:cNvSpPr>
-            <a:spLocks noGrp="1"/>
-          </p:cNvSpPr>
-          <p:nvPr>
-            <p:ph sz="quarter" idx="13"/>
-          </p:nvPr>
-        </p:nvSpPr>
-        <p:spPr/>
-        <p:txBody>
-          <a:bodyPr/>
-          <a:lstStyle/>
-          <a:p>
-            <a:endParaRPr/>
           </a:p>
         </p:txBody>
       </p:sp>
@@ -22157,63 +21318,29 @@
       </p:sp>
       <p:sp>
         <p:nvSpPr>
-          <p:cNvPr id="7" name="Rectangle 6">
-            <a:extLst>
-              <a:ext uri="{FF2B5EF4-FFF2-40B4-BE49-F238E27FC236}">
-                <a16:creationId xmlns:a16="http://schemas.microsoft.com/office/drawing/2014/main" id="{4D956AE0-666A-B966-0B15-61A5E6C88F75}"/>
-              </a:ext>
-            </a:extLst>
-          </p:cNvPr>
-          <p:cNvSpPr/>
-          <p:nvPr/>
+          <p:cNvPr id="2004" name="Footer Placeholder 2004"/>
+          <p:cNvSpPr>
+            <a:spLocks noGrp="1"/>
+          </p:cNvSpPr>
+          <p:nvPr>
+            <p:ph type="ftr" sz="quarter" idx="3"/>
+          </p:nvPr>
         </p:nvSpPr>
-        <p:spPr>
-          <a:xfrm>
-            <a:off x="0" y="1390132"/>
-            <a:ext cx="12192000" cy="4927867"/>
-          </a:xfrm>
-          <a:prstGeom prst="rect">
-            <a:avLst/>
-          </a:prstGeom>
-          <a:solidFill>
-            <a:schemeClr val="bg1"/>
-          </a:solidFill>
-          <a:ln>
-            <a:noFill/>
-          </a:ln>
-          <a:effectLst>
-            <a:outerShdw blurRad="190500" dist="38100" dir="2700000" algn="tl" rotWithShape="0">
-              <a:prstClr val="black">
-                <a:alpha val="15000"/>
-              </a:prstClr>
-            </a:outerShdw>
-          </a:effectLst>
-        </p:spPr>
-        <p:style>
-          <a:lnRef idx="2">
-            <a:schemeClr val="accent1">
-              <a:shade val="50000"/>
-            </a:schemeClr>
-          </a:lnRef>
-          <a:fillRef idx="1">
-            <a:schemeClr val="accent1"/>
-          </a:fillRef>
-          <a:effectRef idx="0">
-            <a:schemeClr val="accent1"/>
-          </a:effectRef>
-          <a:fontRef idx="minor">
-            <a:schemeClr val="lt1"/>
-          </a:fontRef>
-        </p:style>
+        <p:spPr/>
         <p:txBody>
-          <a:bodyPr lIns="731520" tIns="72000" rIns="108000" bIns="72000" rtlCol="0" anchor="ctr"/>
+          <a:bodyPr/>
           <a:lstStyle/>
           <a:p>
-            <a:endParaRPr lang="nl-NL" sz="1200" b="1" noProof="0" dirty="0">
-              <a:solidFill>
-                <a:schemeClr val="accent1"/>
-              </a:solidFill>
-            </a:endParaRPr>
+            <a:r>
+              <a:rPr lang="en-US" dirty="0"/>
+              <a:t>Generated with Sigrid</a:t>
+            </a:r>
+          </a:p>
+          <a:p>
+            <a:r>
+              <a:rPr lang="en-US" dirty="0"/>
+              <a:t>for Reportgeneratordemo</a:t>
+            </a:r>
           </a:p>
         </p:txBody>
       </p:sp>
@@ -22553,39 +21680,6 @@
             <a:r>
               <a:rPr lang="en-US" sz="800" dirty="0"/>
               <a:t>★</a:t>
-            </a:r>
-          </a:p>
-        </p:txBody>
-      </p:sp>
-      <p:sp>
-        <p:nvSpPr>
-          <p:cNvPr id="2004" name="Footer Placeholder 2004"/>
-          <p:cNvSpPr>
-            <a:spLocks noGrp="1"/>
-          </p:cNvSpPr>
-          <p:nvPr>
-            <p:ph type="ftr" sz="quarter" idx="3"/>
-          </p:nvPr>
-        </p:nvSpPr>
-        <p:spPr>
-          <a:xfrm>
-            <a:off x="192088" y="6392596"/>
-            <a:ext cx="1763922" cy="370422"/>
-          </a:xfrm>
-        </p:spPr>
-        <p:txBody>
-          <a:bodyPr/>
-          <a:lstStyle/>
-          <a:p>
-            <a:r>
-              <a:rPr lang="en-US" dirty="0"/>
-              <a:t>Generated with Sigrid</a:t>
-            </a:r>
-          </a:p>
-          <a:p>
-            <a:r>
-              <a:rPr lang="en-US" dirty="0"/>
-              <a:t>for Reportgeneratordemo</a:t>
             </a:r>
           </a:p>
         </p:txBody>
@@ -22682,7 +21776,21 @@
           <a:p>
             <a:pPr indent="-283845"/>
             <a:r>
-              <a:rPr lang="en-GB" sz="1550" dirty="0">
+              <a:rPr lang="en-GB" sz="1550" dirty="0" err="1">
+                <a:ea typeface="Calibri"/>
+                <a:cs typeface="Calibri"/>
+              </a:rPr>
+              <a:t>Component Entanglement has decreased in score by -0.18★ on average across the portfolio.</a:t>
+            </a:r>
+            <a:endParaRPr lang="en-GB" sz="1550" dirty="0">
+              <a:ea typeface="Calibri"/>
+              <a:cs typeface="Calibri"/>
+            </a:endParaRPr>
+          </a:p>
+          <a:p>
+            <a:pPr indent="-283845"/>
+            <a:r>
+              <a:rPr lang="en-GB" sz="1550" dirty="0" err="1">
                 <a:ea typeface="Calibri"/>
                 <a:cs typeface="Calibri"/>
               </a:rPr>
@@ -23035,8 +22143,8 @@
         </p:nvSpPr>
         <p:spPr>
           <a:xfrm>
-            <a:off x="381600" y="129568"/>
-            <a:ext cx="1157222" cy="228209"/>
+            <a:off x="381600" y="129599"/>
+            <a:ext cx="1156940" cy="228145"/>
           </a:xfrm>
         </p:spPr>
         <p:txBody>
@@ -23049,25 +22157,6 @@
               <a:rPr lang="en-US" dirty="0"/>
               <a:t>Architecture</a:t>
             </a:r>
-          </a:p>
-        </p:txBody>
-      </p:sp>
-      <p:sp>
-        <p:nvSpPr>
-          <p:cNvPr id="3" name="Content Placeholder 2"/>
-          <p:cNvSpPr>
-            <a:spLocks noGrp="1"/>
-          </p:cNvSpPr>
-          <p:nvPr>
-            <p:ph sz="quarter" idx="13"/>
-          </p:nvPr>
-        </p:nvSpPr>
-        <p:spPr/>
-        <p:txBody>
-          <a:bodyPr/>
-          <a:lstStyle/>
-          <a:p>
-            <a:endParaRPr/>
           </a:p>
         </p:txBody>
       </p:sp>
@@ -23097,63 +22186,29 @@
       </p:sp>
       <p:sp>
         <p:nvSpPr>
-          <p:cNvPr id="7" name="Rectangle 6">
-            <a:extLst>
-              <a:ext uri="{FF2B5EF4-FFF2-40B4-BE49-F238E27FC236}">
-                <a16:creationId xmlns:a16="http://schemas.microsoft.com/office/drawing/2014/main" id="{4D956AE0-666A-B966-0B15-61A5E6C88F75}"/>
-              </a:ext>
-            </a:extLst>
-          </p:cNvPr>
-          <p:cNvSpPr/>
-          <p:nvPr/>
+          <p:cNvPr id="1004" name="Footer Placeholder 1004"/>
+          <p:cNvSpPr>
+            <a:spLocks noGrp="1"/>
+          </p:cNvSpPr>
+          <p:nvPr>
+            <p:ph type="ftr" sz="quarter" idx="3"/>
+          </p:nvPr>
         </p:nvSpPr>
-        <p:spPr>
-          <a:xfrm>
-            <a:off x="0" y="1390132"/>
-            <a:ext cx="12192000" cy="4927867"/>
-          </a:xfrm>
-          <a:prstGeom prst="rect">
-            <a:avLst/>
-          </a:prstGeom>
-          <a:solidFill>
-            <a:schemeClr val="bg1"/>
-          </a:solidFill>
-          <a:ln>
-            <a:noFill/>
-          </a:ln>
-          <a:effectLst>
-            <a:outerShdw blurRad="190500" dist="38100" dir="2700000" algn="tl" rotWithShape="0">
-              <a:prstClr val="black">
-                <a:alpha val="15000"/>
-              </a:prstClr>
-            </a:outerShdw>
-          </a:effectLst>
-        </p:spPr>
-        <p:style>
-          <a:lnRef idx="2">
-            <a:schemeClr val="accent1">
-              <a:shade val="50000"/>
-            </a:schemeClr>
-          </a:lnRef>
-          <a:fillRef idx="1">
-            <a:schemeClr val="accent1"/>
-          </a:fillRef>
-          <a:effectRef idx="0">
-            <a:schemeClr val="accent1"/>
-          </a:effectRef>
-          <a:fontRef idx="minor">
-            <a:schemeClr val="lt1"/>
-          </a:fontRef>
-        </p:style>
+        <p:spPr/>
         <p:txBody>
-          <a:bodyPr lIns="731520" tIns="72000" rIns="108000" bIns="72000" rtlCol="0" anchor="ctr"/>
+          <a:bodyPr/>
           <a:lstStyle/>
           <a:p>
-            <a:endParaRPr lang="nl-NL" sz="1200" b="1" noProof="0" dirty="0">
-              <a:solidFill>
-                <a:schemeClr val="accent1"/>
-              </a:solidFill>
-            </a:endParaRPr>
+            <a:r>
+              <a:rPr lang="en-US" dirty="0"/>
+              <a:t>Generated with Sigrid</a:t>
+            </a:r>
+          </a:p>
+          <a:p>
+            <a:r>
+              <a:rPr lang="en-US" dirty="0"/>
+              <a:t>for Reportgeneratordemo</a:t>
+            </a:r>
           </a:p>
         </p:txBody>
       </p:sp>
@@ -23684,39 +22739,6 @@
       </p:grpSp>
       <p:sp>
         <p:nvSpPr>
-          <p:cNvPr id="1004" name="Footer Placeholder 1004"/>
-          <p:cNvSpPr>
-            <a:spLocks noGrp="1"/>
-          </p:cNvSpPr>
-          <p:nvPr>
-            <p:ph type="ftr" sz="quarter" idx="3"/>
-          </p:nvPr>
-        </p:nvSpPr>
-        <p:spPr>
-          <a:xfrm>
-            <a:off x="192088" y="6392596"/>
-            <a:ext cx="1763922" cy="370422"/>
-          </a:xfrm>
-        </p:spPr>
-        <p:txBody>
-          <a:bodyPr/>
-          <a:lstStyle/>
-          <a:p>
-            <a:r>
-              <a:rPr lang="en-US" dirty="0"/>
-              <a:t>Generated with Sigrid</a:t>
-            </a:r>
-          </a:p>
-          <a:p>
-            <a:r>
-              <a:rPr lang="en-US" dirty="0"/>
-              <a:t>for Reportgeneratordemo</a:t>
-            </a:r>
-          </a:p>
-        </p:txBody>
-      </p:sp>
-      <p:sp>
-        <p:nvSpPr>
           <p:cNvPr id="1071" name="TextBox 1071"/>
           <p:cNvSpPr txBox="1"/>
           <p:nvPr/>
@@ -23956,8 +22978,8 @@
         </p:nvSpPr>
         <p:spPr>
           <a:xfrm>
-            <a:off x="381600" y="129568"/>
-            <a:ext cx="1157222" cy="228209"/>
+            <a:off x="381600" y="129599"/>
+            <a:ext cx="1156940" cy="228145"/>
           </a:xfrm>
         </p:spPr>
         <p:txBody>
@@ -23970,25 +22992,6 @@
               <a:rPr lang="en-US" dirty="0"/>
               <a:t>Architecture</a:t>
             </a:r>
-          </a:p>
-        </p:txBody>
-      </p:sp>
-      <p:sp>
-        <p:nvSpPr>
-          <p:cNvPr id="3" name="Content Placeholder 2"/>
-          <p:cNvSpPr>
-            <a:spLocks noGrp="1"/>
-          </p:cNvSpPr>
-          <p:nvPr>
-            <p:ph sz="quarter" idx="13"/>
-          </p:nvPr>
-        </p:nvSpPr>
-        <p:spPr/>
-        <p:txBody>
-          <a:bodyPr/>
-          <a:lstStyle/>
-          <a:p>
-            <a:endParaRPr/>
           </a:p>
         </p:txBody>
       </p:sp>
@@ -24018,63 +23021,29 @@
       </p:sp>
       <p:sp>
         <p:nvSpPr>
-          <p:cNvPr id="7" name="Rectangle 6">
-            <a:extLst>
-              <a:ext uri="{FF2B5EF4-FFF2-40B4-BE49-F238E27FC236}">
-                <a16:creationId xmlns:a16="http://schemas.microsoft.com/office/drawing/2014/main" id="{4D956AE0-666A-B966-0B15-61A5E6C88F75}"/>
-              </a:ext>
-            </a:extLst>
-          </p:cNvPr>
-          <p:cNvSpPr/>
-          <p:nvPr/>
+          <p:cNvPr id="2004" name="Footer Placeholder 2004"/>
+          <p:cNvSpPr>
+            <a:spLocks noGrp="1"/>
+          </p:cNvSpPr>
+          <p:nvPr>
+            <p:ph type="ftr" sz="quarter" idx="3"/>
+          </p:nvPr>
         </p:nvSpPr>
-        <p:spPr>
-          <a:xfrm>
-            <a:off x="0" y="1390132"/>
-            <a:ext cx="12192000" cy="4927867"/>
-          </a:xfrm>
-          <a:prstGeom prst="rect">
-            <a:avLst/>
-          </a:prstGeom>
-          <a:solidFill>
-            <a:schemeClr val="bg1"/>
-          </a:solidFill>
-          <a:ln>
-            <a:noFill/>
-          </a:ln>
-          <a:effectLst>
-            <a:outerShdw blurRad="190500" dist="38100" dir="2700000" algn="tl" rotWithShape="0">
-              <a:prstClr val="black">
-                <a:alpha val="15000"/>
-              </a:prstClr>
-            </a:outerShdw>
-          </a:effectLst>
-        </p:spPr>
-        <p:style>
-          <a:lnRef idx="2">
-            <a:schemeClr val="accent1">
-              <a:shade val="50000"/>
-            </a:schemeClr>
-          </a:lnRef>
-          <a:fillRef idx="1">
-            <a:schemeClr val="accent1"/>
-          </a:fillRef>
-          <a:effectRef idx="0">
-            <a:schemeClr val="accent1"/>
-          </a:effectRef>
-          <a:fontRef idx="minor">
-            <a:schemeClr val="lt1"/>
-          </a:fontRef>
-        </p:style>
+        <p:spPr/>
         <p:txBody>
-          <a:bodyPr lIns="731520" tIns="72000" rIns="108000" bIns="72000" rtlCol="0" anchor="ctr"/>
+          <a:bodyPr/>
           <a:lstStyle/>
           <a:p>
-            <a:endParaRPr lang="nl-NL" sz="1200" b="1" noProof="0" dirty="0">
-              <a:solidFill>
-                <a:schemeClr val="accent1"/>
-              </a:solidFill>
-            </a:endParaRPr>
+            <a:r>
+              <a:rPr lang="en-US" dirty="0"/>
+              <a:t>Generated with Sigrid</a:t>
+            </a:r>
+          </a:p>
+          <a:p>
+            <a:r>
+              <a:rPr lang="en-US" dirty="0"/>
+              <a:t>for Reportgeneratordemo</a:t>
+            </a:r>
           </a:p>
         </p:txBody>
       </p:sp>
@@ -24414,39 +23383,6 @@
             <a:r>
               <a:rPr lang="en-US" sz="800" dirty="0"/>
               <a:t>★</a:t>
-            </a:r>
-          </a:p>
-        </p:txBody>
-      </p:sp>
-      <p:sp>
-        <p:nvSpPr>
-          <p:cNvPr id="2004" name="Footer Placeholder 2004"/>
-          <p:cNvSpPr>
-            <a:spLocks noGrp="1"/>
-          </p:cNvSpPr>
-          <p:nvPr>
-            <p:ph type="ftr" sz="quarter" idx="3"/>
-          </p:nvPr>
-        </p:nvSpPr>
-        <p:spPr>
-          <a:xfrm>
-            <a:off x="192088" y="6392596"/>
-            <a:ext cx="1763922" cy="370422"/>
-          </a:xfrm>
-        </p:spPr>
-        <p:txBody>
-          <a:bodyPr/>
-          <a:lstStyle/>
-          <a:p>
-            <a:r>
-              <a:rPr lang="en-US" dirty="0"/>
-              <a:t>Generated with Sigrid</a:t>
-            </a:r>
-          </a:p>
-          <a:p>
-            <a:r>
-              <a:rPr lang="en-US" dirty="0"/>
-              <a:t>for Reportgeneratordemo</a:t>
             </a:r>
           </a:p>
         </p:txBody>
@@ -24890,8 +23826,8 @@
         </p:nvSpPr>
         <p:spPr>
           <a:xfrm>
-            <a:off x="381600" y="129568"/>
-            <a:ext cx="1157222" cy="228209"/>
+            <a:off x="381600" y="129599"/>
+            <a:ext cx="1156940" cy="228145"/>
           </a:xfrm>
         </p:spPr>
         <p:txBody>
@@ -24904,25 +23840,6 @@
               <a:rPr lang="en-US" dirty="0"/>
               <a:t>Architecture</a:t>
             </a:r>
-          </a:p>
-        </p:txBody>
-      </p:sp>
-      <p:sp>
-        <p:nvSpPr>
-          <p:cNvPr id="3" name="Content Placeholder 2"/>
-          <p:cNvSpPr>
-            <a:spLocks noGrp="1"/>
-          </p:cNvSpPr>
-          <p:nvPr>
-            <p:ph sz="quarter" idx="13"/>
-          </p:nvPr>
-        </p:nvSpPr>
-        <p:spPr/>
-        <p:txBody>
-          <a:bodyPr/>
-          <a:lstStyle/>
-          <a:p>
-            <a:endParaRPr/>
           </a:p>
         </p:txBody>
       </p:sp>
@@ -24952,63 +23869,29 @@
       </p:sp>
       <p:sp>
         <p:nvSpPr>
-          <p:cNvPr id="7" name="Rectangle 6">
-            <a:extLst>
-              <a:ext uri="{FF2B5EF4-FFF2-40B4-BE49-F238E27FC236}">
-                <a16:creationId xmlns:a16="http://schemas.microsoft.com/office/drawing/2014/main" id="{4D956AE0-666A-B966-0B15-61A5E6C88F75}"/>
-              </a:ext>
-            </a:extLst>
-          </p:cNvPr>
-          <p:cNvSpPr/>
-          <p:nvPr/>
+          <p:cNvPr id="1004" name="Footer Placeholder 1004"/>
+          <p:cNvSpPr>
+            <a:spLocks noGrp="1"/>
+          </p:cNvSpPr>
+          <p:nvPr>
+            <p:ph type="ftr" sz="quarter" idx="3"/>
+          </p:nvPr>
         </p:nvSpPr>
-        <p:spPr>
-          <a:xfrm>
-            <a:off x="0" y="1390132"/>
-            <a:ext cx="12192000" cy="4927867"/>
-          </a:xfrm>
-          <a:prstGeom prst="rect">
-            <a:avLst/>
-          </a:prstGeom>
-          <a:solidFill>
-            <a:schemeClr val="bg1"/>
-          </a:solidFill>
-          <a:ln>
-            <a:noFill/>
-          </a:ln>
-          <a:effectLst>
-            <a:outerShdw blurRad="190500" dist="38100" dir="2700000" algn="tl" rotWithShape="0">
-              <a:prstClr val="black">
-                <a:alpha val="15000"/>
-              </a:prstClr>
-            </a:outerShdw>
-          </a:effectLst>
-        </p:spPr>
-        <p:style>
-          <a:lnRef idx="2">
-            <a:schemeClr val="accent1">
-              <a:shade val="50000"/>
-            </a:schemeClr>
-          </a:lnRef>
-          <a:fillRef idx="1">
-            <a:schemeClr val="accent1"/>
-          </a:fillRef>
-          <a:effectRef idx="0">
-            <a:schemeClr val="accent1"/>
-          </a:effectRef>
-          <a:fontRef idx="minor">
-            <a:schemeClr val="lt1"/>
-          </a:fontRef>
-        </p:style>
+        <p:spPr/>
         <p:txBody>
-          <a:bodyPr lIns="731520" tIns="72000" rIns="108000" bIns="72000" rtlCol="0" anchor="ctr"/>
+          <a:bodyPr/>
           <a:lstStyle/>
           <a:p>
-            <a:endParaRPr lang="nl-NL" sz="1200" b="1" noProof="0" dirty="0">
-              <a:solidFill>
-                <a:schemeClr val="accent1"/>
-              </a:solidFill>
-            </a:endParaRPr>
+            <a:r>
+              <a:rPr lang="en-US" dirty="0"/>
+              <a:t>Generated with Sigrid</a:t>
+            </a:r>
+          </a:p>
+          <a:p>
+            <a:r>
+              <a:rPr lang="en-US" dirty="0"/>
+              <a:t>for Reportgeneratordemo</a:t>
+            </a:r>
           </a:p>
         </p:txBody>
       </p:sp>
@@ -25539,39 +24422,6 @@
       </p:grpSp>
       <p:sp>
         <p:nvSpPr>
-          <p:cNvPr id="1004" name="Footer Placeholder 1004"/>
-          <p:cNvSpPr>
-            <a:spLocks noGrp="1"/>
-          </p:cNvSpPr>
-          <p:nvPr>
-            <p:ph type="ftr" sz="quarter" idx="3"/>
-          </p:nvPr>
-        </p:nvSpPr>
-        <p:spPr>
-          <a:xfrm>
-            <a:off x="192088" y="6392596"/>
-            <a:ext cx="1763922" cy="370422"/>
-          </a:xfrm>
-        </p:spPr>
-        <p:txBody>
-          <a:bodyPr/>
-          <a:lstStyle/>
-          <a:p>
-            <a:r>
-              <a:rPr lang="en-US" dirty="0"/>
-              <a:t>Generated with Sigrid</a:t>
-            </a:r>
-          </a:p>
-          <a:p>
-            <a:r>
-              <a:rPr lang="en-US" dirty="0"/>
-              <a:t>for Reportgeneratordemo</a:t>
-            </a:r>
-          </a:p>
-        </p:txBody>
-      </p:sp>
-      <p:sp>
-        <p:nvSpPr>
           <p:cNvPr id="1071" name="TextBox 1071"/>
           <p:cNvSpPr txBox="1"/>
           <p:nvPr/>
@@ -25811,8 +24661,8 @@
         </p:nvSpPr>
         <p:spPr>
           <a:xfrm>
-            <a:off x="381600" y="129568"/>
-            <a:ext cx="1157222" cy="228209"/>
+            <a:off x="381600" y="129599"/>
+            <a:ext cx="1156940" cy="228145"/>
           </a:xfrm>
         </p:spPr>
         <p:txBody>
@@ -25825,25 +24675,6 @@
               <a:rPr lang="en-US" dirty="0"/>
               <a:t>Architecture</a:t>
             </a:r>
-          </a:p>
-        </p:txBody>
-      </p:sp>
-      <p:sp>
-        <p:nvSpPr>
-          <p:cNvPr id="3" name="Content Placeholder 2"/>
-          <p:cNvSpPr>
-            <a:spLocks noGrp="1"/>
-          </p:cNvSpPr>
-          <p:nvPr>
-            <p:ph sz="quarter" idx="13"/>
-          </p:nvPr>
-        </p:nvSpPr>
-        <p:spPr/>
-        <p:txBody>
-          <a:bodyPr/>
-          <a:lstStyle/>
-          <a:p>
-            <a:endParaRPr/>
           </a:p>
         </p:txBody>
       </p:sp>
@@ -25873,63 +24704,29 @@
       </p:sp>
       <p:sp>
         <p:nvSpPr>
-          <p:cNvPr id="7" name="Rectangle 6">
-            <a:extLst>
-              <a:ext uri="{FF2B5EF4-FFF2-40B4-BE49-F238E27FC236}">
-                <a16:creationId xmlns:a16="http://schemas.microsoft.com/office/drawing/2014/main" id="{4D956AE0-666A-B966-0B15-61A5E6C88F75}"/>
-              </a:ext>
-            </a:extLst>
-          </p:cNvPr>
-          <p:cNvSpPr/>
-          <p:nvPr/>
+          <p:cNvPr id="2004" name="Footer Placeholder 2004"/>
+          <p:cNvSpPr>
+            <a:spLocks noGrp="1"/>
+          </p:cNvSpPr>
+          <p:nvPr>
+            <p:ph type="ftr" sz="quarter" idx="3"/>
+          </p:nvPr>
         </p:nvSpPr>
-        <p:spPr>
-          <a:xfrm>
-            <a:off x="0" y="1390132"/>
-            <a:ext cx="12192000" cy="4927867"/>
-          </a:xfrm>
-          <a:prstGeom prst="rect">
-            <a:avLst/>
-          </a:prstGeom>
-          <a:solidFill>
-            <a:schemeClr val="bg1"/>
-          </a:solidFill>
-          <a:ln>
-            <a:noFill/>
-          </a:ln>
-          <a:effectLst>
-            <a:outerShdw blurRad="190500" dist="38100" dir="2700000" algn="tl" rotWithShape="0">
-              <a:prstClr val="black">
-                <a:alpha val="15000"/>
-              </a:prstClr>
-            </a:outerShdw>
-          </a:effectLst>
-        </p:spPr>
-        <p:style>
-          <a:lnRef idx="2">
-            <a:schemeClr val="accent1">
-              <a:shade val="50000"/>
-            </a:schemeClr>
-          </a:lnRef>
-          <a:fillRef idx="1">
-            <a:schemeClr val="accent1"/>
-          </a:fillRef>
-          <a:effectRef idx="0">
-            <a:schemeClr val="accent1"/>
-          </a:effectRef>
-          <a:fontRef idx="minor">
-            <a:schemeClr val="lt1"/>
-          </a:fontRef>
-        </p:style>
+        <p:spPr/>
         <p:txBody>
-          <a:bodyPr lIns="731520" tIns="72000" rIns="108000" bIns="72000" rtlCol="0" anchor="ctr"/>
+          <a:bodyPr/>
           <a:lstStyle/>
           <a:p>
-            <a:endParaRPr lang="nl-NL" sz="1200" b="1" noProof="0" dirty="0">
-              <a:solidFill>
-                <a:schemeClr val="accent1"/>
-              </a:solidFill>
-            </a:endParaRPr>
+            <a:r>
+              <a:rPr lang="en-US" dirty="0"/>
+              <a:t>Generated with Sigrid</a:t>
+            </a:r>
+          </a:p>
+          <a:p>
+            <a:r>
+              <a:rPr lang="en-US" dirty="0"/>
+              <a:t>for Reportgeneratordemo</a:t>
+            </a:r>
           </a:p>
         </p:txBody>
       </p:sp>
@@ -26269,39 +25066,6 @@
             <a:r>
               <a:rPr lang="en-US" sz="800" dirty="0"/>
               <a:t>★</a:t>
-            </a:r>
-          </a:p>
-        </p:txBody>
-      </p:sp>
-      <p:sp>
-        <p:nvSpPr>
-          <p:cNvPr id="2004" name="Footer Placeholder 2004"/>
-          <p:cNvSpPr>
-            <a:spLocks noGrp="1"/>
-          </p:cNvSpPr>
-          <p:nvPr>
-            <p:ph type="ftr" sz="quarter" idx="3"/>
-          </p:nvPr>
-        </p:nvSpPr>
-        <p:spPr>
-          <a:xfrm>
-            <a:off x="192088" y="6392596"/>
-            <a:ext cx="1763922" cy="370422"/>
-          </a:xfrm>
-        </p:spPr>
-        <p:txBody>
-          <a:bodyPr/>
-          <a:lstStyle/>
-          <a:p>
-            <a:r>
-              <a:rPr lang="en-US" dirty="0"/>
-              <a:t>Generated with Sigrid</a:t>
-            </a:r>
-          </a:p>
-          <a:p>
-            <a:r>
-              <a:rPr lang="en-US" dirty="0"/>
-              <a:t>for Reportgeneratordemo</a:t>
             </a:r>
           </a:p>
         </p:txBody>
@@ -26483,8 +25247,8 @@
         </p:nvSpPr>
         <p:spPr>
           <a:xfrm>
-            <a:off x="381600" y="129568"/>
-            <a:ext cx="1157222" cy="228209"/>
+            <a:off x="381600" y="129599"/>
+            <a:ext cx="1156940" cy="228145"/>
           </a:xfrm>
         </p:spPr>
         <p:txBody>
@@ -26497,25 +25261,6 @@
               <a:rPr lang="en-US" dirty="0"/>
               <a:t>Architecture</a:t>
             </a:r>
-          </a:p>
-        </p:txBody>
-      </p:sp>
-      <p:sp>
-        <p:nvSpPr>
-          <p:cNvPr id="3" name="Content Placeholder 2"/>
-          <p:cNvSpPr>
-            <a:spLocks noGrp="1"/>
-          </p:cNvSpPr>
-          <p:nvPr>
-            <p:ph sz="quarter" idx="13"/>
-          </p:nvPr>
-        </p:nvSpPr>
-        <p:spPr/>
-        <p:txBody>
-          <a:bodyPr/>
-          <a:lstStyle/>
-          <a:p>
-            <a:endParaRPr/>
           </a:p>
         </p:txBody>
       </p:sp>
@@ -26545,63 +25290,29 @@
       </p:sp>
       <p:sp>
         <p:nvSpPr>
-          <p:cNvPr id="7" name="Rectangle 6">
-            <a:extLst>
-              <a:ext uri="{FF2B5EF4-FFF2-40B4-BE49-F238E27FC236}">
-                <a16:creationId xmlns:a16="http://schemas.microsoft.com/office/drawing/2014/main" id="{4D956AE0-666A-B966-0B15-61A5E6C88F75}"/>
-              </a:ext>
-            </a:extLst>
-          </p:cNvPr>
-          <p:cNvSpPr/>
-          <p:nvPr/>
+          <p:cNvPr id="1004" name="Footer Placeholder 1004"/>
+          <p:cNvSpPr>
+            <a:spLocks noGrp="1"/>
+          </p:cNvSpPr>
+          <p:nvPr>
+            <p:ph type="ftr" sz="quarter" idx="3"/>
+          </p:nvPr>
         </p:nvSpPr>
-        <p:spPr>
-          <a:xfrm>
-            <a:off x="0" y="1390132"/>
-            <a:ext cx="12192000" cy="4927867"/>
-          </a:xfrm>
-          <a:prstGeom prst="rect">
-            <a:avLst/>
-          </a:prstGeom>
-          <a:solidFill>
-            <a:schemeClr val="bg1"/>
-          </a:solidFill>
-          <a:ln>
-            <a:noFill/>
-          </a:ln>
-          <a:effectLst>
-            <a:outerShdw blurRad="190500" dist="38100" dir="2700000" algn="tl" rotWithShape="0">
-              <a:prstClr val="black">
-                <a:alpha val="15000"/>
-              </a:prstClr>
-            </a:outerShdw>
-          </a:effectLst>
-        </p:spPr>
-        <p:style>
-          <a:lnRef idx="2">
-            <a:schemeClr val="accent1">
-              <a:shade val="50000"/>
-            </a:schemeClr>
-          </a:lnRef>
-          <a:fillRef idx="1">
-            <a:schemeClr val="accent1"/>
-          </a:fillRef>
-          <a:effectRef idx="0">
-            <a:schemeClr val="accent1"/>
-          </a:effectRef>
-          <a:fontRef idx="minor">
-            <a:schemeClr val="lt1"/>
-          </a:fontRef>
-        </p:style>
+        <p:spPr/>
         <p:txBody>
-          <a:bodyPr lIns="731520" tIns="72000" rIns="108000" bIns="72000" rtlCol="0" anchor="ctr"/>
+          <a:bodyPr/>
           <a:lstStyle/>
           <a:p>
-            <a:endParaRPr lang="nl-NL" sz="1200" b="1" noProof="0" dirty="0">
-              <a:solidFill>
-                <a:schemeClr val="accent1"/>
-              </a:solidFill>
-            </a:endParaRPr>
+            <a:r>
+              <a:rPr lang="en-US" dirty="0"/>
+              <a:t>Generated with Sigrid</a:t>
+            </a:r>
+          </a:p>
+          <a:p>
+            <a:r>
+              <a:rPr lang="en-US" dirty="0"/>
+              <a:t>for Reportgeneratordemo</a:t>
+            </a:r>
           </a:p>
         </p:txBody>
       </p:sp>
@@ -27132,39 +25843,6 @@
       </p:grpSp>
       <p:sp>
         <p:nvSpPr>
-          <p:cNvPr id="1004" name="Footer Placeholder 1004"/>
-          <p:cNvSpPr>
-            <a:spLocks noGrp="1"/>
-          </p:cNvSpPr>
-          <p:nvPr>
-            <p:ph type="ftr" sz="quarter" idx="3"/>
-          </p:nvPr>
-        </p:nvSpPr>
-        <p:spPr>
-          <a:xfrm>
-            <a:off x="192088" y="6392596"/>
-            <a:ext cx="1763922" cy="370422"/>
-          </a:xfrm>
-        </p:spPr>
-        <p:txBody>
-          <a:bodyPr/>
-          <a:lstStyle/>
-          <a:p>
-            <a:r>
-              <a:rPr lang="en-US" dirty="0"/>
-              <a:t>Generated with Sigrid</a:t>
-            </a:r>
-          </a:p>
-          <a:p>
-            <a:r>
-              <a:rPr lang="en-US" dirty="0"/>
-              <a:t>for Reportgeneratordemo</a:t>
-            </a:r>
-          </a:p>
-        </p:txBody>
-      </p:sp>
-      <p:sp>
-        <p:nvSpPr>
           <p:cNvPr id="1071" name="TextBox 1071"/>
           <p:cNvSpPr txBox="1"/>
           <p:nvPr/>
@@ -27404,8 +26082,8 @@
         </p:nvSpPr>
         <p:spPr>
           <a:xfrm>
-            <a:off x="381600" y="129568"/>
-            <a:ext cx="1157222" cy="228209"/>
+            <a:off x="381600" y="129599"/>
+            <a:ext cx="1156940" cy="228145"/>
           </a:xfrm>
         </p:spPr>
         <p:txBody>
@@ -27418,25 +26096,6 @@
               <a:rPr lang="en-US" dirty="0"/>
               <a:t>Architecture</a:t>
             </a:r>
-          </a:p>
-        </p:txBody>
-      </p:sp>
-      <p:sp>
-        <p:nvSpPr>
-          <p:cNvPr id="3" name="Content Placeholder 2"/>
-          <p:cNvSpPr>
-            <a:spLocks noGrp="1"/>
-          </p:cNvSpPr>
-          <p:nvPr>
-            <p:ph sz="quarter" idx="13"/>
-          </p:nvPr>
-        </p:nvSpPr>
-        <p:spPr/>
-        <p:txBody>
-          <a:bodyPr/>
-          <a:lstStyle/>
-          <a:p>
-            <a:endParaRPr/>
           </a:p>
         </p:txBody>
       </p:sp>
@@ -27466,63 +26125,29 @@
       </p:sp>
       <p:sp>
         <p:nvSpPr>
-          <p:cNvPr id="7" name="Rectangle 6">
-            <a:extLst>
-              <a:ext uri="{FF2B5EF4-FFF2-40B4-BE49-F238E27FC236}">
-                <a16:creationId xmlns:a16="http://schemas.microsoft.com/office/drawing/2014/main" id="{4D956AE0-666A-B966-0B15-61A5E6C88F75}"/>
-              </a:ext>
-            </a:extLst>
-          </p:cNvPr>
-          <p:cNvSpPr/>
-          <p:nvPr/>
+          <p:cNvPr id="2004" name="Footer Placeholder 2004"/>
+          <p:cNvSpPr>
+            <a:spLocks noGrp="1"/>
+          </p:cNvSpPr>
+          <p:nvPr>
+            <p:ph type="ftr" sz="quarter" idx="3"/>
+          </p:nvPr>
         </p:nvSpPr>
-        <p:spPr>
-          <a:xfrm>
-            <a:off x="0" y="1390132"/>
-            <a:ext cx="12192000" cy="4927867"/>
-          </a:xfrm>
-          <a:prstGeom prst="rect">
-            <a:avLst/>
-          </a:prstGeom>
-          <a:solidFill>
-            <a:schemeClr val="bg1"/>
-          </a:solidFill>
-          <a:ln>
-            <a:noFill/>
-          </a:ln>
-          <a:effectLst>
-            <a:outerShdw blurRad="190500" dist="38100" dir="2700000" algn="tl" rotWithShape="0">
-              <a:prstClr val="black">
-                <a:alpha val="15000"/>
-              </a:prstClr>
-            </a:outerShdw>
-          </a:effectLst>
-        </p:spPr>
-        <p:style>
-          <a:lnRef idx="2">
-            <a:schemeClr val="accent1">
-              <a:shade val="50000"/>
-            </a:schemeClr>
-          </a:lnRef>
-          <a:fillRef idx="1">
-            <a:schemeClr val="accent1"/>
-          </a:fillRef>
-          <a:effectRef idx="0">
-            <a:schemeClr val="accent1"/>
-          </a:effectRef>
-          <a:fontRef idx="minor">
-            <a:schemeClr val="lt1"/>
-          </a:fontRef>
-        </p:style>
+        <p:spPr/>
         <p:txBody>
-          <a:bodyPr lIns="731520" tIns="72000" rIns="108000" bIns="72000" rtlCol="0" anchor="ctr"/>
+          <a:bodyPr/>
           <a:lstStyle/>
           <a:p>
-            <a:endParaRPr lang="nl-NL" sz="1200" b="1" noProof="0" dirty="0">
-              <a:solidFill>
-                <a:schemeClr val="accent1"/>
-              </a:solidFill>
-            </a:endParaRPr>
+            <a:r>
+              <a:rPr lang="en-US" dirty="0"/>
+              <a:t>Generated with Sigrid</a:t>
+            </a:r>
+          </a:p>
+          <a:p>
+            <a:r>
+              <a:rPr lang="en-US" dirty="0"/>
+              <a:t>for Reportgeneratordemo</a:t>
+            </a:r>
           </a:p>
         </p:txBody>
       </p:sp>
@@ -27862,39 +26487,6 @@
             <a:r>
               <a:rPr lang="en-US" sz="800" dirty="0"/>
               <a:t>★</a:t>
-            </a:r>
-          </a:p>
-        </p:txBody>
-      </p:sp>
-      <p:sp>
-        <p:nvSpPr>
-          <p:cNvPr id="2004" name="Footer Placeholder 2004"/>
-          <p:cNvSpPr>
-            <a:spLocks noGrp="1"/>
-          </p:cNvSpPr>
-          <p:nvPr>
-            <p:ph type="ftr" sz="quarter" idx="3"/>
-          </p:nvPr>
-        </p:nvSpPr>
-        <p:spPr>
-          <a:xfrm>
-            <a:off x="192088" y="6392596"/>
-            <a:ext cx="1763922" cy="370422"/>
-          </a:xfrm>
-        </p:spPr>
-        <p:txBody>
-          <a:bodyPr/>
-          <a:lstStyle/>
-          <a:p>
-            <a:r>
-              <a:rPr lang="en-US" dirty="0"/>
-              <a:t>Generated with Sigrid</a:t>
-            </a:r>
-          </a:p>
-          <a:p>
-            <a:r>
-              <a:rPr lang="en-US" dirty="0"/>
-              <a:t>for Reportgeneratordemo</a:t>
             </a:r>
           </a:p>
         </p:txBody>
@@ -28076,8 +26668,8 @@
         </p:nvSpPr>
         <p:spPr>
           <a:xfrm>
-            <a:off x="381600" y="129568"/>
-            <a:ext cx="1157222" cy="228209"/>
+            <a:off x="381600" y="129599"/>
+            <a:ext cx="1156940" cy="228145"/>
           </a:xfrm>
         </p:spPr>
         <p:txBody>
@@ -28090,25 +26682,7 @@
               <a:rPr dirty="0"/>
               <a:t>Architecture</a:t>
             </a:r>
-          </a:p>
-        </p:txBody>
-      </p:sp>
-      <p:sp>
-        <p:nvSpPr>
-          <p:cNvPr id="3" name="Content Placeholder 2"/>
-          <p:cNvSpPr>
-            <a:spLocks noGrp="1"/>
-          </p:cNvSpPr>
-          <p:nvPr>
-            <p:ph sz="quarter" idx="13"/>
-          </p:nvPr>
-        </p:nvSpPr>
-        <p:spPr/>
-        <p:txBody>
-          <a:bodyPr/>
-          <a:lstStyle/>
-          <a:p>
-            <a:endParaRPr/>
+            <a:endParaRPr lang="en-US" dirty="0"/>
           </a:p>
         </p:txBody>
       </p:sp>
@@ -28138,63 +26712,29 @@
       </p:sp>
       <p:sp>
         <p:nvSpPr>
-          <p:cNvPr id="7" name="Rectangle 6">
-            <a:extLst>
-              <a:ext uri="{FF2B5EF4-FFF2-40B4-BE49-F238E27FC236}">
-                <a16:creationId xmlns:a16="http://schemas.microsoft.com/office/drawing/2014/main" id="{4D956AE0-666A-B966-0B15-61A5E6C88F75}"/>
-              </a:ext>
-            </a:extLst>
-          </p:cNvPr>
-          <p:cNvSpPr/>
-          <p:nvPr/>
+          <p:cNvPr id="1004" name="Footer Placeholder 1004"/>
+          <p:cNvSpPr>
+            <a:spLocks noGrp="1"/>
+          </p:cNvSpPr>
+          <p:nvPr>
+            <p:ph type="ftr" sz="quarter" idx="3"/>
+          </p:nvPr>
         </p:nvSpPr>
-        <p:spPr>
-          <a:xfrm>
-            <a:off x="0" y="1390132"/>
-            <a:ext cx="12192000" cy="4927867"/>
-          </a:xfrm>
-          <a:prstGeom prst="rect">
-            <a:avLst/>
-          </a:prstGeom>
-          <a:solidFill>
-            <a:schemeClr val="bg1"/>
-          </a:solidFill>
-          <a:ln>
-            <a:noFill/>
-          </a:ln>
-          <a:effectLst>
-            <a:outerShdw blurRad="190500" dist="38100" dir="2700000" algn="tl" rotWithShape="0">
-              <a:prstClr val="black">
-                <a:alpha val="15000"/>
-              </a:prstClr>
-            </a:outerShdw>
-          </a:effectLst>
-        </p:spPr>
-        <p:style>
-          <a:lnRef idx="2">
-            <a:schemeClr val="accent1">
-              <a:shade val="50000"/>
-            </a:schemeClr>
-          </a:lnRef>
-          <a:fillRef idx="1">
-            <a:schemeClr val="accent1"/>
-          </a:fillRef>
-          <a:effectRef idx="0">
-            <a:schemeClr val="accent1"/>
-          </a:effectRef>
-          <a:fontRef idx="minor">
-            <a:schemeClr val="lt1"/>
-          </a:fontRef>
-        </p:style>
+        <p:spPr/>
         <p:txBody>
-          <a:bodyPr lIns="731520" tIns="72000" rIns="108000" bIns="72000" rtlCol="0" anchor="ctr"/>
+          <a:bodyPr/>
           <a:lstStyle/>
           <a:p>
-            <a:endParaRPr lang="nl-NL" sz="1200" b="1" noProof="0" dirty="0">
-              <a:solidFill>
-                <a:schemeClr val="accent1"/>
-              </a:solidFill>
-            </a:endParaRPr>
+            <a:r>
+              <a:rPr lang="en-US" dirty="0"/>
+              <a:t>Generated with Sigrid</a:t>
+            </a:r>
+          </a:p>
+          <a:p>
+            <a:r>
+              <a:rPr lang="en-US" dirty="0"/>
+              <a:t>for Reportgeneratordemo</a:t>
+            </a:r>
           </a:p>
         </p:txBody>
       </p:sp>
@@ -28725,39 +27265,6 @@
       </p:grpSp>
       <p:sp>
         <p:nvSpPr>
-          <p:cNvPr id="1004" name="Footer Placeholder 1004"/>
-          <p:cNvSpPr>
-            <a:spLocks noGrp="1"/>
-          </p:cNvSpPr>
-          <p:nvPr>
-            <p:ph type="ftr" sz="quarter" idx="3"/>
-          </p:nvPr>
-        </p:nvSpPr>
-        <p:spPr>
-          <a:xfrm>
-            <a:off x="192088" y="6392596"/>
-            <a:ext cx="1763922" cy="370422"/>
-          </a:xfrm>
-        </p:spPr>
-        <p:txBody>
-          <a:bodyPr/>
-          <a:lstStyle/>
-          <a:p>
-            <a:r>
-              <a:rPr lang="en-US" dirty="0"/>
-              <a:t>Generated with Sigrid</a:t>
-            </a:r>
-          </a:p>
-          <a:p>
-            <a:r>
-              <a:rPr lang="en-US" dirty="0"/>
-              <a:t>for Reportgeneratordemo</a:t>
-            </a:r>
-          </a:p>
-        </p:txBody>
-      </p:sp>
-      <p:sp>
-        <p:nvSpPr>
           <p:cNvPr id="1071" name="TextBox 1071"/>
           <p:cNvSpPr txBox="1"/>
           <p:nvPr/>
@@ -28997,8 +27504,8 @@
         </p:nvSpPr>
         <p:spPr>
           <a:xfrm>
-            <a:off x="381600" y="129568"/>
-            <a:ext cx="1157222" cy="228209"/>
+            <a:off x="381600" y="129599"/>
+            <a:ext cx="1156940" cy="228145"/>
           </a:xfrm>
         </p:spPr>
         <p:txBody>
@@ -29011,25 +27518,6 @@
               <a:rPr lang="en-US" dirty="0"/>
               <a:t>Architecture</a:t>
             </a:r>
-          </a:p>
-        </p:txBody>
-      </p:sp>
-      <p:sp>
-        <p:nvSpPr>
-          <p:cNvPr id="3" name="Content Placeholder 2"/>
-          <p:cNvSpPr>
-            <a:spLocks noGrp="1"/>
-          </p:cNvSpPr>
-          <p:nvPr>
-            <p:ph sz="quarter" idx="13"/>
-          </p:nvPr>
-        </p:nvSpPr>
-        <p:spPr/>
-        <p:txBody>
-          <a:bodyPr/>
-          <a:lstStyle/>
-          <a:p>
-            <a:endParaRPr/>
           </a:p>
         </p:txBody>
       </p:sp>
@@ -29059,63 +27547,29 @@
       </p:sp>
       <p:sp>
         <p:nvSpPr>
-          <p:cNvPr id="7" name="Rectangle 6">
-            <a:extLst>
-              <a:ext uri="{FF2B5EF4-FFF2-40B4-BE49-F238E27FC236}">
-                <a16:creationId xmlns:a16="http://schemas.microsoft.com/office/drawing/2014/main" id="{4D956AE0-666A-B966-0B15-61A5E6C88F75}"/>
-              </a:ext>
-            </a:extLst>
-          </p:cNvPr>
-          <p:cNvSpPr/>
-          <p:nvPr/>
+          <p:cNvPr id="2004" name="Footer Placeholder 2004"/>
+          <p:cNvSpPr>
+            <a:spLocks noGrp="1"/>
+          </p:cNvSpPr>
+          <p:nvPr>
+            <p:ph type="ftr" sz="quarter" idx="3"/>
+          </p:nvPr>
         </p:nvSpPr>
-        <p:spPr>
-          <a:xfrm>
-            <a:off x="0" y="1390132"/>
-            <a:ext cx="12192000" cy="4927867"/>
-          </a:xfrm>
-          <a:prstGeom prst="rect">
-            <a:avLst/>
-          </a:prstGeom>
-          <a:solidFill>
-            <a:schemeClr val="bg1"/>
-          </a:solidFill>
-          <a:ln>
-            <a:noFill/>
-          </a:ln>
-          <a:effectLst>
-            <a:outerShdw blurRad="190500" dist="38100" dir="2700000" algn="tl" rotWithShape="0">
-              <a:prstClr val="black">
-                <a:alpha val="15000"/>
-              </a:prstClr>
-            </a:outerShdw>
-          </a:effectLst>
-        </p:spPr>
-        <p:style>
-          <a:lnRef idx="2">
-            <a:schemeClr val="accent1">
-              <a:shade val="50000"/>
-            </a:schemeClr>
-          </a:lnRef>
-          <a:fillRef idx="1">
-            <a:schemeClr val="accent1"/>
-          </a:fillRef>
-          <a:effectRef idx="0">
-            <a:schemeClr val="accent1"/>
-          </a:effectRef>
-          <a:fontRef idx="minor">
-            <a:schemeClr val="lt1"/>
-          </a:fontRef>
-        </p:style>
+        <p:spPr/>
         <p:txBody>
-          <a:bodyPr lIns="731520" tIns="72000" rIns="108000" bIns="72000" rtlCol="0" anchor="ctr"/>
+          <a:bodyPr/>
           <a:lstStyle/>
           <a:p>
-            <a:endParaRPr lang="nl-NL" sz="1200" b="1" noProof="0" dirty="0">
-              <a:solidFill>
-                <a:schemeClr val="accent1"/>
-              </a:solidFill>
-            </a:endParaRPr>
+            <a:r>
+              <a:rPr lang="en-US" dirty="0"/>
+              <a:t>Generated with Sigrid</a:t>
+            </a:r>
+          </a:p>
+          <a:p>
+            <a:r>
+              <a:rPr lang="en-US" dirty="0"/>
+              <a:t>for Reportgeneratordemo</a:t>
+            </a:r>
           </a:p>
         </p:txBody>
       </p:sp>
@@ -29455,39 +27909,6 @@
             <a:r>
               <a:rPr lang="en-US" sz="800" dirty="0"/>
               <a:t>★</a:t>
-            </a:r>
-          </a:p>
-        </p:txBody>
-      </p:sp>
-      <p:sp>
-        <p:nvSpPr>
-          <p:cNvPr id="2004" name="Footer Placeholder 2004"/>
-          <p:cNvSpPr>
-            <a:spLocks noGrp="1"/>
-          </p:cNvSpPr>
-          <p:nvPr>
-            <p:ph type="ftr" sz="quarter" idx="3"/>
-          </p:nvPr>
-        </p:nvSpPr>
-        <p:spPr>
-          <a:xfrm>
-            <a:off x="192088" y="6392596"/>
-            <a:ext cx="1763922" cy="370422"/>
-          </a:xfrm>
-        </p:spPr>
-        <p:txBody>
-          <a:bodyPr/>
-          <a:lstStyle/>
-          <a:p>
-            <a:r>
-              <a:rPr lang="en-US" dirty="0"/>
-              <a:t>Generated with Sigrid</a:t>
-            </a:r>
-          </a:p>
-          <a:p>
-            <a:r>
-              <a:rPr lang="en-US" dirty="0"/>
-              <a:t>for Reportgeneratordemo</a:t>
             </a:r>
           </a:p>
         </p:txBody>
@@ -29669,8 +28090,8 @@
         </p:nvSpPr>
         <p:spPr>
           <a:xfrm>
-            <a:off x="381600" y="129568"/>
-            <a:ext cx="1157222" cy="228209"/>
+            <a:off x="381600" y="129599"/>
+            <a:ext cx="1156940" cy="228145"/>
           </a:xfrm>
         </p:spPr>
         <p:txBody>
@@ -29683,25 +28104,6 @@
               <a:rPr lang="en-US" dirty="0"/>
               <a:t>Architecture</a:t>
             </a:r>
-          </a:p>
-        </p:txBody>
-      </p:sp>
-      <p:sp>
-        <p:nvSpPr>
-          <p:cNvPr id="3" name="Content Placeholder 2"/>
-          <p:cNvSpPr>
-            <a:spLocks noGrp="1"/>
-          </p:cNvSpPr>
-          <p:nvPr>
-            <p:ph sz="quarter" idx="13"/>
-          </p:nvPr>
-        </p:nvSpPr>
-        <p:spPr/>
-        <p:txBody>
-          <a:bodyPr/>
-          <a:lstStyle/>
-          <a:p>
-            <a:endParaRPr/>
           </a:p>
         </p:txBody>
       </p:sp>
@@ -29731,63 +28133,29 @@
       </p:sp>
       <p:sp>
         <p:nvSpPr>
-          <p:cNvPr id="7" name="Rectangle 6">
-            <a:extLst>
-              <a:ext uri="{FF2B5EF4-FFF2-40B4-BE49-F238E27FC236}">
-                <a16:creationId xmlns:a16="http://schemas.microsoft.com/office/drawing/2014/main" id="{4D956AE0-666A-B966-0B15-61A5E6C88F75}"/>
-              </a:ext>
-            </a:extLst>
-          </p:cNvPr>
-          <p:cNvSpPr/>
-          <p:nvPr/>
+          <p:cNvPr id="1004" name="Footer Placeholder 1004"/>
+          <p:cNvSpPr>
+            <a:spLocks noGrp="1"/>
+          </p:cNvSpPr>
+          <p:nvPr>
+            <p:ph type="ftr" sz="quarter" idx="3"/>
+          </p:nvPr>
         </p:nvSpPr>
-        <p:spPr>
-          <a:xfrm>
-            <a:off x="0" y="1390132"/>
-            <a:ext cx="12192000" cy="4927867"/>
-          </a:xfrm>
-          <a:prstGeom prst="rect">
-            <a:avLst/>
-          </a:prstGeom>
-          <a:solidFill>
-            <a:schemeClr val="bg1"/>
-          </a:solidFill>
-          <a:ln>
-            <a:noFill/>
-          </a:ln>
-          <a:effectLst>
-            <a:outerShdw blurRad="190500" dist="38100" dir="2700000" algn="tl" rotWithShape="0">
-              <a:prstClr val="black">
-                <a:alpha val="15000"/>
-              </a:prstClr>
-            </a:outerShdw>
-          </a:effectLst>
-        </p:spPr>
-        <p:style>
-          <a:lnRef idx="2">
-            <a:schemeClr val="accent1">
-              <a:shade val="50000"/>
-            </a:schemeClr>
-          </a:lnRef>
-          <a:fillRef idx="1">
-            <a:schemeClr val="accent1"/>
-          </a:fillRef>
-          <a:effectRef idx="0">
-            <a:schemeClr val="accent1"/>
-          </a:effectRef>
-          <a:fontRef idx="minor">
-            <a:schemeClr val="lt1"/>
-          </a:fontRef>
-        </p:style>
+        <p:spPr/>
         <p:txBody>
-          <a:bodyPr lIns="731520" tIns="72000" rIns="108000" bIns="72000" rtlCol="0" anchor="ctr"/>
+          <a:bodyPr/>
           <a:lstStyle/>
           <a:p>
-            <a:endParaRPr lang="nl-NL" sz="1200" b="1" noProof="0" dirty="0">
-              <a:solidFill>
-                <a:schemeClr val="accent1"/>
-              </a:solidFill>
-            </a:endParaRPr>
+            <a:r>
+              <a:rPr lang="en-US" dirty="0"/>
+              <a:t>Generated with Sigrid</a:t>
+            </a:r>
+          </a:p>
+          <a:p>
+            <a:r>
+              <a:rPr lang="en-US" dirty="0"/>
+              <a:t>for Reportgeneratordemo</a:t>
+            </a:r>
           </a:p>
         </p:txBody>
       </p:sp>
@@ -30318,39 +28686,6 @@
       </p:grpSp>
       <p:sp>
         <p:nvSpPr>
-          <p:cNvPr id="1004" name="Footer Placeholder 1004"/>
-          <p:cNvSpPr>
-            <a:spLocks noGrp="1"/>
-          </p:cNvSpPr>
-          <p:nvPr>
-            <p:ph type="ftr" sz="quarter" idx="3"/>
-          </p:nvPr>
-        </p:nvSpPr>
-        <p:spPr>
-          <a:xfrm>
-            <a:off x="192088" y="6392596"/>
-            <a:ext cx="1763922" cy="370422"/>
-          </a:xfrm>
-        </p:spPr>
-        <p:txBody>
-          <a:bodyPr/>
-          <a:lstStyle/>
-          <a:p>
-            <a:r>
-              <a:rPr lang="en-US" dirty="0"/>
-              <a:t>Generated with Sigrid</a:t>
-            </a:r>
-          </a:p>
-          <a:p>
-            <a:r>
-              <a:rPr lang="en-US" dirty="0"/>
-              <a:t>for Reportgeneratordemo</a:t>
-            </a:r>
-          </a:p>
-        </p:txBody>
-      </p:sp>
-      <p:sp>
-        <p:nvSpPr>
           <p:cNvPr id="1071" name="TextBox 1071"/>
           <p:cNvSpPr txBox="1"/>
           <p:nvPr/>
@@ -30582,8 +28917,8 @@
         </p:nvSpPr>
         <p:spPr>
           <a:xfrm>
-            <a:off x="381600" y="129568"/>
-            <a:ext cx="1157222" cy="228209"/>
+            <a:off x="381600" y="129599"/>
+            <a:ext cx="1156940" cy="228145"/>
           </a:xfrm>
         </p:spPr>
         <p:txBody>
@@ -30596,25 +28931,6 @@
               <a:rPr lang="en-US" dirty="0"/>
               <a:t>Architecture</a:t>
             </a:r>
-          </a:p>
-        </p:txBody>
-      </p:sp>
-      <p:sp>
-        <p:nvSpPr>
-          <p:cNvPr id="3" name="Content Placeholder 2"/>
-          <p:cNvSpPr>
-            <a:spLocks noGrp="1"/>
-          </p:cNvSpPr>
-          <p:nvPr>
-            <p:ph sz="quarter" idx="13"/>
-          </p:nvPr>
-        </p:nvSpPr>
-        <p:spPr/>
-        <p:txBody>
-          <a:bodyPr/>
-          <a:lstStyle/>
-          <a:p>
-            <a:endParaRPr/>
           </a:p>
         </p:txBody>
       </p:sp>
@@ -30644,63 +28960,29 @@
       </p:sp>
       <p:sp>
         <p:nvSpPr>
-          <p:cNvPr id="7" name="Rectangle 6">
-            <a:extLst>
-              <a:ext uri="{FF2B5EF4-FFF2-40B4-BE49-F238E27FC236}">
-                <a16:creationId xmlns:a16="http://schemas.microsoft.com/office/drawing/2014/main" id="{4D956AE0-666A-B966-0B15-61A5E6C88F75}"/>
-              </a:ext>
-            </a:extLst>
-          </p:cNvPr>
-          <p:cNvSpPr/>
-          <p:nvPr/>
+          <p:cNvPr id="2004" name="Footer Placeholder 2004"/>
+          <p:cNvSpPr>
+            <a:spLocks noGrp="1"/>
+          </p:cNvSpPr>
+          <p:nvPr>
+            <p:ph type="ftr" sz="quarter" idx="3"/>
+          </p:nvPr>
         </p:nvSpPr>
-        <p:spPr>
-          <a:xfrm>
-            <a:off x="0" y="1390132"/>
-            <a:ext cx="12192000" cy="4927867"/>
-          </a:xfrm>
-          <a:prstGeom prst="rect">
-            <a:avLst/>
-          </a:prstGeom>
-          <a:solidFill>
-            <a:schemeClr val="bg1"/>
-          </a:solidFill>
-          <a:ln>
-            <a:noFill/>
-          </a:ln>
-          <a:effectLst>
-            <a:outerShdw blurRad="190500" dist="38100" dir="2700000" algn="tl" rotWithShape="0">
-              <a:prstClr val="black">
-                <a:alpha val="15000"/>
-              </a:prstClr>
-            </a:outerShdw>
-          </a:effectLst>
-        </p:spPr>
-        <p:style>
-          <a:lnRef idx="2">
-            <a:schemeClr val="accent1">
-              <a:shade val="50000"/>
-            </a:schemeClr>
-          </a:lnRef>
-          <a:fillRef idx="1">
-            <a:schemeClr val="accent1"/>
-          </a:fillRef>
-          <a:effectRef idx="0">
-            <a:schemeClr val="accent1"/>
-          </a:effectRef>
-          <a:fontRef idx="minor">
-            <a:schemeClr val="lt1"/>
-          </a:fontRef>
-        </p:style>
+        <p:spPr/>
         <p:txBody>
-          <a:bodyPr lIns="731520" tIns="72000" rIns="108000" bIns="72000" rtlCol="0" anchor="ctr"/>
+          <a:bodyPr/>
           <a:lstStyle/>
           <a:p>
-            <a:endParaRPr lang="nl-NL" sz="1200" b="1" noProof="0" dirty="0">
-              <a:solidFill>
-                <a:schemeClr val="accent1"/>
-              </a:solidFill>
-            </a:endParaRPr>
+            <a:r>
+              <a:rPr lang="en-US" dirty="0"/>
+              <a:t>Generated with Sigrid</a:t>
+            </a:r>
+          </a:p>
+          <a:p>
+            <a:r>
+              <a:rPr lang="en-US" dirty="0"/>
+              <a:t>for Reportgeneratordemo</a:t>
+            </a:r>
           </a:p>
         </p:txBody>
       </p:sp>
@@ -31040,39 +29322,6 @@
             <a:r>
               <a:rPr lang="en-US" sz="800" dirty="0"/>
               <a:t>★</a:t>
-            </a:r>
-          </a:p>
-        </p:txBody>
-      </p:sp>
-      <p:sp>
-        <p:nvSpPr>
-          <p:cNvPr id="2004" name="Footer Placeholder 2004"/>
-          <p:cNvSpPr>
-            <a:spLocks noGrp="1"/>
-          </p:cNvSpPr>
-          <p:nvPr>
-            <p:ph type="ftr" sz="quarter" idx="3"/>
-          </p:nvPr>
-        </p:nvSpPr>
-        <p:spPr>
-          <a:xfrm>
-            <a:off x="192088" y="6392596"/>
-            <a:ext cx="1763922" cy="370422"/>
-          </a:xfrm>
-        </p:spPr>
-        <p:txBody>
-          <a:bodyPr/>
-          <a:lstStyle/>
-          <a:p>
-            <a:r>
-              <a:rPr lang="en-US" dirty="0"/>
-              <a:t>Generated with Sigrid</a:t>
-            </a:r>
-          </a:p>
-          <a:p>
-            <a:r>
-              <a:rPr lang="en-US" dirty="0"/>
-              <a:t>for Reportgeneratordemo</a:t>
             </a:r>
           </a:p>
         </p:txBody>
@@ -31254,8 +29503,8 @@
         </p:nvSpPr>
         <p:spPr>
           <a:xfrm>
-            <a:off x="381600" y="129568"/>
-            <a:ext cx="1157222" cy="228209"/>
+            <a:off x="381600" y="129599"/>
+            <a:ext cx="1156940" cy="228145"/>
           </a:xfrm>
         </p:spPr>
         <p:txBody>
@@ -31268,25 +29517,6 @@
               <a:rPr lang="en-US" dirty="0"/>
               <a:t>Architecture</a:t>
             </a:r>
-          </a:p>
-        </p:txBody>
-      </p:sp>
-      <p:sp>
-        <p:nvSpPr>
-          <p:cNvPr id="3" name="Content Placeholder 2"/>
-          <p:cNvSpPr>
-            <a:spLocks noGrp="1"/>
-          </p:cNvSpPr>
-          <p:nvPr>
-            <p:ph sz="quarter" idx="13"/>
-          </p:nvPr>
-        </p:nvSpPr>
-        <p:spPr/>
-        <p:txBody>
-          <a:bodyPr/>
-          <a:lstStyle/>
-          <a:p>
-            <a:endParaRPr/>
           </a:p>
         </p:txBody>
       </p:sp>
@@ -31316,63 +29546,29 @@
       </p:sp>
       <p:sp>
         <p:nvSpPr>
-          <p:cNvPr id="7" name="Rectangle 6">
-            <a:extLst>
-              <a:ext uri="{FF2B5EF4-FFF2-40B4-BE49-F238E27FC236}">
-                <a16:creationId xmlns:a16="http://schemas.microsoft.com/office/drawing/2014/main" id="{4D956AE0-666A-B966-0B15-61A5E6C88F75}"/>
-              </a:ext>
-            </a:extLst>
-          </p:cNvPr>
-          <p:cNvSpPr/>
-          <p:nvPr/>
+          <p:cNvPr id="1004" name="Footer Placeholder 1004"/>
+          <p:cNvSpPr>
+            <a:spLocks noGrp="1"/>
+          </p:cNvSpPr>
+          <p:nvPr>
+            <p:ph type="ftr" sz="quarter" idx="3"/>
+          </p:nvPr>
         </p:nvSpPr>
-        <p:spPr>
-          <a:xfrm>
-            <a:off x="0" y="1390132"/>
-            <a:ext cx="12192000" cy="4927867"/>
-          </a:xfrm>
-          <a:prstGeom prst="rect">
-            <a:avLst/>
-          </a:prstGeom>
-          <a:solidFill>
-            <a:schemeClr val="bg1"/>
-          </a:solidFill>
-          <a:ln>
-            <a:noFill/>
-          </a:ln>
-          <a:effectLst>
-            <a:outerShdw blurRad="190500" dist="38100" dir="2700000" algn="tl" rotWithShape="0">
-              <a:prstClr val="black">
-                <a:alpha val="15000"/>
-              </a:prstClr>
-            </a:outerShdw>
-          </a:effectLst>
-        </p:spPr>
-        <p:style>
-          <a:lnRef idx="2">
-            <a:schemeClr val="accent1">
-              <a:shade val="50000"/>
-            </a:schemeClr>
-          </a:lnRef>
-          <a:fillRef idx="1">
-            <a:schemeClr val="accent1"/>
-          </a:fillRef>
-          <a:effectRef idx="0">
-            <a:schemeClr val="accent1"/>
-          </a:effectRef>
-          <a:fontRef idx="minor">
-            <a:schemeClr val="lt1"/>
-          </a:fontRef>
-        </p:style>
+        <p:spPr/>
         <p:txBody>
-          <a:bodyPr lIns="731520" tIns="72000" rIns="108000" bIns="72000" rtlCol="0" anchor="ctr"/>
+          <a:bodyPr/>
           <a:lstStyle/>
           <a:p>
-            <a:endParaRPr lang="nl-NL" sz="1200" b="1" noProof="0" dirty="0">
-              <a:solidFill>
-                <a:schemeClr val="accent1"/>
-              </a:solidFill>
-            </a:endParaRPr>
+            <a:r>
+              <a:rPr lang="en-US" dirty="0"/>
+              <a:t>Generated with Sigrid</a:t>
+            </a:r>
+          </a:p>
+          <a:p>
+            <a:r>
+              <a:rPr lang="en-US" dirty="0"/>
+              <a:t>for Reportgeneratordemo</a:t>
+            </a:r>
           </a:p>
         </p:txBody>
       </p:sp>
@@ -31903,39 +30099,6 @@
       </p:grpSp>
       <p:sp>
         <p:nvSpPr>
-          <p:cNvPr id="1004" name="Footer Placeholder 1004"/>
-          <p:cNvSpPr>
-            <a:spLocks noGrp="1"/>
-          </p:cNvSpPr>
-          <p:nvPr>
-            <p:ph type="ftr" sz="quarter" idx="3"/>
-          </p:nvPr>
-        </p:nvSpPr>
-        <p:spPr>
-          <a:xfrm>
-            <a:off x="192088" y="6392596"/>
-            <a:ext cx="1763922" cy="370422"/>
-          </a:xfrm>
-        </p:spPr>
-        <p:txBody>
-          <a:bodyPr/>
-          <a:lstStyle/>
-          <a:p>
-            <a:r>
-              <a:rPr lang="en-US" dirty="0"/>
-              <a:t>Generated with Sigrid</a:t>
-            </a:r>
-          </a:p>
-          <a:p>
-            <a:r>
-              <a:rPr lang="en-US" dirty="0"/>
-              <a:t>for Reportgeneratordemo</a:t>
-            </a:r>
-          </a:p>
-        </p:txBody>
-      </p:sp>
-      <p:sp>
-        <p:nvSpPr>
           <p:cNvPr id="1071" name="TextBox 1071"/>
           <p:cNvSpPr txBox="1"/>
           <p:nvPr/>
@@ -32175,8 +30338,8 @@
         </p:nvSpPr>
         <p:spPr>
           <a:xfrm>
-            <a:off x="381600" y="129568"/>
-            <a:ext cx="1157222" cy="228209"/>
+            <a:off x="381600" y="129599"/>
+            <a:ext cx="1156940" cy="228145"/>
           </a:xfrm>
         </p:spPr>
         <p:txBody>
@@ -32189,25 +30352,6 @@
               <a:rPr lang="en-US" dirty="0"/>
               <a:t>Architecture</a:t>
             </a:r>
-          </a:p>
-        </p:txBody>
-      </p:sp>
-      <p:sp>
-        <p:nvSpPr>
-          <p:cNvPr id="3" name="Content Placeholder 2"/>
-          <p:cNvSpPr>
-            <a:spLocks noGrp="1"/>
-          </p:cNvSpPr>
-          <p:nvPr>
-            <p:ph sz="quarter" idx="13"/>
-          </p:nvPr>
-        </p:nvSpPr>
-        <p:spPr/>
-        <p:txBody>
-          <a:bodyPr/>
-          <a:lstStyle/>
-          <a:p>
-            <a:endParaRPr/>
           </a:p>
         </p:txBody>
       </p:sp>
@@ -32237,63 +30381,29 @@
       </p:sp>
       <p:sp>
         <p:nvSpPr>
-          <p:cNvPr id="7" name="Rectangle 6">
-            <a:extLst>
-              <a:ext uri="{FF2B5EF4-FFF2-40B4-BE49-F238E27FC236}">
-                <a16:creationId xmlns:a16="http://schemas.microsoft.com/office/drawing/2014/main" id="{4D956AE0-666A-B966-0B15-61A5E6C88F75}"/>
-              </a:ext>
-            </a:extLst>
-          </p:cNvPr>
-          <p:cNvSpPr/>
-          <p:nvPr/>
+          <p:cNvPr id="2004" name="Footer Placeholder 2004"/>
+          <p:cNvSpPr>
+            <a:spLocks noGrp="1"/>
+          </p:cNvSpPr>
+          <p:nvPr>
+            <p:ph type="ftr" sz="quarter" idx="3"/>
+          </p:nvPr>
         </p:nvSpPr>
-        <p:spPr>
-          <a:xfrm>
-            <a:off x="0" y="1390132"/>
-            <a:ext cx="12192000" cy="4927867"/>
-          </a:xfrm>
-          <a:prstGeom prst="rect">
-            <a:avLst/>
-          </a:prstGeom>
-          <a:solidFill>
-            <a:schemeClr val="bg1"/>
-          </a:solidFill>
-          <a:ln>
-            <a:noFill/>
-          </a:ln>
-          <a:effectLst>
-            <a:outerShdw blurRad="190500" dist="38100" dir="2700000" algn="tl" rotWithShape="0">
-              <a:prstClr val="black">
-                <a:alpha val="15000"/>
-              </a:prstClr>
-            </a:outerShdw>
-          </a:effectLst>
-        </p:spPr>
-        <p:style>
-          <a:lnRef idx="2">
-            <a:schemeClr val="accent1">
-              <a:shade val="50000"/>
-            </a:schemeClr>
-          </a:lnRef>
-          <a:fillRef idx="1">
-            <a:schemeClr val="accent1"/>
-          </a:fillRef>
-          <a:effectRef idx="0">
-            <a:schemeClr val="accent1"/>
-          </a:effectRef>
-          <a:fontRef idx="minor">
-            <a:schemeClr val="lt1"/>
-          </a:fontRef>
-        </p:style>
+        <p:spPr/>
         <p:txBody>
-          <a:bodyPr lIns="731520" tIns="72000" rIns="108000" bIns="72000" rtlCol="0" anchor="ctr"/>
+          <a:bodyPr/>
           <a:lstStyle/>
           <a:p>
-            <a:endParaRPr lang="nl-NL" sz="1200" b="1" noProof="0" dirty="0">
-              <a:solidFill>
-                <a:schemeClr val="accent1"/>
-              </a:solidFill>
-            </a:endParaRPr>
+            <a:r>
+              <a:rPr lang="en-US" dirty="0"/>
+              <a:t>Generated with Sigrid</a:t>
+            </a:r>
+          </a:p>
+          <a:p>
+            <a:r>
+              <a:rPr lang="en-US" dirty="0"/>
+              <a:t>for Reportgeneratordemo</a:t>
+            </a:r>
           </a:p>
         </p:txBody>
       </p:sp>
@@ -32633,39 +30743,6 @@
             <a:r>
               <a:rPr lang="en-US" sz="800" dirty="0"/>
               <a:t>★</a:t>
-            </a:r>
-          </a:p>
-        </p:txBody>
-      </p:sp>
-      <p:sp>
-        <p:nvSpPr>
-          <p:cNvPr id="2004" name="Footer Placeholder 2004"/>
-          <p:cNvSpPr>
-            <a:spLocks noGrp="1"/>
-          </p:cNvSpPr>
-          <p:nvPr>
-            <p:ph type="ftr" sz="quarter" idx="3"/>
-          </p:nvPr>
-        </p:nvSpPr>
-        <p:spPr>
-          <a:xfrm>
-            <a:off x="192088" y="6392596"/>
-            <a:ext cx="1763922" cy="370422"/>
-          </a:xfrm>
-        </p:spPr>
-        <p:txBody>
-          <a:bodyPr/>
-          <a:lstStyle/>
-          <a:p>
-            <a:r>
-              <a:rPr lang="en-US" dirty="0"/>
-              <a:t>Generated with Sigrid</a:t>
-            </a:r>
-          </a:p>
-          <a:p>
-            <a:r>
-              <a:rPr lang="en-US" dirty="0"/>
-              <a:t>for Reportgeneratordemo</a:t>
             </a:r>
           </a:p>
         </p:txBody>
@@ -32847,8 +30924,8 @@
         </p:nvSpPr>
         <p:spPr>
           <a:xfrm>
-            <a:off x="381600" y="129568"/>
-            <a:ext cx="1410176" cy="228209"/>
+            <a:off x="381600" y="129600"/>
+            <a:ext cx="1410176" cy="228145"/>
           </a:xfrm>
         </p:spPr>
         <p:txBody>
@@ -32858,9 +30935,10 @@
           <a:lstStyle/>
           <a:p>
             <a:r>
-              <a:rPr lang="en-US" dirty="0"/>
+              <a:rPr lang="en-US"/>
               <a:t>Maintainability</a:t>
             </a:r>
+            <a:endParaRPr lang="en-US" dirty="0"/>
           </a:p>
         </p:txBody>
       </p:sp>
@@ -32884,6 +30962,34 @@
             <a:r>
               <a:rPr lang="en-US" dirty="0"/>
               <a:t>Overview of Duplication metric for portfolio Reportgeneratordemo</a:t>
+            </a:r>
+          </a:p>
+        </p:txBody>
+      </p:sp>
+      <p:sp>
+        <p:nvSpPr>
+          <p:cNvPr id="1004" name="Footer Placeholder 1004"/>
+          <p:cNvSpPr>
+            <a:spLocks noGrp="1"/>
+          </p:cNvSpPr>
+          <p:nvPr>
+            <p:ph type="ftr" sz="quarter" idx="3"/>
+          </p:nvPr>
+        </p:nvSpPr>
+        <p:spPr/>
+        <p:txBody>
+          <a:bodyPr/>
+          <a:lstStyle/>
+          <a:p>
+            <a:r>
+              <a:rPr lang="en-US" dirty="0"/>
+              <a:t>Generated with Sigrid</a:t>
+            </a:r>
+          </a:p>
+          <a:p>
+            <a:r>
+              <a:rPr lang="en-US" dirty="0"/>
+              <a:t>for Reportgeneratordemo</a:t>
             </a:r>
           </a:p>
         </p:txBody>
@@ -33415,39 +31521,6 @@
       </p:grpSp>
       <p:sp>
         <p:nvSpPr>
-          <p:cNvPr id="1004" name="Footer Placeholder 1004"/>
-          <p:cNvSpPr>
-            <a:spLocks noGrp="1"/>
-          </p:cNvSpPr>
-          <p:nvPr>
-            <p:ph type="ftr" sz="quarter" idx="3"/>
-          </p:nvPr>
-        </p:nvSpPr>
-        <p:spPr>
-          <a:xfrm>
-            <a:off x="192088" y="6392596"/>
-            <a:ext cx="1763922" cy="370422"/>
-          </a:xfrm>
-        </p:spPr>
-        <p:txBody>
-          <a:bodyPr/>
-          <a:lstStyle/>
-          <a:p>
-            <a:r>
-              <a:rPr lang="en-US" dirty="0"/>
-              <a:t>Generated with Sigrid</a:t>
-            </a:r>
-          </a:p>
-          <a:p>
-            <a:r>
-              <a:rPr lang="en-US" dirty="0"/>
-              <a:t>for Reportgeneratordemo</a:t>
-            </a:r>
-          </a:p>
-        </p:txBody>
-      </p:sp>
-      <p:sp>
-        <p:nvSpPr>
           <p:cNvPr id="1071" name="TextBox 1071"/>
           <p:cNvSpPr txBox="1"/>
           <p:nvPr/>
@@ -33687,8 +31760,8 @@
         </p:nvSpPr>
         <p:spPr>
           <a:xfrm>
-            <a:off x="381600" y="129568"/>
-            <a:ext cx="1157222" cy="228209"/>
+            <a:off x="381600" y="129599"/>
+            <a:ext cx="1156940" cy="228145"/>
           </a:xfrm>
         </p:spPr>
         <p:txBody>
@@ -33701,25 +31774,6 @@
               <a:rPr lang="en-US" dirty="0"/>
               <a:t>Architecture</a:t>
             </a:r>
-          </a:p>
-        </p:txBody>
-      </p:sp>
-      <p:sp>
-        <p:nvSpPr>
-          <p:cNvPr id="3" name="Content Placeholder 2"/>
-          <p:cNvSpPr>
-            <a:spLocks noGrp="1"/>
-          </p:cNvSpPr>
-          <p:nvPr>
-            <p:ph sz="quarter" idx="13"/>
-          </p:nvPr>
-        </p:nvSpPr>
-        <p:spPr/>
-        <p:txBody>
-          <a:bodyPr/>
-          <a:lstStyle/>
-          <a:p>
-            <a:endParaRPr/>
           </a:p>
         </p:txBody>
       </p:sp>
@@ -33749,63 +31803,29 @@
       </p:sp>
       <p:sp>
         <p:nvSpPr>
-          <p:cNvPr id="7" name="Rectangle 6">
-            <a:extLst>
-              <a:ext uri="{FF2B5EF4-FFF2-40B4-BE49-F238E27FC236}">
-                <a16:creationId xmlns:a16="http://schemas.microsoft.com/office/drawing/2014/main" id="{4D956AE0-666A-B966-0B15-61A5E6C88F75}"/>
-              </a:ext>
-            </a:extLst>
-          </p:cNvPr>
-          <p:cNvSpPr/>
-          <p:nvPr/>
+          <p:cNvPr id="1004" name="Footer Placeholder 1004"/>
+          <p:cNvSpPr>
+            <a:spLocks noGrp="1"/>
+          </p:cNvSpPr>
+          <p:nvPr>
+            <p:ph type="ftr" sz="quarter" idx="3"/>
+          </p:nvPr>
         </p:nvSpPr>
-        <p:spPr>
-          <a:xfrm>
-            <a:off x="0" y="1390132"/>
-            <a:ext cx="12192000" cy="4927867"/>
-          </a:xfrm>
-          <a:prstGeom prst="rect">
-            <a:avLst/>
-          </a:prstGeom>
-          <a:solidFill>
-            <a:schemeClr val="bg1"/>
-          </a:solidFill>
-          <a:ln>
-            <a:noFill/>
-          </a:ln>
-          <a:effectLst>
-            <a:outerShdw blurRad="190500" dist="38100" dir="2700000" algn="tl" rotWithShape="0">
-              <a:prstClr val="black">
-                <a:alpha val="15000"/>
-              </a:prstClr>
-            </a:outerShdw>
-          </a:effectLst>
-        </p:spPr>
-        <p:style>
-          <a:lnRef idx="2">
-            <a:schemeClr val="accent1">
-              <a:shade val="50000"/>
-            </a:schemeClr>
-          </a:lnRef>
-          <a:fillRef idx="1">
-            <a:schemeClr val="accent1"/>
-          </a:fillRef>
-          <a:effectRef idx="0">
-            <a:schemeClr val="accent1"/>
-          </a:effectRef>
-          <a:fontRef idx="minor">
-            <a:schemeClr val="lt1"/>
-          </a:fontRef>
-        </p:style>
+        <p:spPr/>
         <p:txBody>
-          <a:bodyPr lIns="731520" tIns="72000" rIns="108000" bIns="72000" rtlCol="0" anchor="ctr"/>
+          <a:bodyPr/>
           <a:lstStyle/>
           <a:p>
-            <a:endParaRPr lang="nl-NL" sz="1200" b="1" noProof="0" dirty="0">
-              <a:solidFill>
-                <a:schemeClr val="accent1"/>
-              </a:solidFill>
-            </a:endParaRPr>
+            <a:r>
+              <a:rPr lang="en-US" dirty="0"/>
+              <a:t>Generated with Sigrid</a:t>
+            </a:r>
+          </a:p>
+          <a:p>
+            <a:r>
+              <a:rPr lang="en-US" dirty="0"/>
+              <a:t>for Reportgeneratordemo</a:t>
+            </a:r>
           </a:p>
         </p:txBody>
       </p:sp>
@@ -34336,39 +32356,6 @@
       </p:grpSp>
       <p:sp>
         <p:nvSpPr>
-          <p:cNvPr id="1004" name="Footer Placeholder 1004"/>
-          <p:cNvSpPr>
-            <a:spLocks noGrp="1"/>
-          </p:cNvSpPr>
-          <p:nvPr>
-            <p:ph type="ftr" sz="quarter" idx="3"/>
-          </p:nvPr>
-        </p:nvSpPr>
-        <p:spPr>
-          <a:xfrm>
-            <a:off x="192088" y="6392596"/>
-            <a:ext cx="1763922" cy="370422"/>
-          </a:xfrm>
-        </p:spPr>
-        <p:txBody>
-          <a:bodyPr/>
-          <a:lstStyle/>
-          <a:p>
-            <a:r>
-              <a:rPr lang="en-US" dirty="0"/>
-              <a:t>Generated with Sigrid</a:t>
-            </a:r>
-          </a:p>
-          <a:p>
-            <a:r>
-              <a:rPr lang="en-US" dirty="0"/>
-              <a:t>for Reportgeneratordemo</a:t>
-            </a:r>
-          </a:p>
-        </p:txBody>
-      </p:sp>
-      <p:sp>
-        <p:nvSpPr>
           <p:cNvPr id="1071" name="TextBox 1071"/>
           <p:cNvSpPr txBox="1"/>
           <p:nvPr/>
@@ -34608,8 +32595,8 @@
         </p:nvSpPr>
         <p:spPr>
           <a:xfrm>
-            <a:off x="381600" y="129568"/>
-            <a:ext cx="1157222" cy="228209"/>
+            <a:off x="381600" y="129599"/>
+            <a:ext cx="1156940" cy="228145"/>
           </a:xfrm>
         </p:spPr>
         <p:txBody>
@@ -34622,25 +32609,6 @@
               <a:rPr lang="en-US" dirty="0"/>
               <a:t>Architecture</a:t>
             </a:r>
-          </a:p>
-        </p:txBody>
-      </p:sp>
-      <p:sp>
-        <p:nvSpPr>
-          <p:cNvPr id="3" name="Content Placeholder 2"/>
-          <p:cNvSpPr>
-            <a:spLocks noGrp="1"/>
-          </p:cNvSpPr>
-          <p:nvPr>
-            <p:ph sz="quarter" idx="13"/>
-          </p:nvPr>
-        </p:nvSpPr>
-        <p:spPr/>
-        <p:txBody>
-          <a:bodyPr/>
-          <a:lstStyle/>
-          <a:p>
-            <a:endParaRPr/>
           </a:p>
         </p:txBody>
       </p:sp>
@@ -34670,63 +32638,29 @@
       </p:sp>
       <p:sp>
         <p:nvSpPr>
-          <p:cNvPr id="7" name="Rectangle 6">
-            <a:extLst>
-              <a:ext uri="{FF2B5EF4-FFF2-40B4-BE49-F238E27FC236}">
-                <a16:creationId xmlns:a16="http://schemas.microsoft.com/office/drawing/2014/main" id="{4D956AE0-666A-B966-0B15-61A5E6C88F75}"/>
-              </a:ext>
-            </a:extLst>
-          </p:cNvPr>
-          <p:cNvSpPr/>
-          <p:nvPr/>
+          <p:cNvPr id="2004" name="Footer Placeholder 2004"/>
+          <p:cNvSpPr>
+            <a:spLocks noGrp="1"/>
+          </p:cNvSpPr>
+          <p:nvPr>
+            <p:ph type="ftr" sz="quarter" idx="3"/>
+          </p:nvPr>
         </p:nvSpPr>
-        <p:spPr>
-          <a:xfrm>
-            <a:off x="0" y="1390132"/>
-            <a:ext cx="12192000" cy="4927867"/>
-          </a:xfrm>
-          <a:prstGeom prst="rect">
-            <a:avLst/>
-          </a:prstGeom>
-          <a:solidFill>
-            <a:schemeClr val="bg1"/>
-          </a:solidFill>
-          <a:ln>
-            <a:noFill/>
-          </a:ln>
-          <a:effectLst>
-            <a:outerShdw blurRad="190500" dist="38100" dir="2700000" algn="tl" rotWithShape="0">
-              <a:prstClr val="black">
-                <a:alpha val="15000"/>
-              </a:prstClr>
-            </a:outerShdw>
-          </a:effectLst>
-        </p:spPr>
-        <p:style>
-          <a:lnRef idx="2">
-            <a:schemeClr val="accent1">
-              <a:shade val="50000"/>
-            </a:schemeClr>
-          </a:lnRef>
-          <a:fillRef idx="1">
-            <a:schemeClr val="accent1"/>
-          </a:fillRef>
-          <a:effectRef idx="0">
-            <a:schemeClr val="accent1"/>
-          </a:effectRef>
-          <a:fontRef idx="minor">
-            <a:schemeClr val="lt1"/>
-          </a:fontRef>
-        </p:style>
+        <p:spPr/>
         <p:txBody>
-          <a:bodyPr lIns="731520" tIns="72000" rIns="108000" bIns="72000" rtlCol="0" anchor="ctr"/>
+          <a:bodyPr/>
           <a:lstStyle/>
           <a:p>
-            <a:endParaRPr lang="nl-NL" sz="1200" b="1" noProof="0" dirty="0">
-              <a:solidFill>
-                <a:schemeClr val="accent1"/>
-              </a:solidFill>
-            </a:endParaRPr>
+            <a:r>
+              <a:rPr lang="en-US" dirty="0"/>
+              <a:t>Generated with Sigrid</a:t>
+            </a:r>
+          </a:p>
+          <a:p>
+            <a:r>
+              <a:rPr lang="en-US" dirty="0"/>
+              <a:t>for Reportgeneratordemo</a:t>
+            </a:r>
           </a:p>
         </p:txBody>
       </p:sp>
@@ -35066,39 +33000,6 @@
             <a:r>
               <a:rPr lang="en-US" sz="800" dirty="0"/>
               <a:t>★</a:t>
-            </a:r>
-          </a:p>
-        </p:txBody>
-      </p:sp>
-      <p:sp>
-        <p:nvSpPr>
-          <p:cNvPr id="2004" name="Footer Placeholder 2004"/>
-          <p:cNvSpPr>
-            <a:spLocks noGrp="1"/>
-          </p:cNvSpPr>
-          <p:nvPr>
-            <p:ph type="ftr" sz="quarter" idx="3"/>
-          </p:nvPr>
-        </p:nvSpPr>
-        <p:spPr>
-          <a:xfrm>
-            <a:off x="192088" y="6392596"/>
-            <a:ext cx="1763922" cy="370422"/>
-          </a:xfrm>
-        </p:spPr>
-        <p:txBody>
-          <a:bodyPr/>
-          <a:lstStyle/>
-          <a:p>
-            <a:r>
-              <a:rPr lang="en-US" dirty="0"/>
-              <a:t>Generated with Sigrid</a:t>
-            </a:r>
-          </a:p>
-          <a:p>
-            <a:r>
-              <a:rPr lang="en-US" dirty="0"/>
-              <a:t>for Reportgeneratordemo</a:t>
             </a:r>
           </a:p>
         </p:txBody>
@@ -35280,8 +33181,8 @@
         </p:nvSpPr>
         <p:spPr>
           <a:xfrm>
-            <a:off x="381600" y="129568"/>
-            <a:ext cx="1157222" cy="228209"/>
+            <a:off x="381600" y="129599"/>
+            <a:ext cx="1156940" cy="228145"/>
           </a:xfrm>
         </p:spPr>
         <p:txBody>
@@ -35294,25 +33195,6 @@
               <a:rPr lang="en-US" dirty="0"/>
               <a:t>Architecture</a:t>
             </a:r>
-          </a:p>
-        </p:txBody>
-      </p:sp>
-      <p:sp>
-        <p:nvSpPr>
-          <p:cNvPr id="3" name="Content Placeholder 2"/>
-          <p:cNvSpPr>
-            <a:spLocks noGrp="1"/>
-          </p:cNvSpPr>
-          <p:nvPr>
-            <p:ph sz="quarter" idx="13"/>
-          </p:nvPr>
-        </p:nvSpPr>
-        <p:spPr/>
-        <p:txBody>
-          <a:bodyPr/>
-          <a:lstStyle/>
-          <a:p>
-            <a:endParaRPr/>
           </a:p>
         </p:txBody>
       </p:sp>
@@ -35342,63 +33224,29 @@
       </p:sp>
       <p:sp>
         <p:nvSpPr>
-          <p:cNvPr id="7" name="Rectangle 6">
-            <a:extLst>
-              <a:ext uri="{FF2B5EF4-FFF2-40B4-BE49-F238E27FC236}">
-                <a16:creationId xmlns:a16="http://schemas.microsoft.com/office/drawing/2014/main" id="{4D956AE0-666A-B966-0B15-61A5E6C88F75}"/>
-              </a:ext>
-            </a:extLst>
-          </p:cNvPr>
-          <p:cNvSpPr/>
-          <p:nvPr/>
+          <p:cNvPr id="1004" name="Footer Placeholder 1004"/>
+          <p:cNvSpPr>
+            <a:spLocks noGrp="1"/>
+          </p:cNvSpPr>
+          <p:nvPr>
+            <p:ph type="ftr" sz="quarter" idx="3"/>
+          </p:nvPr>
         </p:nvSpPr>
-        <p:spPr>
-          <a:xfrm>
-            <a:off x="0" y="1390132"/>
-            <a:ext cx="12192000" cy="4927867"/>
-          </a:xfrm>
-          <a:prstGeom prst="rect">
-            <a:avLst/>
-          </a:prstGeom>
-          <a:solidFill>
-            <a:schemeClr val="bg1"/>
-          </a:solidFill>
-          <a:ln>
-            <a:noFill/>
-          </a:ln>
-          <a:effectLst>
-            <a:outerShdw blurRad="190500" dist="38100" dir="2700000" algn="tl" rotWithShape="0">
-              <a:prstClr val="black">
-                <a:alpha val="15000"/>
-              </a:prstClr>
-            </a:outerShdw>
-          </a:effectLst>
-        </p:spPr>
-        <p:style>
-          <a:lnRef idx="2">
-            <a:schemeClr val="accent1">
-              <a:shade val="50000"/>
-            </a:schemeClr>
-          </a:lnRef>
-          <a:fillRef idx="1">
-            <a:schemeClr val="accent1"/>
-          </a:fillRef>
-          <a:effectRef idx="0">
-            <a:schemeClr val="accent1"/>
-          </a:effectRef>
-          <a:fontRef idx="minor">
-            <a:schemeClr val="lt1"/>
-          </a:fontRef>
-        </p:style>
+        <p:spPr/>
         <p:txBody>
-          <a:bodyPr lIns="731520" tIns="72000" rIns="108000" bIns="72000" rtlCol="0" anchor="ctr"/>
+          <a:bodyPr/>
           <a:lstStyle/>
           <a:p>
-            <a:endParaRPr lang="nl-NL" sz="1200" b="1" noProof="0" dirty="0">
-              <a:solidFill>
-                <a:schemeClr val="accent1"/>
-              </a:solidFill>
-            </a:endParaRPr>
+            <a:r>
+              <a:rPr lang="en-US" dirty="0"/>
+              <a:t>Generated with Sigrid</a:t>
+            </a:r>
+          </a:p>
+          <a:p>
+            <a:r>
+              <a:rPr lang="en-US" dirty="0"/>
+              <a:t>for Reportgeneratordemo</a:t>
+            </a:r>
           </a:p>
         </p:txBody>
       </p:sp>
@@ -35929,39 +33777,6 @@
       </p:grpSp>
       <p:sp>
         <p:nvSpPr>
-          <p:cNvPr id="1004" name="Footer Placeholder 1004"/>
-          <p:cNvSpPr>
-            <a:spLocks noGrp="1"/>
-          </p:cNvSpPr>
-          <p:nvPr>
-            <p:ph type="ftr" sz="quarter" idx="3"/>
-          </p:nvPr>
-        </p:nvSpPr>
-        <p:spPr>
-          <a:xfrm>
-            <a:off x="192088" y="6392596"/>
-            <a:ext cx="1763922" cy="370422"/>
-          </a:xfrm>
-        </p:spPr>
-        <p:txBody>
-          <a:bodyPr/>
-          <a:lstStyle/>
-          <a:p>
-            <a:r>
-              <a:rPr lang="en-US" dirty="0"/>
-              <a:t>Generated with Sigrid</a:t>
-            </a:r>
-          </a:p>
-          <a:p>
-            <a:r>
-              <a:rPr lang="en-US" dirty="0"/>
-              <a:t>for Reportgeneratordemo</a:t>
-            </a:r>
-          </a:p>
-        </p:txBody>
-      </p:sp>
-      <p:sp>
-        <p:nvSpPr>
           <p:cNvPr id="1071" name="TextBox 1071"/>
           <p:cNvSpPr txBox="1"/>
           <p:nvPr/>
@@ -36201,8 +34016,8 @@
         </p:nvSpPr>
         <p:spPr>
           <a:xfrm>
-            <a:off x="381600" y="129568"/>
-            <a:ext cx="1157222" cy="228209"/>
+            <a:off x="381600" y="129599"/>
+            <a:ext cx="1156940" cy="228145"/>
           </a:xfrm>
         </p:spPr>
         <p:txBody>
@@ -36215,25 +34030,6 @@
               <a:rPr lang="en-US" dirty="0"/>
               <a:t>Architecture</a:t>
             </a:r>
-          </a:p>
-        </p:txBody>
-      </p:sp>
-      <p:sp>
-        <p:nvSpPr>
-          <p:cNvPr id="3" name="Content Placeholder 2"/>
-          <p:cNvSpPr>
-            <a:spLocks noGrp="1"/>
-          </p:cNvSpPr>
-          <p:nvPr>
-            <p:ph sz="quarter" idx="13"/>
-          </p:nvPr>
-        </p:nvSpPr>
-        <p:spPr/>
-        <p:txBody>
-          <a:bodyPr/>
-          <a:lstStyle/>
-          <a:p>
-            <a:endParaRPr/>
           </a:p>
         </p:txBody>
       </p:sp>
@@ -36263,63 +34059,29 @@
       </p:sp>
       <p:sp>
         <p:nvSpPr>
-          <p:cNvPr id="7" name="Rectangle 6">
-            <a:extLst>
-              <a:ext uri="{FF2B5EF4-FFF2-40B4-BE49-F238E27FC236}">
-                <a16:creationId xmlns:a16="http://schemas.microsoft.com/office/drawing/2014/main" id="{4D956AE0-666A-B966-0B15-61A5E6C88F75}"/>
-              </a:ext>
-            </a:extLst>
-          </p:cNvPr>
-          <p:cNvSpPr/>
-          <p:nvPr/>
+          <p:cNvPr id="2004" name="Footer Placeholder 2004"/>
+          <p:cNvSpPr>
+            <a:spLocks noGrp="1"/>
+          </p:cNvSpPr>
+          <p:nvPr>
+            <p:ph type="ftr" sz="quarter" idx="3"/>
+          </p:nvPr>
         </p:nvSpPr>
-        <p:spPr>
-          <a:xfrm>
-            <a:off x="0" y="1390132"/>
-            <a:ext cx="12192000" cy="4927867"/>
-          </a:xfrm>
-          <a:prstGeom prst="rect">
-            <a:avLst/>
-          </a:prstGeom>
-          <a:solidFill>
-            <a:schemeClr val="bg1"/>
-          </a:solidFill>
-          <a:ln>
-            <a:noFill/>
-          </a:ln>
-          <a:effectLst>
-            <a:outerShdw blurRad="190500" dist="38100" dir="2700000" algn="tl" rotWithShape="0">
-              <a:prstClr val="black">
-                <a:alpha val="15000"/>
-              </a:prstClr>
-            </a:outerShdw>
-          </a:effectLst>
-        </p:spPr>
-        <p:style>
-          <a:lnRef idx="2">
-            <a:schemeClr val="accent1">
-              <a:shade val="50000"/>
-            </a:schemeClr>
-          </a:lnRef>
-          <a:fillRef idx="1">
-            <a:schemeClr val="accent1"/>
-          </a:fillRef>
-          <a:effectRef idx="0">
-            <a:schemeClr val="accent1"/>
-          </a:effectRef>
-          <a:fontRef idx="minor">
-            <a:schemeClr val="lt1"/>
-          </a:fontRef>
-        </p:style>
+        <p:spPr/>
         <p:txBody>
-          <a:bodyPr lIns="731520" tIns="72000" rIns="108000" bIns="72000" rtlCol="0" anchor="ctr"/>
+          <a:bodyPr/>
           <a:lstStyle/>
           <a:p>
-            <a:endParaRPr lang="nl-NL" sz="1200" b="1" noProof="0" dirty="0">
-              <a:solidFill>
-                <a:schemeClr val="accent1"/>
-              </a:solidFill>
-            </a:endParaRPr>
+            <a:r>
+              <a:rPr lang="en-US" dirty="0"/>
+              <a:t>Generated with Sigrid</a:t>
+            </a:r>
+          </a:p>
+          <a:p>
+            <a:r>
+              <a:rPr lang="en-US" dirty="0"/>
+              <a:t>for Reportgeneratordemo</a:t>
+            </a:r>
           </a:p>
         </p:txBody>
       </p:sp>
@@ -36659,39 +34421,6 @@
             <a:r>
               <a:rPr lang="en-US" sz="800" dirty="0"/>
               <a:t>★</a:t>
-            </a:r>
-          </a:p>
-        </p:txBody>
-      </p:sp>
-      <p:sp>
-        <p:nvSpPr>
-          <p:cNvPr id="2004" name="Footer Placeholder 2004"/>
-          <p:cNvSpPr>
-            <a:spLocks noGrp="1"/>
-          </p:cNvSpPr>
-          <p:nvPr>
-            <p:ph type="ftr" sz="quarter" idx="3"/>
-          </p:nvPr>
-        </p:nvSpPr>
-        <p:spPr>
-          <a:xfrm>
-            <a:off x="192088" y="6392596"/>
-            <a:ext cx="1763922" cy="370422"/>
-          </a:xfrm>
-        </p:spPr>
-        <p:txBody>
-          <a:bodyPr/>
-          <a:lstStyle/>
-          <a:p>
-            <a:r>
-              <a:rPr lang="en-US" dirty="0"/>
-              <a:t>Generated with Sigrid</a:t>
-            </a:r>
-          </a:p>
-          <a:p>
-            <a:r>
-              <a:rPr lang="en-US" dirty="0"/>
-              <a:t>for Reportgeneratordemo</a:t>
             </a:r>
           </a:p>
         </p:txBody>
@@ -36873,8 +34602,8 @@
         </p:nvSpPr>
         <p:spPr>
           <a:xfrm>
-            <a:off x="381600" y="129568"/>
-            <a:ext cx="1157222" cy="228209"/>
+            <a:off x="381600" y="129599"/>
+            <a:ext cx="1156940" cy="228145"/>
           </a:xfrm>
         </p:spPr>
         <p:txBody>
@@ -36887,25 +34616,6 @@
               <a:rPr lang="en-US" dirty="0"/>
               <a:t>Architecture</a:t>
             </a:r>
-          </a:p>
-        </p:txBody>
-      </p:sp>
-      <p:sp>
-        <p:nvSpPr>
-          <p:cNvPr id="3" name="Content Placeholder 2"/>
-          <p:cNvSpPr>
-            <a:spLocks noGrp="1"/>
-          </p:cNvSpPr>
-          <p:nvPr>
-            <p:ph sz="quarter" idx="13"/>
-          </p:nvPr>
-        </p:nvSpPr>
-        <p:spPr/>
-        <p:txBody>
-          <a:bodyPr/>
-          <a:lstStyle/>
-          <a:p>
-            <a:endParaRPr/>
           </a:p>
         </p:txBody>
       </p:sp>
@@ -36935,63 +34645,29 @@
       </p:sp>
       <p:sp>
         <p:nvSpPr>
-          <p:cNvPr id="7" name="Rectangle 6">
-            <a:extLst>
-              <a:ext uri="{FF2B5EF4-FFF2-40B4-BE49-F238E27FC236}">
-                <a16:creationId xmlns:a16="http://schemas.microsoft.com/office/drawing/2014/main" id="{4D956AE0-666A-B966-0B15-61A5E6C88F75}"/>
-              </a:ext>
-            </a:extLst>
-          </p:cNvPr>
-          <p:cNvSpPr/>
-          <p:nvPr/>
+          <p:cNvPr id="1004" name="Footer Placeholder 1004"/>
+          <p:cNvSpPr>
+            <a:spLocks noGrp="1"/>
+          </p:cNvSpPr>
+          <p:nvPr>
+            <p:ph type="ftr" sz="quarter" idx="3"/>
+          </p:nvPr>
         </p:nvSpPr>
-        <p:spPr>
-          <a:xfrm>
-            <a:off x="0" y="1390132"/>
-            <a:ext cx="12192000" cy="4927867"/>
-          </a:xfrm>
-          <a:prstGeom prst="rect">
-            <a:avLst/>
-          </a:prstGeom>
-          <a:solidFill>
-            <a:schemeClr val="bg1"/>
-          </a:solidFill>
-          <a:ln>
-            <a:noFill/>
-          </a:ln>
-          <a:effectLst>
-            <a:outerShdw blurRad="190500" dist="38100" dir="2700000" algn="tl" rotWithShape="0">
-              <a:prstClr val="black">
-                <a:alpha val="15000"/>
-              </a:prstClr>
-            </a:outerShdw>
-          </a:effectLst>
-        </p:spPr>
-        <p:style>
-          <a:lnRef idx="2">
-            <a:schemeClr val="accent1">
-              <a:shade val="50000"/>
-            </a:schemeClr>
-          </a:lnRef>
-          <a:fillRef idx="1">
-            <a:schemeClr val="accent1"/>
-          </a:fillRef>
-          <a:effectRef idx="0">
-            <a:schemeClr val="accent1"/>
-          </a:effectRef>
-          <a:fontRef idx="minor">
-            <a:schemeClr val="lt1"/>
-          </a:fontRef>
-        </p:style>
+        <p:spPr/>
         <p:txBody>
-          <a:bodyPr lIns="731520" tIns="72000" rIns="108000" bIns="72000" rtlCol="0" anchor="ctr"/>
+          <a:bodyPr/>
           <a:lstStyle/>
           <a:p>
-            <a:endParaRPr lang="nl-NL" sz="1200" b="1" noProof="0" dirty="0">
-              <a:solidFill>
-                <a:schemeClr val="accent1"/>
-              </a:solidFill>
-            </a:endParaRPr>
+            <a:r>
+              <a:rPr lang="en-US" dirty="0"/>
+              <a:t>Generated with Sigrid</a:t>
+            </a:r>
+          </a:p>
+          <a:p>
+            <a:r>
+              <a:rPr lang="en-US" dirty="0"/>
+              <a:t>for Reportgeneratordemo</a:t>
+            </a:r>
           </a:p>
         </p:txBody>
       </p:sp>
@@ -37522,39 +35198,6 @@
       </p:grpSp>
       <p:sp>
         <p:nvSpPr>
-          <p:cNvPr id="1004" name="Footer Placeholder 1004"/>
-          <p:cNvSpPr>
-            <a:spLocks noGrp="1"/>
-          </p:cNvSpPr>
-          <p:nvPr>
-            <p:ph type="ftr" sz="quarter" idx="3"/>
-          </p:nvPr>
-        </p:nvSpPr>
-        <p:spPr>
-          <a:xfrm>
-            <a:off x="192088" y="6392596"/>
-            <a:ext cx="1763922" cy="370422"/>
-          </a:xfrm>
-        </p:spPr>
-        <p:txBody>
-          <a:bodyPr/>
-          <a:lstStyle/>
-          <a:p>
-            <a:r>
-              <a:rPr lang="en-US" dirty="0"/>
-              <a:t>Generated with Sigrid</a:t>
-            </a:r>
-          </a:p>
-          <a:p>
-            <a:r>
-              <a:rPr lang="en-US" dirty="0"/>
-              <a:t>for Reportgeneratordemo</a:t>
-            </a:r>
-          </a:p>
-        </p:txBody>
-      </p:sp>
-      <p:sp>
-        <p:nvSpPr>
           <p:cNvPr id="1071" name="TextBox 1071"/>
           <p:cNvSpPr txBox="1"/>
           <p:nvPr/>
@@ -37794,8 +35437,8 @@
         </p:nvSpPr>
         <p:spPr>
           <a:xfrm>
-            <a:off x="381600" y="129568"/>
-            <a:ext cx="1157222" cy="228209"/>
+            <a:off x="381600" y="129599"/>
+            <a:ext cx="1156940" cy="228145"/>
           </a:xfrm>
         </p:spPr>
         <p:txBody>
@@ -37808,25 +35451,6 @@
               <a:rPr lang="en-US" dirty="0"/>
               <a:t>Architecture</a:t>
             </a:r>
-          </a:p>
-        </p:txBody>
-      </p:sp>
-      <p:sp>
-        <p:nvSpPr>
-          <p:cNvPr id="3" name="Content Placeholder 2"/>
-          <p:cNvSpPr>
-            <a:spLocks noGrp="1"/>
-          </p:cNvSpPr>
-          <p:nvPr>
-            <p:ph sz="quarter" idx="13"/>
-          </p:nvPr>
-        </p:nvSpPr>
-        <p:spPr/>
-        <p:txBody>
-          <a:bodyPr/>
-          <a:lstStyle/>
-          <a:p>
-            <a:endParaRPr/>
           </a:p>
         </p:txBody>
       </p:sp>
@@ -37856,63 +35480,29 @@
       </p:sp>
       <p:sp>
         <p:nvSpPr>
-          <p:cNvPr id="7" name="Rectangle 6">
-            <a:extLst>
-              <a:ext uri="{FF2B5EF4-FFF2-40B4-BE49-F238E27FC236}">
-                <a16:creationId xmlns:a16="http://schemas.microsoft.com/office/drawing/2014/main" id="{4D956AE0-666A-B966-0B15-61A5E6C88F75}"/>
-              </a:ext>
-            </a:extLst>
-          </p:cNvPr>
-          <p:cNvSpPr/>
-          <p:nvPr/>
+          <p:cNvPr id="2004" name="Footer Placeholder 2004"/>
+          <p:cNvSpPr>
+            <a:spLocks noGrp="1"/>
+          </p:cNvSpPr>
+          <p:nvPr>
+            <p:ph type="ftr" sz="quarter" idx="3"/>
+          </p:nvPr>
         </p:nvSpPr>
-        <p:spPr>
-          <a:xfrm>
-            <a:off x="0" y="1390132"/>
-            <a:ext cx="12192000" cy="4927867"/>
-          </a:xfrm>
-          <a:prstGeom prst="rect">
-            <a:avLst/>
-          </a:prstGeom>
-          <a:solidFill>
-            <a:schemeClr val="bg1"/>
-          </a:solidFill>
-          <a:ln>
-            <a:noFill/>
-          </a:ln>
-          <a:effectLst>
-            <a:outerShdw blurRad="190500" dist="38100" dir="2700000" algn="tl" rotWithShape="0">
-              <a:prstClr val="black">
-                <a:alpha val="15000"/>
-              </a:prstClr>
-            </a:outerShdw>
-          </a:effectLst>
-        </p:spPr>
-        <p:style>
-          <a:lnRef idx="2">
-            <a:schemeClr val="accent1">
-              <a:shade val="50000"/>
-            </a:schemeClr>
-          </a:lnRef>
-          <a:fillRef idx="1">
-            <a:schemeClr val="accent1"/>
-          </a:fillRef>
-          <a:effectRef idx="0">
-            <a:schemeClr val="accent1"/>
-          </a:effectRef>
-          <a:fontRef idx="minor">
-            <a:schemeClr val="lt1"/>
-          </a:fontRef>
-        </p:style>
+        <p:spPr/>
         <p:txBody>
-          <a:bodyPr lIns="731520" tIns="72000" rIns="108000" bIns="72000" rtlCol="0" anchor="ctr"/>
+          <a:bodyPr/>
           <a:lstStyle/>
           <a:p>
-            <a:endParaRPr lang="nl-NL" sz="1200" b="1" noProof="0" dirty="0">
-              <a:solidFill>
-                <a:schemeClr val="accent1"/>
-              </a:solidFill>
-            </a:endParaRPr>
+            <a:r>
+              <a:rPr lang="en-US" dirty="0"/>
+              <a:t>Generated with Sigrid</a:t>
+            </a:r>
+          </a:p>
+          <a:p>
+            <a:r>
+              <a:rPr lang="en-US" dirty="0"/>
+              <a:t>for Reportgeneratordemo</a:t>
+            </a:r>
           </a:p>
         </p:txBody>
       </p:sp>
@@ -38252,39 +35842,6 @@
             <a:r>
               <a:rPr lang="en-US" sz="800" dirty="0"/>
               <a:t>★</a:t>
-            </a:r>
-          </a:p>
-        </p:txBody>
-      </p:sp>
-      <p:sp>
-        <p:nvSpPr>
-          <p:cNvPr id="2004" name="Footer Placeholder 2004"/>
-          <p:cNvSpPr>
-            <a:spLocks noGrp="1"/>
-          </p:cNvSpPr>
-          <p:nvPr>
-            <p:ph type="ftr" sz="quarter" idx="3"/>
-          </p:nvPr>
-        </p:nvSpPr>
-        <p:spPr>
-          <a:xfrm>
-            <a:off x="192088" y="6392596"/>
-            <a:ext cx="1763922" cy="370422"/>
-          </a:xfrm>
-        </p:spPr>
-        <p:txBody>
-          <a:bodyPr/>
-          <a:lstStyle/>
-          <a:p>
-            <a:r>
-              <a:rPr lang="en-US" dirty="0"/>
-              <a:t>Generated with Sigrid</a:t>
-            </a:r>
-          </a:p>
-          <a:p>
-            <a:r>
-              <a:rPr lang="en-US" dirty="0"/>
-              <a:t>for Reportgeneratordemo</a:t>
             </a:r>
           </a:p>
         </p:txBody>
@@ -38466,8 +36023,8 @@
         </p:nvSpPr>
         <p:spPr>
           <a:xfrm>
-            <a:off x="381600" y="129568"/>
-            <a:ext cx="1157222" cy="228209"/>
+            <a:off x="381600" y="129599"/>
+            <a:ext cx="1156940" cy="228145"/>
           </a:xfrm>
         </p:spPr>
         <p:txBody>
@@ -38480,25 +36037,6 @@
               <a:rPr lang="en-US" dirty="0"/>
               <a:t>Architecture</a:t>
             </a:r>
-          </a:p>
-        </p:txBody>
-      </p:sp>
-      <p:sp>
-        <p:nvSpPr>
-          <p:cNvPr id="3" name="Content Placeholder 2"/>
-          <p:cNvSpPr>
-            <a:spLocks noGrp="1"/>
-          </p:cNvSpPr>
-          <p:nvPr>
-            <p:ph sz="quarter" idx="13"/>
-          </p:nvPr>
-        </p:nvSpPr>
-        <p:spPr/>
-        <p:txBody>
-          <a:bodyPr/>
-          <a:lstStyle/>
-          <a:p>
-            <a:endParaRPr/>
           </a:p>
         </p:txBody>
       </p:sp>
@@ -38528,63 +36066,29 @@
       </p:sp>
       <p:sp>
         <p:nvSpPr>
-          <p:cNvPr id="7" name="Rectangle 6">
-            <a:extLst>
-              <a:ext uri="{FF2B5EF4-FFF2-40B4-BE49-F238E27FC236}">
-                <a16:creationId xmlns:a16="http://schemas.microsoft.com/office/drawing/2014/main" id="{4D956AE0-666A-B966-0B15-61A5E6C88F75}"/>
-              </a:ext>
-            </a:extLst>
-          </p:cNvPr>
-          <p:cNvSpPr/>
-          <p:nvPr/>
+          <p:cNvPr id="1004" name="Footer Placeholder 1004"/>
+          <p:cNvSpPr>
+            <a:spLocks noGrp="1"/>
+          </p:cNvSpPr>
+          <p:nvPr>
+            <p:ph type="ftr" sz="quarter" idx="3"/>
+          </p:nvPr>
         </p:nvSpPr>
-        <p:spPr>
-          <a:xfrm>
-            <a:off x="0" y="1390132"/>
-            <a:ext cx="12192000" cy="4927867"/>
-          </a:xfrm>
-          <a:prstGeom prst="rect">
-            <a:avLst/>
-          </a:prstGeom>
-          <a:solidFill>
-            <a:schemeClr val="bg1"/>
-          </a:solidFill>
-          <a:ln>
-            <a:noFill/>
-          </a:ln>
-          <a:effectLst>
-            <a:outerShdw blurRad="190500" dist="38100" dir="2700000" algn="tl" rotWithShape="0">
-              <a:prstClr val="black">
-                <a:alpha val="15000"/>
-              </a:prstClr>
-            </a:outerShdw>
-          </a:effectLst>
-        </p:spPr>
-        <p:style>
-          <a:lnRef idx="2">
-            <a:schemeClr val="accent1">
-              <a:shade val="50000"/>
-            </a:schemeClr>
-          </a:lnRef>
-          <a:fillRef idx="1">
-            <a:schemeClr val="accent1"/>
-          </a:fillRef>
-          <a:effectRef idx="0">
-            <a:schemeClr val="accent1"/>
-          </a:effectRef>
-          <a:fontRef idx="minor">
-            <a:schemeClr val="lt1"/>
-          </a:fontRef>
-        </p:style>
+        <p:spPr/>
         <p:txBody>
-          <a:bodyPr lIns="731520" tIns="72000" rIns="108000" bIns="72000" rtlCol="0" anchor="ctr"/>
+          <a:bodyPr/>
           <a:lstStyle/>
           <a:p>
-            <a:endParaRPr lang="nl-NL" sz="1200" b="1" noProof="0" dirty="0">
-              <a:solidFill>
-                <a:schemeClr val="accent1"/>
-              </a:solidFill>
-            </a:endParaRPr>
+            <a:r>
+              <a:rPr lang="en-US" dirty="0"/>
+              <a:t>Generated with Sigrid</a:t>
+            </a:r>
+          </a:p>
+          <a:p>
+            <a:r>
+              <a:rPr lang="en-US" dirty="0"/>
+              <a:t>for Reportgeneratordemo</a:t>
+            </a:r>
           </a:p>
         </p:txBody>
       </p:sp>
@@ -39115,39 +36619,6 @@
       </p:grpSp>
       <p:sp>
         <p:nvSpPr>
-          <p:cNvPr id="1004" name="Footer Placeholder 1004"/>
-          <p:cNvSpPr>
-            <a:spLocks noGrp="1"/>
-          </p:cNvSpPr>
-          <p:nvPr>
-            <p:ph type="ftr" sz="quarter" idx="3"/>
-          </p:nvPr>
-        </p:nvSpPr>
-        <p:spPr>
-          <a:xfrm>
-            <a:off x="192088" y="6392596"/>
-            <a:ext cx="1763922" cy="370422"/>
-          </a:xfrm>
-        </p:spPr>
-        <p:txBody>
-          <a:bodyPr/>
-          <a:lstStyle/>
-          <a:p>
-            <a:r>
-              <a:rPr lang="en-US" dirty="0"/>
-              <a:t>Generated with Sigrid</a:t>
-            </a:r>
-          </a:p>
-          <a:p>
-            <a:r>
-              <a:rPr lang="en-US" dirty="0"/>
-              <a:t>for Reportgeneratordemo</a:t>
-            </a:r>
-          </a:p>
-        </p:txBody>
-      </p:sp>
-      <p:sp>
-        <p:nvSpPr>
           <p:cNvPr id="1071" name="TextBox 1071"/>
           <p:cNvSpPr txBox="1"/>
           <p:nvPr/>
@@ -39387,8 +36858,8 @@
         </p:nvSpPr>
         <p:spPr>
           <a:xfrm>
-            <a:off x="381600" y="129568"/>
-            <a:ext cx="1157222" cy="228209"/>
+            <a:off x="381600" y="129599"/>
+            <a:ext cx="1156940" cy="228145"/>
           </a:xfrm>
         </p:spPr>
         <p:txBody>
@@ -39401,25 +36872,6 @@
               <a:rPr lang="en-US" dirty="0"/>
               <a:t>Architecture</a:t>
             </a:r>
-          </a:p>
-        </p:txBody>
-      </p:sp>
-      <p:sp>
-        <p:nvSpPr>
-          <p:cNvPr id="3" name="Content Placeholder 2"/>
-          <p:cNvSpPr>
-            <a:spLocks noGrp="1"/>
-          </p:cNvSpPr>
-          <p:nvPr>
-            <p:ph sz="quarter" idx="13"/>
-          </p:nvPr>
-        </p:nvSpPr>
-        <p:spPr/>
-        <p:txBody>
-          <a:bodyPr/>
-          <a:lstStyle/>
-          <a:p>
-            <a:endParaRPr/>
           </a:p>
         </p:txBody>
       </p:sp>
@@ -39449,63 +36901,29 @@
       </p:sp>
       <p:sp>
         <p:nvSpPr>
-          <p:cNvPr id="7" name="Rectangle 6">
-            <a:extLst>
-              <a:ext uri="{FF2B5EF4-FFF2-40B4-BE49-F238E27FC236}">
-                <a16:creationId xmlns:a16="http://schemas.microsoft.com/office/drawing/2014/main" id="{4D956AE0-666A-B966-0B15-61A5E6C88F75}"/>
-              </a:ext>
-            </a:extLst>
-          </p:cNvPr>
-          <p:cNvSpPr/>
-          <p:nvPr/>
+          <p:cNvPr id="2004" name="Footer Placeholder 2004"/>
+          <p:cNvSpPr>
+            <a:spLocks noGrp="1"/>
+          </p:cNvSpPr>
+          <p:nvPr>
+            <p:ph type="ftr" sz="quarter" idx="3"/>
+          </p:nvPr>
         </p:nvSpPr>
-        <p:spPr>
-          <a:xfrm>
-            <a:off x="0" y="1390132"/>
-            <a:ext cx="12192000" cy="4927867"/>
-          </a:xfrm>
-          <a:prstGeom prst="rect">
-            <a:avLst/>
-          </a:prstGeom>
-          <a:solidFill>
-            <a:schemeClr val="bg1"/>
-          </a:solidFill>
-          <a:ln>
-            <a:noFill/>
-          </a:ln>
-          <a:effectLst>
-            <a:outerShdw blurRad="190500" dist="38100" dir="2700000" algn="tl" rotWithShape="0">
-              <a:prstClr val="black">
-                <a:alpha val="15000"/>
-              </a:prstClr>
-            </a:outerShdw>
-          </a:effectLst>
-        </p:spPr>
-        <p:style>
-          <a:lnRef idx="2">
-            <a:schemeClr val="accent1">
-              <a:shade val="50000"/>
-            </a:schemeClr>
-          </a:lnRef>
-          <a:fillRef idx="1">
-            <a:schemeClr val="accent1"/>
-          </a:fillRef>
-          <a:effectRef idx="0">
-            <a:schemeClr val="accent1"/>
-          </a:effectRef>
-          <a:fontRef idx="minor">
-            <a:schemeClr val="lt1"/>
-          </a:fontRef>
-        </p:style>
+        <p:spPr/>
         <p:txBody>
-          <a:bodyPr lIns="731520" tIns="72000" rIns="108000" bIns="72000" rtlCol="0" anchor="ctr"/>
+          <a:bodyPr/>
           <a:lstStyle/>
           <a:p>
-            <a:endParaRPr lang="nl-NL" sz="1200" b="1" noProof="0" dirty="0">
-              <a:solidFill>
-                <a:schemeClr val="accent1"/>
-              </a:solidFill>
-            </a:endParaRPr>
+            <a:r>
+              <a:rPr lang="en-US" dirty="0"/>
+              <a:t>Generated with Sigrid</a:t>
+            </a:r>
+          </a:p>
+          <a:p>
+            <a:r>
+              <a:rPr lang="en-US" dirty="0"/>
+              <a:t>for Reportgeneratordemo</a:t>
+            </a:r>
           </a:p>
         </p:txBody>
       </p:sp>
@@ -39845,39 +37263,6 @@
             <a:r>
               <a:rPr lang="en-US" sz="800" dirty="0"/>
               <a:t>★</a:t>
-            </a:r>
-          </a:p>
-        </p:txBody>
-      </p:sp>
-      <p:sp>
-        <p:nvSpPr>
-          <p:cNvPr id="2004" name="Footer Placeholder 2004"/>
-          <p:cNvSpPr>
-            <a:spLocks noGrp="1"/>
-          </p:cNvSpPr>
-          <p:nvPr>
-            <p:ph type="ftr" sz="quarter" idx="3"/>
-          </p:nvPr>
-        </p:nvSpPr>
-        <p:spPr>
-          <a:xfrm>
-            <a:off x="192088" y="6392596"/>
-            <a:ext cx="1763922" cy="370422"/>
-          </a:xfrm>
-        </p:spPr>
-        <p:txBody>
-          <a:bodyPr/>
-          <a:lstStyle/>
-          <a:p>
-            <a:r>
-              <a:rPr lang="en-US" dirty="0"/>
-              <a:t>Generated with Sigrid</a:t>
-            </a:r>
-          </a:p>
-          <a:p>
-            <a:r>
-              <a:rPr lang="en-US" dirty="0"/>
-              <a:t>for Reportgeneratordemo</a:t>
             </a:r>
           </a:p>
         </p:txBody>
@@ -40327,8 +37712,8 @@
         </p:nvSpPr>
         <p:spPr>
           <a:xfrm>
-            <a:off x="381600" y="129568"/>
-            <a:ext cx="1663129" cy="228209"/>
+            <a:off x="381600" y="129599"/>
+            <a:ext cx="1663411" cy="228145"/>
           </a:xfrm>
         </p:spPr>
         <p:txBody>
@@ -40341,25 +37726,6 @@
               <a:rPr lang="en-US" dirty="0"/>
               <a:t>Open Source Health</a:t>
             </a:r>
-          </a:p>
-        </p:txBody>
-      </p:sp>
-      <p:sp>
-        <p:nvSpPr>
-          <p:cNvPr id="3" name="Content Placeholder 2"/>
-          <p:cNvSpPr>
-            <a:spLocks noGrp="1"/>
-          </p:cNvSpPr>
-          <p:nvPr>
-            <p:ph sz="quarter" idx="13"/>
-          </p:nvPr>
-        </p:nvSpPr>
-        <p:spPr/>
-        <p:txBody>
-          <a:bodyPr/>
-          <a:lstStyle/>
-          <a:p>
-            <a:endParaRPr/>
           </a:p>
         </p:txBody>
       </p:sp>
@@ -40389,63 +37755,29 @@
       </p:sp>
       <p:sp>
         <p:nvSpPr>
-          <p:cNvPr id="7" name="Rectangle 6">
-            <a:extLst>
-              <a:ext uri="{FF2B5EF4-FFF2-40B4-BE49-F238E27FC236}">
-                <a16:creationId xmlns:a16="http://schemas.microsoft.com/office/drawing/2014/main" id="{4D956AE0-666A-B966-0B15-61A5E6C88F75}"/>
-              </a:ext>
-            </a:extLst>
-          </p:cNvPr>
-          <p:cNvSpPr/>
-          <p:nvPr/>
+          <p:cNvPr id="1004" name="Footer Placeholder 1004"/>
+          <p:cNvSpPr>
+            <a:spLocks noGrp="1"/>
+          </p:cNvSpPr>
+          <p:nvPr>
+            <p:ph type="ftr" sz="quarter" idx="3"/>
+          </p:nvPr>
         </p:nvSpPr>
-        <p:spPr>
-          <a:xfrm>
-            <a:off x="0" y="1390132"/>
-            <a:ext cx="12192000" cy="4927867"/>
-          </a:xfrm>
-          <a:prstGeom prst="rect">
-            <a:avLst/>
-          </a:prstGeom>
-          <a:solidFill>
-            <a:schemeClr val="bg1"/>
-          </a:solidFill>
-          <a:ln>
-            <a:noFill/>
-          </a:ln>
-          <a:effectLst>
-            <a:outerShdw blurRad="190500" dist="38100" dir="2700000" algn="tl" rotWithShape="0">
-              <a:prstClr val="black">
-                <a:alpha val="15000"/>
-              </a:prstClr>
-            </a:outerShdw>
-          </a:effectLst>
-        </p:spPr>
-        <p:style>
-          <a:lnRef idx="2">
-            <a:schemeClr val="accent1">
-              <a:shade val="50000"/>
-            </a:schemeClr>
-          </a:lnRef>
-          <a:fillRef idx="1">
-            <a:schemeClr val="accent1"/>
-          </a:fillRef>
-          <a:effectRef idx="0">
-            <a:schemeClr val="accent1"/>
-          </a:effectRef>
-          <a:fontRef idx="minor">
-            <a:schemeClr val="lt1"/>
-          </a:fontRef>
-        </p:style>
+        <p:spPr/>
         <p:txBody>
-          <a:bodyPr lIns="731520" tIns="72000" rIns="108000" bIns="72000" rtlCol="0" anchor="ctr"/>
+          <a:bodyPr/>
           <a:lstStyle/>
           <a:p>
-            <a:endParaRPr lang="nl-NL" sz="1200" b="1" noProof="0" dirty="0">
-              <a:solidFill>
-                <a:schemeClr val="accent1"/>
-              </a:solidFill>
-            </a:endParaRPr>
+            <a:r>
+              <a:rPr lang="en-US" dirty="0"/>
+              <a:t>Generated with Sigrid</a:t>
+            </a:r>
+          </a:p>
+          <a:p>
+            <a:r>
+              <a:rPr lang="en-US" dirty="0"/>
+              <a:t>for Reportgeneratordemo</a:t>
+            </a:r>
           </a:p>
         </p:txBody>
       </p:sp>
@@ -40976,39 +38308,6 @@
       </p:grpSp>
       <p:sp>
         <p:nvSpPr>
-          <p:cNvPr id="1004" name="Footer Placeholder 1004"/>
-          <p:cNvSpPr>
-            <a:spLocks noGrp="1"/>
-          </p:cNvSpPr>
-          <p:nvPr>
-            <p:ph type="ftr" sz="quarter" idx="3"/>
-          </p:nvPr>
-        </p:nvSpPr>
-        <p:spPr>
-          <a:xfrm>
-            <a:off x="192088" y="6392596"/>
-            <a:ext cx="1763922" cy="370422"/>
-          </a:xfrm>
-        </p:spPr>
-        <p:txBody>
-          <a:bodyPr/>
-          <a:lstStyle/>
-          <a:p>
-            <a:r>
-              <a:rPr lang="en-US" dirty="0"/>
-              <a:t>Generated with Sigrid</a:t>
-            </a:r>
-          </a:p>
-          <a:p>
-            <a:r>
-              <a:rPr lang="en-US" dirty="0"/>
-              <a:t>for Reportgeneratordemo</a:t>
-            </a:r>
-          </a:p>
-        </p:txBody>
-      </p:sp>
-      <p:sp>
-        <p:nvSpPr>
           <p:cNvPr id="1071" name="TextBox 1071"/>
           <p:cNvSpPr txBox="1"/>
           <p:nvPr/>
@@ -41248,8 +38547,8 @@
         </p:nvSpPr>
         <p:spPr>
           <a:xfrm>
-            <a:off x="381600" y="129568"/>
-            <a:ext cx="1410176" cy="228209"/>
+            <a:off x="381600" y="129599"/>
+            <a:ext cx="1410176" cy="228145"/>
           </a:xfrm>
         </p:spPr>
         <p:txBody>
@@ -41262,25 +38561,6 @@
               <a:rPr lang="en-US" dirty="0"/>
               <a:t>Maintainability</a:t>
             </a:r>
-          </a:p>
-        </p:txBody>
-      </p:sp>
-      <p:sp>
-        <p:nvSpPr>
-          <p:cNvPr id="3" name="Content Placeholder 2"/>
-          <p:cNvSpPr>
-            <a:spLocks noGrp="1"/>
-          </p:cNvSpPr>
-          <p:nvPr>
-            <p:ph sz="quarter" idx="13"/>
-          </p:nvPr>
-        </p:nvSpPr>
-        <p:spPr/>
-        <p:txBody>
-          <a:bodyPr/>
-          <a:lstStyle/>
-          <a:p>
-            <a:endParaRPr/>
           </a:p>
         </p:txBody>
       </p:sp>
@@ -41310,63 +38590,29 @@
       </p:sp>
       <p:sp>
         <p:nvSpPr>
-          <p:cNvPr id="7" name="Rectangle 6">
-            <a:extLst>
-              <a:ext uri="{FF2B5EF4-FFF2-40B4-BE49-F238E27FC236}">
-                <a16:creationId xmlns:a16="http://schemas.microsoft.com/office/drawing/2014/main" id="{4D956AE0-666A-B966-0B15-61A5E6C88F75}"/>
-              </a:ext>
-            </a:extLst>
-          </p:cNvPr>
-          <p:cNvSpPr/>
-          <p:nvPr/>
+          <p:cNvPr id="2004" name="Footer Placeholder 2004"/>
+          <p:cNvSpPr>
+            <a:spLocks noGrp="1"/>
+          </p:cNvSpPr>
+          <p:nvPr>
+            <p:ph type="ftr" sz="quarter" idx="3"/>
+          </p:nvPr>
         </p:nvSpPr>
-        <p:spPr>
-          <a:xfrm>
-            <a:off x="0" y="1390132"/>
-            <a:ext cx="12192000" cy="4927867"/>
-          </a:xfrm>
-          <a:prstGeom prst="rect">
-            <a:avLst/>
-          </a:prstGeom>
-          <a:solidFill>
-            <a:schemeClr val="bg1"/>
-          </a:solidFill>
-          <a:ln>
-            <a:noFill/>
-          </a:ln>
-          <a:effectLst>
-            <a:outerShdw blurRad="190500" dist="38100" dir="2700000" algn="tl" rotWithShape="0">
-              <a:prstClr val="black">
-                <a:alpha val="15000"/>
-              </a:prstClr>
-            </a:outerShdw>
-          </a:effectLst>
-        </p:spPr>
-        <p:style>
-          <a:lnRef idx="2">
-            <a:schemeClr val="accent1">
-              <a:shade val="50000"/>
-            </a:schemeClr>
-          </a:lnRef>
-          <a:fillRef idx="1">
-            <a:schemeClr val="accent1"/>
-          </a:fillRef>
-          <a:effectRef idx="0">
-            <a:schemeClr val="accent1"/>
-          </a:effectRef>
-          <a:fontRef idx="minor">
-            <a:schemeClr val="lt1"/>
-          </a:fontRef>
-        </p:style>
+        <p:spPr/>
         <p:txBody>
-          <a:bodyPr lIns="731520" tIns="72000" rIns="108000" bIns="72000" rtlCol="0" anchor="ctr"/>
+          <a:bodyPr/>
           <a:lstStyle/>
           <a:p>
-            <a:endParaRPr lang="nl-NL" sz="1200" b="1" noProof="0" dirty="0">
-              <a:solidFill>
-                <a:schemeClr val="accent1"/>
-              </a:solidFill>
-            </a:endParaRPr>
+            <a:r>
+              <a:rPr lang="en-US" dirty="0"/>
+              <a:t>Generated with Sigrid</a:t>
+            </a:r>
+          </a:p>
+          <a:p>
+            <a:r>
+              <a:rPr lang="en-US" dirty="0"/>
+              <a:t>for Reportgeneratordemo</a:t>
+            </a:r>
           </a:p>
         </p:txBody>
       </p:sp>
@@ -41706,39 +38952,6 @@
             <a:r>
               <a:rPr lang="en-US" sz="800" dirty="0"/>
               <a:t>★</a:t>
-            </a:r>
-          </a:p>
-        </p:txBody>
-      </p:sp>
-      <p:sp>
-        <p:nvSpPr>
-          <p:cNvPr id="2004" name="Footer Placeholder 2004"/>
-          <p:cNvSpPr>
-            <a:spLocks noGrp="1"/>
-          </p:cNvSpPr>
-          <p:nvPr>
-            <p:ph type="ftr" sz="quarter" idx="3"/>
-          </p:nvPr>
-        </p:nvSpPr>
-        <p:spPr>
-          <a:xfrm>
-            <a:off x="192088" y="6392596"/>
-            <a:ext cx="1763922" cy="370422"/>
-          </a:xfrm>
-        </p:spPr>
-        <p:txBody>
-          <a:bodyPr/>
-          <a:lstStyle/>
-          <a:p>
-            <a:r>
-              <a:rPr lang="en-US" dirty="0"/>
-              <a:t>Generated with Sigrid</a:t>
-            </a:r>
-          </a:p>
-          <a:p>
-            <a:r>
-              <a:rPr lang="en-US" dirty="0"/>
-              <a:t>for Reportgeneratordemo</a:t>
             </a:r>
           </a:p>
         </p:txBody>
@@ -41835,7 +39048,21 @@
           <a:p>
             <a:pPr indent="-283845"/>
             <a:r>
-              <a:rPr lang="en-GB" sz="1550" dirty="0">
+              <a:rPr lang="en-GB" sz="1550" dirty="0" err="1">
+                <a:ea typeface="Calibri"/>
+                <a:cs typeface="Calibri"/>
+              </a:rPr>
+              <a:t>Duplication has decreased in score by -0.01★ on average across the portfolio.</a:t>
+            </a:r>
+            <a:endParaRPr lang="en-GB" sz="1550" dirty="0">
+              <a:ea typeface="Calibri"/>
+              <a:cs typeface="Calibri"/>
+            </a:endParaRPr>
+          </a:p>
+          <a:p>
+            <a:pPr indent="-283845"/>
+            <a:r>
+              <a:rPr lang="en-GB" sz="1550" dirty="0" err="1">
                 <a:ea typeface="Calibri"/>
                 <a:cs typeface="Calibri"/>
               </a:rPr>
@@ -41920,8 +39147,8 @@
         </p:nvSpPr>
         <p:spPr>
           <a:xfrm>
-            <a:off x="381600" y="129568"/>
-            <a:ext cx="1663129" cy="228209"/>
+            <a:off x="381600" y="129599"/>
+            <a:ext cx="1663411" cy="228145"/>
           </a:xfrm>
         </p:spPr>
         <p:txBody>
@@ -41934,25 +39161,6 @@
               <a:rPr lang="en-US" dirty="0"/>
               <a:t>Open Source Health</a:t>
             </a:r>
-          </a:p>
-        </p:txBody>
-      </p:sp>
-      <p:sp>
-        <p:nvSpPr>
-          <p:cNvPr id="3" name="Content Placeholder 2"/>
-          <p:cNvSpPr>
-            <a:spLocks noGrp="1"/>
-          </p:cNvSpPr>
-          <p:nvPr>
-            <p:ph sz="quarter" idx="13"/>
-          </p:nvPr>
-        </p:nvSpPr>
-        <p:spPr/>
-        <p:txBody>
-          <a:bodyPr/>
-          <a:lstStyle/>
-          <a:p>
-            <a:endParaRPr/>
           </a:p>
         </p:txBody>
       </p:sp>
@@ -41982,63 +39190,29 @@
       </p:sp>
       <p:sp>
         <p:nvSpPr>
-          <p:cNvPr id="7" name="Rectangle 6">
-            <a:extLst>
-              <a:ext uri="{FF2B5EF4-FFF2-40B4-BE49-F238E27FC236}">
-                <a16:creationId xmlns:a16="http://schemas.microsoft.com/office/drawing/2014/main" id="{4D956AE0-666A-B966-0B15-61A5E6C88F75}"/>
-              </a:ext>
-            </a:extLst>
-          </p:cNvPr>
-          <p:cNvSpPr/>
-          <p:nvPr/>
+          <p:cNvPr id="1004" name="Footer Placeholder 1004"/>
+          <p:cNvSpPr>
+            <a:spLocks noGrp="1"/>
+          </p:cNvSpPr>
+          <p:nvPr>
+            <p:ph type="ftr" sz="quarter" idx="3"/>
+          </p:nvPr>
         </p:nvSpPr>
-        <p:spPr>
-          <a:xfrm>
-            <a:off x="0" y="1390132"/>
-            <a:ext cx="12192000" cy="4927867"/>
-          </a:xfrm>
-          <a:prstGeom prst="rect">
-            <a:avLst/>
-          </a:prstGeom>
-          <a:solidFill>
-            <a:schemeClr val="bg1"/>
-          </a:solidFill>
-          <a:ln>
-            <a:noFill/>
-          </a:ln>
-          <a:effectLst>
-            <a:outerShdw blurRad="190500" dist="38100" dir="2700000" algn="tl" rotWithShape="0">
-              <a:prstClr val="black">
-                <a:alpha val="15000"/>
-              </a:prstClr>
-            </a:outerShdw>
-          </a:effectLst>
-        </p:spPr>
-        <p:style>
-          <a:lnRef idx="2">
-            <a:schemeClr val="accent1">
-              <a:shade val="50000"/>
-            </a:schemeClr>
-          </a:lnRef>
-          <a:fillRef idx="1">
-            <a:schemeClr val="accent1"/>
-          </a:fillRef>
-          <a:effectRef idx="0">
-            <a:schemeClr val="accent1"/>
-          </a:effectRef>
-          <a:fontRef idx="minor">
-            <a:schemeClr val="lt1"/>
-          </a:fontRef>
-        </p:style>
+        <p:spPr/>
         <p:txBody>
-          <a:bodyPr lIns="731520" tIns="72000" rIns="108000" bIns="72000" rtlCol="0" anchor="ctr"/>
+          <a:bodyPr/>
           <a:lstStyle/>
           <a:p>
-            <a:endParaRPr lang="nl-NL" sz="1200" b="1" noProof="0" dirty="0">
-              <a:solidFill>
-                <a:schemeClr val="accent1"/>
-              </a:solidFill>
-            </a:endParaRPr>
+            <a:r>
+              <a:rPr lang="en-US" dirty="0"/>
+              <a:t>Generated with Sigrid</a:t>
+            </a:r>
+          </a:p>
+          <a:p>
+            <a:r>
+              <a:rPr lang="en-US" dirty="0"/>
+              <a:t>for Reportgeneratordemo</a:t>
+            </a:r>
           </a:p>
         </p:txBody>
       </p:sp>
@@ -42569,39 +39743,6 @@
       </p:grpSp>
       <p:sp>
         <p:nvSpPr>
-          <p:cNvPr id="1004" name="Footer Placeholder 1004"/>
-          <p:cNvSpPr>
-            <a:spLocks noGrp="1"/>
-          </p:cNvSpPr>
-          <p:nvPr>
-            <p:ph type="ftr" sz="quarter" idx="3"/>
-          </p:nvPr>
-        </p:nvSpPr>
-        <p:spPr>
-          <a:xfrm>
-            <a:off x="192088" y="6392596"/>
-            <a:ext cx="1763922" cy="370422"/>
-          </a:xfrm>
-        </p:spPr>
-        <p:txBody>
-          <a:bodyPr/>
-          <a:lstStyle/>
-          <a:p>
-            <a:r>
-              <a:rPr lang="en-US" dirty="0"/>
-              <a:t>Generated with Sigrid</a:t>
-            </a:r>
-          </a:p>
-          <a:p>
-            <a:r>
-              <a:rPr lang="en-US" dirty="0"/>
-              <a:t>for Reportgeneratordemo</a:t>
-            </a:r>
-          </a:p>
-        </p:txBody>
-      </p:sp>
-      <p:sp>
-        <p:nvSpPr>
           <p:cNvPr id="1071" name="TextBox 1071"/>
           <p:cNvSpPr txBox="1"/>
           <p:nvPr/>
@@ -42841,8 +39982,8 @@
         </p:nvSpPr>
         <p:spPr>
           <a:xfrm>
-            <a:off x="381600" y="129568"/>
-            <a:ext cx="1663129" cy="228209"/>
+            <a:off x="381600" y="129599"/>
+            <a:ext cx="1663411" cy="228145"/>
           </a:xfrm>
         </p:spPr>
         <p:txBody>
@@ -42855,25 +39996,6 @@
               <a:rPr lang="en-US" dirty="0"/>
               <a:t>Open Source Health</a:t>
             </a:r>
-          </a:p>
-        </p:txBody>
-      </p:sp>
-      <p:sp>
-        <p:nvSpPr>
-          <p:cNvPr id="3" name="Content Placeholder 2"/>
-          <p:cNvSpPr>
-            <a:spLocks noGrp="1"/>
-          </p:cNvSpPr>
-          <p:nvPr>
-            <p:ph sz="quarter" idx="13"/>
-          </p:nvPr>
-        </p:nvSpPr>
-        <p:spPr/>
-        <p:txBody>
-          <a:bodyPr/>
-          <a:lstStyle/>
-          <a:p>
-            <a:endParaRPr/>
           </a:p>
         </p:txBody>
       </p:sp>
@@ -42903,63 +40025,29 @@
       </p:sp>
       <p:sp>
         <p:nvSpPr>
-          <p:cNvPr id="7" name="Rectangle 6">
-            <a:extLst>
-              <a:ext uri="{FF2B5EF4-FFF2-40B4-BE49-F238E27FC236}">
-                <a16:creationId xmlns:a16="http://schemas.microsoft.com/office/drawing/2014/main" id="{4D956AE0-666A-B966-0B15-61A5E6C88F75}"/>
-              </a:ext>
-            </a:extLst>
-          </p:cNvPr>
-          <p:cNvSpPr/>
-          <p:nvPr/>
+          <p:cNvPr id="1004" name="Footer Placeholder 1004"/>
+          <p:cNvSpPr>
+            <a:spLocks noGrp="1"/>
+          </p:cNvSpPr>
+          <p:nvPr>
+            <p:ph type="ftr" sz="quarter" idx="3"/>
+          </p:nvPr>
         </p:nvSpPr>
-        <p:spPr>
-          <a:xfrm>
-            <a:off x="0" y="1390132"/>
-            <a:ext cx="12192000" cy="4927867"/>
-          </a:xfrm>
-          <a:prstGeom prst="rect">
-            <a:avLst/>
-          </a:prstGeom>
-          <a:solidFill>
-            <a:schemeClr val="bg1"/>
-          </a:solidFill>
-          <a:ln>
-            <a:noFill/>
-          </a:ln>
-          <a:effectLst>
-            <a:outerShdw blurRad="190500" dist="38100" dir="2700000" algn="tl" rotWithShape="0">
-              <a:prstClr val="black">
-                <a:alpha val="15000"/>
-              </a:prstClr>
-            </a:outerShdw>
-          </a:effectLst>
-        </p:spPr>
-        <p:style>
-          <a:lnRef idx="2">
-            <a:schemeClr val="accent1">
-              <a:shade val="50000"/>
-            </a:schemeClr>
-          </a:lnRef>
-          <a:fillRef idx="1">
-            <a:schemeClr val="accent1"/>
-          </a:fillRef>
-          <a:effectRef idx="0">
-            <a:schemeClr val="accent1"/>
-          </a:effectRef>
-          <a:fontRef idx="minor">
-            <a:schemeClr val="lt1"/>
-          </a:fontRef>
-        </p:style>
+        <p:spPr/>
         <p:txBody>
-          <a:bodyPr lIns="731520" tIns="72000" rIns="108000" bIns="72000" rtlCol="0" anchor="ctr"/>
+          <a:bodyPr/>
           <a:lstStyle/>
           <a:p>
-            <a:endParaRPr lang="nl-NL" sz="1200" b="1" noProof="0" dirty="0">
-              <a:solidFill>
-                <a:schemeClr val="accent1"/>
-              </a:solidFill>
-            </a:endParaRPr>
+            <a:r>
+              <a:rPr lang="en-US" dirty="0"/>
+              <a:t>Generated with Sigrid</a:t>
+            </a:r>
+          </a:p>
+          <a:p>
+            <a:r>
+              <a:rPr lang="en-US" dirty="0"/>
+              <a:t>for Reportgeneratordemo</a:t>
+            </a:r>
           </a:p>
         </p:txBody>
       </p:sp>
@@ -43490,39 +40578,6 @@
       </p:grpSp>
       <p:sp>
         <p:nvSpPr>
-          <p:cNvPr id="1004" name="Footer Placeholder 1004"/>
-          <p:cNvSpPr>
-            <a:spLocks noGrp="1"/>
-          </p:cNvSpPr>
-          <p:nvPr>
-            <p:ph type="ftr" sz="quarter" idx="3"/>
-          </p:nvPr>
-        </p:nvSpPr>
-        <p:spPr>
-          <a:xfrm>
-            <a:off x="192088" y="6392596"/>
-            <a:ext cx="1763922" cy="370422"/>
-          </a:xfrm>
-        </p:spPr>
-        <p:txBody>
-          <a:bodyPr/>
-          <a:lstStyle/>
-          <a:p>
-            <a:r>
-              <a:rPr lang="en-US" dirty="0"/>
-              <a:t>Generated with Sigrid</a:t>
-            </a:r>
-          </a:p>
-          <a:p>
-            <a:r>
-              <a:rPr lang="en-US" dirty="0"/>
-              <a:t>for Reportgeneratordemo</a:t>
-            </a:r>
-          </a:p>
-        </p:txBody>
-      </p:sp>
-      <p:sp>
-        <p:nvSpPr>
           <p:cNvPr id="1071" name="TextBox 1071"/>
           <p:cNvSpPr txBox="1"/>
           <p:nvPr/>
@@ -43762,8 +40817,8 @@
         </p:nvSpPr>
         <p:spPr>
           <a:xfrm>
-            <a:off x="381600" y="129568"/>
-            <a:ext cx="1663129" cy="228209"/>
+            <a:off x="381600" y="129599"/>
+            <a:ext cx="1663129" cy="228145"/>
           </a:xfrm>
         </p:spPr>
         <p:txBody>
@@ -43776,25 +40831,6 @@
               <a:rPr lang="en-US" dirty="0"/>
               <a:t>Open Source Health</a:t>
             </a:r>
-          </a:p>
-        </p:txBody>
-      </p:sp>
-      <p:sp>
-        <p:nvSpPr>
-          <p:cNvPr id="3" name="Content Placeholder 2"/>
-          <p:cNvSpPr>
-            <a:spLocks noGrp="1"/>
-          </p:cNvSpPr>
-          <p:nvPr>
-            <p:ph sz="quarter" idx="13"/>
-          </p:nvPr>
-        </p:nvSpPr>
-        <p:spPr/>
-        <p:txBody>
-          <a:bodyPr/>
-          <a:lstStyle/>
-          <a:p>
-            <a:endParaRPr/>
           </a:p>
         </p:txBody>
       </p:sp>
@@ -43824,63 +40860,29 @@
       </p:sp>
       <p:sp>
         <p:nvSpPr>
-          <p:cNvPr id="7" name="Rectangle 6">
-            <a:extLst>
-              <a:ext uri="{FF2B5EF4-FFF2-40B4-BE49-F238E27FC236}">
-                <a16:creationId xmlns:a16="http://schemas.microsoft.com/office/drawing/2014/main" id="{4D956AE0-666A-B966-0B15-61A5E6C88F75}"/>
-              </a:ext>
-            </a:extLst>
-          </p:cNvPr>
-          <p:cNvSpPr/>
-          <p:nvPr/>
+          <p:cNvPr id="1004" name="Footer Placeholder 1004"/>
+          <p:cNvSpPr>
+            <a:spLocks noGrp="1"/>
+          </p:cNvSpPr>
+          <p:nvPr>
+            <p:ph type="ftr" sz="quarter" idx="3"/>
+          </p:nvPr>
         </p:nvSpPr>
-        <p:spPr>
-          <a:xfrm>
-            <a:off x="0" y="1390132"/>
-            <a:ext cx="12192000" cy="4927867"/>
-          </a:xfrm>
-          <a:prstGeom prst="rect">
-            <a:avLst/>
-          </a:prstGeom>
-          <a:solidFill>
-            <a:schemeClr val="bg1"/>
-          </a:solidFill>
-          <a:ln>
-            <a:noFill/>
-          </a:ln>
-          <a:effectLst>
-            <a:outerShdw blurRad="190500" dist="38100" dir="2700000" algn="tl" rotWithShape="0">
-              <a:prstClr val="black">
-                <a:alpha val="15000"/>
-              </a:prstClr>
-            </a:outerShdw>
-          </a:effectLst>
-        </p:spPr>
-        <p:style>
-          <a:lnRef idx="2">
-            <a:schemeClr val="accent1">
-              <a:shade val="50000"/>
-            </a:schemeClr>
-          </a:lnRef>
-          <a:fillRef idx="1">
-            <a:schemeClr val="accent1"/>
-          </a:fillRef>
-          <a:effectRef idx="0">
-            <a:schemeClr val="accent1"/>
-          </a:effectRef>
-          <a:fontRef idx="minor">
-            <a:schemeClr val="lt1"/>
-          </a:fontRef>
-        </p:style>
+        <p:spPr/>
         <p:txBody>
-          <a:bodyPr lIns="731520" tIns="72000" rIns="108000" bIns="72000" rtlCol="0" anchor="ctr"/>
+          <a:bodyPr/>
           <a:lstStyle/>
           <a:p>
-            <a:endParaRPr lang="nl-NL" sz="1200" b="1" noProof="0" dirty="0">
-              <a:solidFill>
-                <a:schemeClr val="accent1"/>
-              </a:solidFill>
-            </a:endParaRPr>
+            <a:r>
+              <a:rPr lang="en-US" dirty="0"/>
+              <a:t>Generated with Sigrid</a:t>
+            </a:r>
+          </a:p>
+          <a:p>
+            <a:r>
+              <a:rPr lang="en-US" dirty="0"/>
+              <a:t>for Reportgeneratordemo</a:t>
+            </a:r>
           </a:p>
         </p:txBody>
       </p:sp>
@@ -44411,39 +41413,6 @@
       </p:grpSp>
       <p:sp>
         <p:nvSpPr>
-          <p:cNvPr id="1004" name="Footer Placeholder 1004"/>
-          <p:cNvSpPr>
-            <a:spLocks noGrp="1"/>
-          </p:cNvSpPr>
-          <p:nvPr>
-            <p:ph type="ftr" sz="quarter" idx="3"/>
-          </p:nvPr>
-        </p:nvSpPr>
-        <p:spPr>
-          <a:xfrm>
-            <a:off x="192088" y="6392596"/>
-            <a:ext cx="1763922" cy="370422"/>
-          </a:xfrm>
-        </p:spPr>
-        <p:txBody>
-          <a:bodyPr/>
-          <a:lstStyle/>
-          <a:p>
-            <a:r>
-              <a:rPr lang="en-US" dirty="0"/>
-              <a:t>Generated with Sigrid</a:t>
-            </a:r>
-          </a:p>
-          <a:p>
-            <a:r>
-              <a:rPr lang="en-US" dirty="0"/>
-              <a:t>for Reportgeneratordemo</a:t>
-            </a:r>
-          </a:p>
-        </p:txBody>
-      </p:sp>
-      <p:sp>
-        <p:nvSpPr>
           <p:cNvPr id="1071" name="TextBox 1071"/>
           <p:cNvSpPr txBox="1"/>
           <p:nvPr/>
@@ -44683,8 +41652,8 @@
         </p:nvSpPr>
         <p:spPr>
           <a:xfrm>
-            <a:off x="381600" y="129568"/>
-            <a:ext cx="1663129" cy="228209"/>
+            <a:off x="381600" y="129599"/>
+            <a:ext cx="1663411" cy="228145"/>
           </a:xfrm>
         </p:spPr>
         <p:txBody>
@@ -44697,25 +41666,6 @@
               <a:rPr lang="en-US" dirty="0"/>
               <a:t>Open Source Health</a:t>
             </a:r>
-          </a:p>
-        </p:txBody>
-      </p:sp>
-      <p:sp>
-        <p:nvSpPr>
-          <p:cNvPr id="3" name="Content Placeholder 2"/>
-          <p:cNvSpPr>
-            <a:spLocks noGrp="1"/>
-          </p:cNvSpPr>
-          <p:nvPr>
-            <p:ph sz="quarter" idx="13"/>
-          </p:nvPr>
-        </p:nvSpPr>
-        <p:spPr/>
-        <p:txBody>
-          <a:bodyPr/>
-          <a:lstStyle/>
-          <a:p>
-            <a:endParaRPr/>
           </a:p>
         </p:txBody>
       </p:sp>
@@ -44745,63 +41695,35 @@
       </p:sp>
       <p:sp>
         <p:nvSpPr>
-          <p:cNvPr id="7" name="Rectangle 6">
+          <p:cNvPr id="22" name="Footer Placeholder 1004">
             <a:extLst>
               <a:ext uri="{FF2B5EF4-FFF2-40B4-BE49-F238E27FC236}">
-                <a16:creationId xmlns:a16="http://schemas.microsoft.com/office/drawing/2014/main" id="{4D956AE0-666A-B966-0B15-61A5E6C88F75}"/>
+                <a16:creationId xmlns:a16="http://schemas.microsoft.com/office/drawing/2014/main" id="{3003FB07-67E0-4E3E-208C-0F579A9ED44E}"/>
               </a:ext>
             </a:extLst>
           </p:cNvPr>
-          <p:cNvSpPr/>
-          <p:nvPr/>
+          <p:cNvSpPr>
+            <a:spLocks noGrp="1"/>
+          </p:cNvSpPr>
+          <p:nvPr>
+            <p:ph type="ftr" sz="quarter" idx="3"/>
+          </p:nvPr>
         </p:nvSpPr>
-        <p:spPr>
-          <a:xfrm>
-            <a:off x="0" y="1390132"/>
-            <a:ext cx="12192000" cy="4927867"/>
-          </a:xfrm>
-          <a:prstGeom prst="rect">
-            <a:avLst/>
-          </a:prstGeom>
-          <a:solidFill>
-            <a:schemeClr val="bg1"/>
-          </a:solidFill>
-          <a:ln>
-            <a:noFill/>
-          </a:ln>
-          <a:effectLst>
-            <a:outerShdw blurRad="190500" dist="38100" dir="2700000" algn="tl" rotWithShape="0">
-              <a:prstClr val="black">
-                <a:alpha val="15000"/>
-              </a:prstClr>
-            </a:outerShdw>
-          </a:effectLst>
-        </p:spPr>
-        <p:style>
-          <a:lnRef idx="2">
-            <a:schemeClr val="accent1">
-              <a:shade val="50000"/>
-            </a:schemeClr>
-          </a:lnRef>
-          <a:fillRef idx="1">
-            <a:schemeClr val="accent1"/>
-          </a:fillRef>
-          <a:effectRef idx="0">
-            <a:schemeClr val="accent1"/>
-          </a:effectRef>
-          <a:fontRef idx="minor">
-            <a:schemeClr val="lt1"/>
-          </a:fontRef>
-        </p:style>
+        <p:spPr/>
         <p:txBody>
-          <a:bodyPr lIns="731520" tIns="72000" rIns="108000" bIns="72000" rtlCol="0" anchor="ctr"/>
+          <a:bodyPr/>
           <a:lstStyle/>
           <a:p>
-            <a:endParaRPr lang="nl-NL" sz="1200" b="1" noProof="0" dirty="0">
-              <a:solidFill>
-                <a:schemeClr val="accent1"/>
-              </a:solidFill>
-            </a:endParaRPr>
+            <a:r>
+              <a:rPr lang="en-US" dirty="0"/>
+              <a:t>Generated with Sigrid</a:t>
+            </a:r>
+          </a:p>
+          <a:p>
+            <a:r>
+              <a:rPr lang="en-US" dirty="0"/>
+              <a:t>for Reportgeneratordemo</a:t>
+            </a:r>
           </a:p>
         </p:txBody>
       </p:sp>
@@ -45595,45 +42517,6 @@
           </p:txBody>
         </p:sp>
       </p:grpSp>
-      <p:sp>
-        <p:nvSpPr>
-          <p:cNvPr id="22" name="Footer Placeholder 1004">
-            <a:extLst>
-              <a:ext uri="{FF2B5EF4-FFF2-40B4-BE49-F238E27FC236}">
-                <a16:creationId xmlns:a16="http://schemas.microsoft.com/office/drawing/2014/main" id="{3003FB07-67E0-4E3E-208C-0F579A9ED44E}"/>
-              </a:ext>
-            </a:extLst>
-          </p:cNvPr>
-          <p:cNvSpPr>
-            <a:spLocks noGrp="1"/>
-          </p:cNvSpPr>
-          <p:nvPr>
-            <p:ph type="ftr" sz="quarter" idx="3"/>
-          </p:nvPr>
-        </p:nvSpPr>
-        <p:spPr>
-          <a:xfrm>
-            <a:off x="192088" y="6392596"/>
-            <a:ext cx="1763922" cy="370422"/>
-          </a:xfrm>
-        </p:spPr>
-        <p:txBody>
-          <a:bodyPr/>
-          <a:lstStyle/>
-          <a:p>
-            <a:r>
-              <a:rPr lang="en-US" dirty="0"/>
-              <a:t>Generated with Sigrid</a:t>
-            </a:r>
-          </a:p>
-          <a:p>
-            <a:r>
-              <a:rPr lang="en-US" dirty="0"/>
-              <a:t>for Reportgeneratordemo</a:t>
-            </a:r>
-          </a:p>
-        </p:txBody>
-      </p:sp>
       <p:pic>
         <p:nvPicPr>
           <p:cNvPr id="1072" name="Picture 1071" descr="image.png"/>
@@ -45700,8 +42583,8 @@
         </p:nvSpPr>
         <p:spPr>
           <a:xfrm>
-            <a:off x="381600" y="129568"/>
-            <a:ext cx="1410176" cy="228209"/>
+            <a:off x="381600" y="129599"/>
+            <a:ext cx="1410176" cy="228145"/>
           </a:xfrm>
         </p:spPr>
         <p:txBody>
@@ -45714,25 +42597,6 @@
               <a:rPr lang="en-US" dirty="0"/>
               <a:t>Maintainability</a:t>
             </a:r>
-          </a:p>
-        </p:txBody>
-      </p:sp>
-      <p:sp>
-        <p:nvSpPr>
-          <p:cNvPr id="3" name="Content Placeholder 2"/>
-          <p:cNvSpPr>
-            <a:spLocks noGrp="1"/>
-          </p:cNvSpPr>
-          <p:nvPr>
-            <p:ph sz="quarter" idx="13"/>
-          </p:nvPr>
-        </p:nvSpPr>
-        <p:spPr/>
-        <p:txBody>
-          <a:bodyPr/>
-          <a:lstStyle/>
-          <a:p>
-            <a:endParaRPr/>
           </a:p>
         </p:txBody>
       </p:sp>
@@ -45762,63 +42626,29 @@
       </p:sp>
       <p:sp>
         <p:nvSpPr>
-          <p:cNvPr id="7" name="Rectangle 6">
-            <a:extLst>
-              <a:ext uri="{FF2B5EF4-FFF2-40B4-BE49-F238E27FC236}">
-                <a16:creationId xmlns:a16="http://schemas.microsoft.com/office/drawing/2014/main" id="{4D956AE0-666A-B966-0B15-61A5E6C88F75}"/>
-              </a:ext>
-            </a:extLst>
-          </p:cNvPr>
-          <p:cNvSpPr/>
-          <p:nvPr/>
+          <p:cNvPr id="1004" name="Footer Placeholder 1004"/>
+          <p:cNvSpPr>
+            <a:spLocks noGrp="1"/>
+          </p:cNvSpPr>
+          <p:nvPr>
+            <p:ph type="ftr" sz="quarter" idx="3"/>
+          </p:nvPr>
         </p:nvSpPr>
-        <p:spPr>
-          <a:xfrm>
-            <a:off x="0" y="1390132"/>
-            <a:ext cx="12192000" cy="4927867"/>
-          </a:xfrm>
-          <a:prstGeom prst="rect">
-            <a:avLst/>
-          </a:prstGeom>
-          <a:solidFill>
-            <a:schemeClr val="bg1"/>
-          </a:solidFill>
-          <a:ln>
-            <a:noFill/>
-          </a:ln>
-          <a:effectLst>
-            <a:outerShdw blurRad="190500" dist="38100" dir="2700000" algn="tl" rotWithShape="0">
-              <a:prstClr val="black">
-                <a:alpha val="15000"/>
-              </a:prstClr>
-            </a:outerShdw>
-          </a:effectLst>
-        </p:spPr>
-        <p:style>
-          <a:lnRef idx="2">
-            <a:schemeClr val="accent1">
-              <a:shade val="50000"/>
-            </a:schemeClr>
-          </a:lnRef>
-          <a:fillRef idx="1">
-            <a:schemeClr val="accent1"/>
-          </a:fillRef>
-          <a:effectRef idx="0">
-            <a:schemeClr val="accent1"/>
-          </a:effectRef>
-          <a:fontRef idx="minor">
-            <a:schemeClr val="lt1"/>
-          </a:fontRef>
-        </p:style>
+        <p:spPr/>
         <p:txBody>
-          <a:bodyPr lIns="731520" tIns="72000" rIns="108000" bIns="72000" rtlCol="0" anchor="ctr"/>
+          <a:bodyPr/>
           <a:lstStyle/>
           <a:p>
-            <a:endParaRPr lang="nl-NL" sz="1200" b="1" noProof="0" dirty="0">
-              <a:solidFill>
-                <a:schemeClr val="accent1"/>
-              </a:solidFill>
-            </a:endParaRPr>
+            <a:r>
+              <a:rPr lang="en-US" dirty="0"/>
+              <a:t>Generated with Sigrid</a:t>
+            </a:r>
+          </a:p>
+          <a:p>
+            <a:r>
+              <a:rPr lang="en-US" dirty="0"/>
+              <a:t>for Reportgeneratordemo</a:t>
+            </a:r>
           </a:p>
         </p:txBody>
       </p:sp>
@@ -46349,39 +43179,6 @@
       </p:grpSp>
       <p:sp>
         <p:nvSpPr>
-          <p:cNvPr id="1004" name="Footer Placeholder 1004"/>
-          <p:cNvSpPr>
-            <a:spLocks noGrp="1"/>
-          </p:cNvSpPr>
-          <p:nvPr>
-            <p:ph type="ftr" sz="quarter" idx="3"/>
-          </p:nvPr>
-        </p:nvSpPr>
-        <p:spPr>
-          <a:xfrm>
-            <a:off x="192088" y="6392596"/>
-            <a:ext cx="1763922" cy="370422"/>
-          </a:xfrm>
-        </p:spPr>
-        <p:txBody>
-          <a:bodyPr/>
-          <a:lstStyle/>
-          <a:p>
-            <a:r>
-              <a:rPr lang="en-US" dirty="0"/>
-              <a:t>Generated with Sigrid</a:t>
-            </a:r>
-          </a:p>
-          <a:p>
-            <a:r>
-              <a:rPr lang="en-US" dirty="0"/>
-              <a:t>for Reportgeneratordemo</a:t>
-            </a:r>
-          </a:p>
-        </p:txBody>
-      </p:sp>
-      <p:sp>
-        <p:nvSpPr>
           <p:cNvPr id="1071" name="TextBox 1071"/>
           <p:cNvSpPr txBox="1"/>
           <p:nvPr/>
@@ -46621,8 +43418,8 @@
         </p:nvSpPr>
         <p:spPr>
           <a:xfrm>
-            <a:off x="381600" y="129568"/>
-            <a:ext cx="1410176" cy="228209"/>
+            <a:off x="381600" y="129599"/>
+            <a:ext cx="1410176" cy="228145"/>
           </a:xfrm>
         </p:spPr>
         <p:txBody>
@@ -46635,25 +43432,6 @@
               <a:rPr lang="en-US" dirty="0"/>
               <a:t>Maintainability</a:t>
             </a:r>
-          </a:p>
-        </p:txBody>
-      </p:sp>
-      <p:sp>
-        <p:nvSpPr>
-          <p:cNvPr id="3" name="Content Placeholder 2"/>
-          <p:cNvSpPr>
-            <a:spLocks noGrp="1"/>
-          </p:cNvSpPr>
-          <p:nvPr>
-            <p:ph sz="quarter" idx="13"/>
-          </p:nvPr>
-        </p:nvSpPr>
-        <p:spPr/>
-        <p:txBody>
-          <a:bodyPr/>
-          <a:lstStyle/>
-          <a:p>
-            <a:endParaRPr/>
           </a:p>
         </p:txBody>
       </p:sp>
@@ -46683,63 +43461,29 @@
       </p:sp>
       <p:sp>
         <p:nvSpPr>
-          <p:cNvPr id="7" name="Rectangle 6">
-            <a:extLst>
-              <a:ext uri="{FF2B5EF4-FFF2-40B4-BE49-F238E27FC236}">
-                <a16:creationId xmlns:a16="http://schemas.microsoft.com/office/drawing/2014/main" id="{4D956AE0-666A-B966-0B15-61A5E6C88F75}"/>
-              </a:ext>
-            </a:extLst>
-          </p:cNvPr>
-          <p:cNvSpPr/>
-          <p:nvPr/>
+          <p:cNvPr id="2004" name="Footer Placeholder 2004"/>
+          <p:cNvSpPr>
+            <a:spLocks noGrp="1"/>
+          </p:cNvSpPr>
+          <p:nvPr>
+            <p:ph type="ftr" sz="quarter" idx="3"/>
+          </p:nvPr>
         </p:nvSpPr>
-        <p:spPr>
-          <a:xfrm>
-            <a:off x="0" y="1390132"/>
-            <a:ext cx="12192000" cy="4927867"/>
-          </a:xfrm>
-          <a:prstGeom prst="rect">
-            <a:avLst/>
-          </a:prstGeom>
-          <a:solidFill>
-            <a:schemeClr val="bg1"/>
-          </a:solidFill>
-          <a:ln>
-            <a:noFill/>
-          </a:ln>
-          <a:effectLst>
-            <a:outerShdw blurRad="190500" dist="38100" dir="2700000" algn="tl" rotWithShape="0">
-              <a:prstClr val="black">
-                <a:alpha val="15000"/>
-              </a:prstClr>
-            </a:outerShdw>
-          </a:effectLst>
-        </p:spPr>
-        <p:style>
-          <a:lnRef idx="2">
-            <a:schemeClr val="accent1">
-              <a:shade val="50000"/>
-            </a:schemeClr>
-          </a:lnRef>
-          <a:fillRef idx="1">
-            <a:schemeClr val="accent1"/>
-          </a:fillRef>
-          <a:effectRef idx="0">
-            <a:schemeClr val="accent1"/>
-          </a:effectRef>
-          <a:fontRef idx="minor">
-            <a:schemeClr val="lt1"/>
-          </a:fontRef>
-        </p:style>
+        <p:spPr/>
         <p:txBody>
-          <a:bodyPr lIns="731520" tIns="72000" rIns="108000" bIns="72000" rtlCol="0" anchor="ctr"/>
+          <a:bodyPr/>
           <a:lstStyle/>
           <a:p>
-            <a:endParaRPr lang="nl-NL" sz="1200" b="1" noProof="0" dirty="0">
-              <a:solidFill>
-                <a:schemeClr val="accent1"/>
-              </a:solidFill>
-            </a:endParaRPr>
+            <a:r>
+              <a:rPr lang="en-US" dirty="0"/>
+              <a:t>Generated with Sigrid</a:t>
+            </a:r>
+          </a:p>
+          <a:p>
+            <a:r>
+              <a:rPr lang="en-US" dirty="0"/>
+              <a:t>for Reportgeneratordemo</a:t>
+            </a:r>
           </a:p>
         </p:txBody>
       </p:sp>
@@ -47079,39 +43823,6 @@
             <a:r>
               <a:rPr lang="en-US" sz="800" dirty="0"/>
               <a:t>★</a:t>
-            </a:r>
-          </a:p>
-        </p:txBody>
-      </p:sp>
-      <p:sp>
-        <p:nvSpPr>
-          <p:cNvPr id="2004" name="Footer Placeholder 2004"/>
-          <p:cNvSpPr>
-            <a:spLocks noGrp="1"/>
-          </p:cNvSpPr>
-          <p:nvPr>
-            <p:ph type="ftr" sz="quarter" idx="3"/>
-          </p:nvPr>
-        </p:nvSpPr>
-        <p:spPr>
-          <a:xfrm>
-            <a:off x="192088" y="6392596"/>
-            <a:ext cx="1763922" cy="370422"/>
-          </a:xfrm>
-        </p:spPr>
-        <p:txBody>
-          <a:bodyPr/>
-          <a:lstStyle/>
-          <a:p>
-            <a:r>
-              <a:rPr lang="en-US" dirty="0"/>
-              <a:t>Generated with Sigrid</a:t>
-            </a:r>
-          </a:p>
-          <a:p>
-            <a:r>
-              <a:rPr lang="en-US" dirty="0"/>
-              <a:t>for Reportgeneratordemo</a:t>
             </a:r>
           </a:p>
         </p:txBody>
@@ -47208,7 +43919,21 @@
           <a:p>
             <a:pPr indent="-283845"/>
             <a:r>
-              <a:rPr lang="en-GB" sz="1550" dirty="0">
+              <a:rPr lang="en-GB" sz="1550" dirty="0" err="1">
+                <a:ea typeface="Calibri"/>
+                <a:cs typeface="Calibri"/>
+              </a:rPr>
+              <a:t>Unit Size has remained stable in score (+0.00★) on average across the portfolio.</a:t>
+            </a:r>
+            <a:endParaRPr lang="en-GB" sz="1550" dirty="0">
+              <a:ea typeface="Calibri"/>
+              <a:cs typeface="Calibri"/>
+            </a:endParaRPr>
+          </a:p>
+          <a:p>
+            <a:pPr indent="-283845"/>
+            <a:r>
+              <a:rPr lang="en-GB" sz="1550" dirty="0" err="1">
                 <a:ea typeface="Calibri"/>
                 <a:cs typeface="Calibri"/>
               </a:rPr>
@@ -47293,8 +44018,8 @@
         </p:nvSpPr>
         <p:spPr>
           <a:xfrm>
-            <a:off x="381600" y="129568"/>
-            <a:ext cx="1410176" cy="228209"/>
+            <a:off x="381600" y="129599"/>
+            <a:ext cx="1410176" cy="228145"/>
           </a:xfrm>
         </p:spPr>
         <p:txBody>
@@ -47307,25 +44032,6 @@
               <a:rPr lang="en-US" dirty="0"/>
               <a:t>Maintainability</a:t>
             </a:r>
-          </a:p>
-        </p:txBody>
-      </p:sp>
-      <p:sp>
-        <p:nvSpPr>
-          <p:cNvPr id="3" name="Content Placeholder 2"/>
-          <p:cNvSpPr>
-            <a:spLocks noGrp="1"/>
-          </p:cNvSpPr>
-          <p:nvPr>
-            <p:ph sz="quarter" idx="13"/>
-          </p:nvPr>
-        </p:nvSpPr>
-        <p:spPr/>
-        <p:txBody>
-          <a:bodyPr/>
-          <a:lstStyle/>
-          <a:p>
-            <a:endParaRPr/>
           </a:p>
         </p:txBody>
       </p:sp>
@@ -47355,63 +44061,29 @@
       </p:sp>
       <p:sp>
         <p:nvSpPr>
-          <p:cNvPr id="7" name="Rectangle 6">
-            <a:extLst>
-              <a:ext uri="{FF2B5EF4-FFF2-40B4-BE49-F238E27FC236}">
-                <a16:creationId xmlns:a16="http://schemas.microsoft.com/office/drawing/2014/main" id="{4D956AE0-666A-B966-0B15-61A5E6C88F75}"/>
-              </a:ext>
-            </a:extLst>
-          </p:cNvPr>
-          <p:cNvSpPr/>
-          <p:nvPr/>
+          <p:cNvPr id="1004" name="Footer Placeholder 1004"/>
+          <p:cNvSpPr>
+            <a:spLocks noGrp="1"/>
+          </p:cNvSpPr>
+          <p:nvPr>
+            <p:ph type="ftr" sz="quarter" idx="3"/>
+          </p:nvPr>
         </p:nvSpPr>
-        <p:spPr>
-          <a:xfrm>
-            <a:off x="0" y="1390132"/>
-            <a:ext cx="12192000" cy="4927867"/>
-          </a:xfrm>
-          <a:prstGeom prst="rect">
-            <a:avLst/>
-          </a:prstGeom>
-          <a:solidFill>
-            <a:schemeClr val="bg1"/>
-          </a:solidFill>
-          <a:ln>
-            <a:noFill/>
-          </a:ln>
-          <a:effectLst>
-            <a:outerShdw blurRad="190500" dist="38100" dir="2700000" algn="tl" rotWithShape="0">
-              <a:prstClr val="black">
-                <a:alpha val="15000"/>
-              </a:prstClr>
-            </a:outerShdw>
-          </a:effectLst>
-        </p:spPr>
-        <p:style>
-          <a:lnRef idx="2">
-            <a:schemeClr val="accent1">
-              <a:shade val="50000"/>
-            </a:schemeClr>
-          </a:lnRef>
-          <a:fillRef idx="1">
-            <a:schemeClr val="accent1"/>
-          </a:fillRef>
-          <a:effectRef idx="0">
-            <a:schemeClr val="accent1"/>
-          </a:effectRef>
-          <a:fontRef idx="minor">
-            <a:schemeClr val="lt1"/>
-          </a:fontRef>
-        </p:style>
+        <p:spPr/>
         <p:txBody>
-          <a:bodyPr lIns="731520" tIns="72000" rIns="108000" bIns="72000" rtlCol="0" anchor="ctr"/>
+          <a:bodyPr/>
           <a:lstStyle/>
           <a:p>
-            <a:endParaRPr lang="nl-NL" sz="1200" b="1" noProof="0" dirty="0">
-              <a:solidFill>
-                <a:schemeClr val="accent1"/>
-              </a:solidFill>
-            </a:endParaRPr>
+            <a:r>
+              <a:rPr lang="en-US" dirty="0"/>
+              <a:t>Generated with Sigrid</a:t>
+            </a:r>
+          </a:p>
+          <a:p>
+            <a:r>
+              <a:rPr lang="en-US" dirty="0"/>
+              <a:t>for Reportgeneratordemo</a:t>
+            </a:r>
           </a:p>
         </p:txBody>
       </p:sp>
@@ -47942,39 +44614,6 @@
       </p:grpSp>
       <p:sp>
         <p:nvSpPr>
-          <p:cNvPr id="1004" name="Footer Placeholder 1004"/>
-          <p:cNvSpPr>
-            <a:spLocks noGrp="1"/>
-          </p:cNvSpPr>
-          <p:nvPr>
-            <p:ph type="ftr" sz="quarter" idx="3"/>
-          </p:nvPr>
-        </p:nvSpPr>
-        <p:spPr>
-          <a:xfrm>
-            <a:off x="192088" y="6392596"/>
-            <a:ext cx="1763922" cy="370422"/>
-          </a:xfrm>
-        </p:spPr>
-        <p:txBody>
-          <a:bodyPr/>
-          <a:lstStyle/>
-          <a:p>
-            <a:r>
-              <a:rPr lang="en-US" dirty="0"/>
-              <a:t>Generated with Sigrid</a:t>
-            </a:r>
-          </a:p>
-          <a:p>
-            <a:r>
-              <a:rPr lang="en-US" dirty="0"/>
-              <a:t>for Reportgeneratordemo</a:t>
-            </a:r>
-          </a:p>
-        </p:txBody>
-      </p:sp>
-      <p:sp>
-        <p:nvSpPr>
           <p:cNvPr id="1071" name="TextBox 1071"/>
           <p:cNvSpPr txBox="1"/>
           <p:nvPr/>
@@ -48214,8 +44853,8 @@
         </p:nvSpPr>
         <p:spPr>
           <a:xfrm>
-            <a:off x="381600" y="129568"/>
-            <a:ext cx="1410176" cy="228209"/>
+            <a:off x="381600" y="129599"/>
+            <a:ext cx="1410176" cy="228145"/>
           </a:xfrm>
         </p:spPr>
         <p:txBody>
@@ -48228,25 +44867,6 @@
               <a:rPr lang="en-US" dirty="0"/>
               <a:t>Maintainability</a:t>
             </a:r>
-          </a:p>
-        </p:txBody>
-      </p:sp>
-      <p:sp>
-        <p:nvSpPr>
-          <p:cNvPr id="3" name="Content Placeholder 2"/>
-          <p:cNvSpPr>
-            <a:spLocks noGrp="1"/>
-          </p:cNvSpPr>
-          <p:nvPr>
-            <p:ph sz="quarter" idx="13"/>
-          </p:nvPr>
-        </p:nvSpPr>
-        <p:spPr/>
-        <p:txBody>
-          <a:bodyPr/>
-          <a:lstStyle/>
-          <a:p>
-            <a:endParaRPr/>
           </a:p>
         </p:txBody>
       </p:sp>
@@ -48276,63 +44896,29 @@
       </p:sp>
       <p:sp>
         <p:nvSpPr>
-          <p:cNvPr id="7" name="Rectangle 6">
-            <a:extLst>
-              <a:ext uri="{FF2B5EF4-FFF2-40B4-BE49-F238E27FC236}">
-                <a16:creationId xmlns:a16="http://schemas.microsoft.com/office/drawing/2014/main" id="{4D956AE0-666A-B966-0B15-61A5E6C88F75}"/>
-              </a:ext>
-            </a:extLst>
-          </p:cNvPr>
-          <p:cNvSpPr/>
-          <p:nvPr/>
+          <p:cNvPr id="2004" name="Footer Placeholder 2004"/>
+          <p:cNvSpPr>
+            <a:spLocks noGrp="1"/>
+          </p:cNvSpPr>
+          <p:nvPr>
+            <p:ph type="ftr" sz="quarter" idx="3"/>
+          </p:nvPr>
         </p:nvSpPr>
-        <p:spPr>
-          <a:xfrm>
-            <a:off x="0" y="1390132"/>
-            <a:ext cx="12192000" cy="4927867"/>
-          </a:xfrm>
-          <a:prstGeom prst="rect">
-            <a:avLst/>
-          </a:prstGeom>
-          <a:solidFill>
-            <a:schemeClr val="bg1"/>
-          </a:solidFill>
-          <a:ln>
-            <a:noFill/>
-          </a:ln>
-          <a:effectLst>
-            <a:outerShdw blurRad="190500" dist="38100" dir="2700000" algn="tl" rotWithShape="0">
-              <a:prstClr val="black">
-                <a:alpha val="15000"/>
-              </a:prstClr>
-            </a:outerShdw>
-          </a:effectLst>
-        </p:spPr>
-        <p:style>
-          <a:lnRef idx="2">
-            <a:schemeClr val="accent1">
-              <a:shade val="50000"/>
-            </a:schemeClr>
-          </a:lnRef>
-          <a:fillRef idx="1">
-            <a:schemeClr val="accent1"/>
-          </a:fillRef>
-          <a:effectRef idx="0">
-            <a:schemeClr val="accent1"/>
-          </a:effectRef>
-          <a:fontRef idx="minor">
-            <a:schemeClr val="lt1"/>
-          </a:fontRef>
-        </p:style>
+        <p:spPr/>
         <p:txBody>
-          <a:bodyPr lIns="731520" tIns="72000" rIns="108000" bIns="72000" rtlCol="0" anchor="ctr"/>
+          <a:bodyPr/>
           <a:lstStyle/>
           <a:p>
-            <a:endParaRPr lang="nl-NL" sz="1200" b="1" noProof="0" dirty="0">
-              <a:solidFill>
-                <a:schemeClr val="accent1"/>
-              </a:solidFill>
-            </a:endParaRPr>
+            <a:r>
+              <a:rPr lang="en-US" dirty="0"/>
+              <a:t>Generated with Sigrid</a:t>
+            </a:r>
+          </a:p>
+          <a:p>
+            <a:r>
+              <a:rPr lang="en-US" dirty="0"/>
+              <a:t>for Reportgeneratordemo</a:t>
+            </a:r>
           </a:p>
         </p:txBody>
       </p:sp>
@@ -48672,39 +45258,6 @@
             <a:r>
               <a:rPr lang="en-US" sz="800" dirty="0"/>
               <a:t>★</a:t>
-            </a:r>
-          </a:p>
-        </p:txBody>
-      </p:sp>
-      <p:sp>
-        <p:nvSpPr>
-          <p:cNvPr id="2004" name="Footer Placeholder 2004"/>
-          <p:cNvSpPr>
-            <a:spLocks noGrp="1"/>
-          </p:cNvSpPr>
-          <p:nvPr>
-            <p:ph type="ftr" sz="quarter" idx="3"/>
-          </p:nvPr>
-        </p:nvSpPr>
-        <p:spPr>
-          <a:xfrm>
-            <a:off x="192088" y="6392596"/>
-            <a:ext cx="1763922" cy="370422"/>
-          </a:xfrm>
-        </p:spPr>
-        <p:txBody>
-          <a:bodyPr/>
-          <a:lstStyle/>
-          <a:p>
-            <a:r>
-              <a:rPr lang="en-US" dirty="0"/>
-              <a:t>Generated with Sigrid</a:t>
-            </a:r>
-          </a:p>
-          <a:p>
-            <a:r>
-              <a:rPr lang="en-US" dirty="0"/>
-              <a:t>for Reportgeneratordemo</a:t>
             </a:r>
           </a:p>
         </p:txBody>
@@ -48801,7 +45354,21 @@
           <a:p>
             <a:pPr indent="-283845"/>
             <a:r>
-              <a:rPr lang="en-GB" sz="1550" dirty="0">
+              <a:rPr lang="en-GB" sz="1550" dirty="0" err="1">
+                <a:ea typeface="Calibri"/>
+                <a:cs typeface="Calibri"/>
+              </a:rPr>
+              <a:t>Unit Complexity has decreased in score by -0.01★ on average across the portfolio.</a:t>
+            </a:r>
+            <a:endParaRPr lang="en-GB" sz="1550" dirty="0">
+              <a:ea typeface="Calibri"/>
+              <a:cs typeface="Calibri"/>
+            </a:endParaRPr>
+          </a:p>
+          <a:p>
+            <a:pPr indent="-283845"/>
+            <a:r>
+              <a:rPr lang="en-GB" sz="1550" dirty="0" err="1">
                 <a:ea typeface="Calibri"/>
                 <a:cs typeface="Calibri"/>
               </a:rPr>
@@ -48886,8 +45453,8 @@
         </p:nvSpPr>
         <p:spPr>
           <a:xfrm>
-            <a:off x="381600" y="129568"/>
-            <a:ext cx="1410176" cy="228209"/>
+            <a:off x="381600" y="129599"/>
+            <a:ext cx="1410176" cy="228145"/>
           </a:xfrm>
         </p:spPr>
         <p:txBody>
@@ -48900,25 +45467,6 @@
               <a:rPr lang="en-US" dirty="0"/>
               <a:t>Maintainability</a:t>
             </a:r>
-          </a:p>
-        </p:txBody>
-      </p:sp>
-      <p:sp>
-        <p:nvSpPr>
-          <p:cNvPr id="3" name="Content Placeholder 2"/>
-          <p:cNvSpPr>
-            <a:spLocks noGrp="1"/>
-          </p:cNvSpPr>
-          <p:nvPr>
-            <p:ph sz="quarter" idx="13"/>
-          </p:nvPr>
-        </p:nvSpPr>
-        <p:spPr/>
-        <p:txBody>
-          <a:bodyPr/>
-          <a:lstStyle/>
-          <a:p>
-            <a:endParaRPr/>
           </a:p>
         </p:txBody>
       </p:sp>
@@ -48948,63 +45496,29 @@
       </p:sp>
       <p:sp>
         <p:nvSpPr>
-          <p:cNvPr id="7" name="Rectangle 6">
-            <a:extLst>
-              <a:ext uri="{FF2B5EF4-FFF2-40B4-BE49-F238E27FC236}">
-                <a16:creationId xmlns:a16="http://schemas.microsoft.com/office/drawing/2014/main" id="{4D956AE0-666A-B966-0B15-61A5E6C88F75}"/>
-              </a:ext>
-            </a:extLst>
-          </p:cNvPr>
-          <p:cNvSpPr/>
-          <p:nvPr/>
+          <p:cNvPr id="1004" name="Footer Placeholder 1004"/>
+          <p:cNvSpPr>
+            <a:spLocks noGrp="1"/>
+          </p:cNvSpPr>
+          <p:nvPr>
+            <p:ph type="ftr" sz="quarter" idx="3"/>
+          </p:nvPr>
         </p:nvSpPr>
-        <p:spPr>
-          <a:xfrm>
-            <a:off x="0" y="1390132"/>
-            <a:ext cx="12192000" cy="4927867"/>
-          </a:xfrm>
-          <a:prstGeom prst="rect">
-            <a:avLst/>
-          </a:prstGeom>
-          <a:solidFill>
-            <a:schemeClr val="bg1"/>
-          </a:solidFill>
-          <a:ln>
-            <a:noFill/>
-          </a:ln>
-          <a:effectLst>
-            <a:outerShdw blurRad="190500" dist="38100" dir="2700000" algn="tl" rotWithShape="0">
-              <a:prstClr val="black">
-                <a:alpha val="15000"/>
-              </a:prstClr>
-            </a:outerShdw>
-          </a:effectLst>
-        </p:spPr>
-        <p:style>
-          <a:lnRef idx="2">
-            <a:schemeClr val="accent1">
-              <a:shade val="50000"/>
-            </a:schemeClr>
-          </a:lnRef>
-          <a:fillRef idx="1">
-            <a:schemeClr val="accent1"/>
-          </a:fillRef>
-          <a:effectRef idx="0">
-            <a:schemeClr val="accent1"/>
-          </a:effectRef>
-          <a:fontRef idx="minor">
-            <a:schemeClr val="lt1"/>
-          </a:fontRef>
-        </p:style>
+        <p:spPr/>
         <p:txBody>
-          <a:bodyPr lIns="731520" tIns="72000" rIns="108000" bIns="72000" rtlCol="0" anchor="ctr"/>
+          <a:bodyPr/>
           <a:lstStyle/>
           <a:p>
-            <a:endParaRPr lang="nl-NL" sz="1200" b="1" noProof="0" dirty="0">
-              <a:solidFill>
-                <a:schemeClr val="accent1"/>
-              </a:solidFill>
-            </a:endParaRPr>
+            <a:r>
+              <a:rPr lang="en-US" dirty="0"/>
+              <a:t>Generated with Sigrid</a:t>
+            </a:r>
+          </a:p>
+          <a:p>
+            <a:r>
+              <a:rPr lang="en-US" dirty="0"/>
+              <a:t>for Reportgeneratordemo</a:t>
+            </a:r>
           </a:p>
         </p:txBody>
       </p:sp>
@@ -49533,39 +46047,6 @@
           </p:txBody>
         </p:sp>
       </p:grpSp>
-      <p:sp>
-        <p:nvSpPr>
-          <p:cNvPr id="1004" name="Footer Placeholder 1004"/>
-          <p:cNvSpPr>
-            <a:spLocks noGrp="1"/>
-          </p:cNvSpPr>
-          <p:nvPr>
-            <p:ph type="ftr" sz="quarter" idx="3"/>
-          </p:nvPr>
-        </p:nvSpPr>
-        <p:spPr>
-          <a:xfrm>
-            <a:off x="192088" y="6392596"/>
-            <a:ext cx="1763922" cy="370422"/>
-          </a:xfrm>
-        </p:spPr>
-        <p:txBody>
-          <a:bodyPr/>
-          <a:lstStyle/>
-          <a:p>
-            <a:r>
-              <a:rPr lang="en-US" dirty="0"/>
-              <a:t>Generated with Sigrid</a:t>
-            </a:r>
-          </a:p>
-          <a:p>
-            <a:r>
-              <a:rPr lang="en-US" dirty="0"/>
-              <a:t>for Reportgeneratordemo</a:t>
-            </a:r>
-          </a:p>
-        </p:txBody>
-      </p:sp>
       <p:sp>
         <p:nvSpPr>
           <p:cNvPr id="1071" name="TextBox 1071"/>
